--- a/docs/content/05-teaching-resources/slides/core/13-emerging-issues-and-technologies.pptx
+++ b/docs/content/05-teaching-resources/slides/core/13-emerging-issues-and-technologies.pptx
@@ -10,11 +10,19 @@
     <p:sldId id="258" r:id="rId9"/>
     <p:sldId id="259" r:id="rId10"/>
     <p:sldId id="260" r:id="rId11"/>
-    <p:sldId id="261" r:id="rId12"/>
+    <p:sldId id="261" r:id="rId13"/>
     <p:sldId id="262" r:id="rId14"/>
     <p:sldId id="263" r:id="rId15"/>
     <p:sldId id="264" r:id="rId16"/>
     <p:sldId id="265" r:id="rId17"/>
+    <p:sldId id="266" r:id="rId18"/>
+    <p:sldId id="267" r:id="rId19"/>
+    <p:sldId id="268" r:id="rId20"/>
+    <p:sldId id="269" r:id="rId21"/>
+    <p:sldId id="270" r:id="rId22"/>
+    <p:sldId id="271" r:id="rId23"/>
+    <p:sldId id="272" r:id="rId24"/>
+    <p:sldId id="273" r:id="rId25"/>
   </p:sldIdLst>
   <p:sldSz cx="12191695" cy="6858000" type="screen4x3"/>
   <p:notesSz cx="6858000" cy="9144000"/>
@@ -511,7 +519,22 @@
           <a:lstStyle/>
           <a:p>
             <a:r>
-              <a:t>Students should be able to judge how these technologies interrelate, e.g. AI plus drones plus IoT.</a:t>
+              <a:t>Answers:</a:t>
+            </a:r>
+          </a:p>
+          <a:p>
+            <a:r>
+              <a:t>1. E.g. remote working, staff monitoring, automation.</a:t>
+            </a:r>
+          </a:p>
+          <a:p>
+            <a:r>
+              <a:t>2. Being left out through lack of skills, equipment or connectivity.</a:t>
+            </a:r>
+          </a:p>
+          <a:p>
+            <a:r>
+              <a:t>3. E.g. better access to information and services.</a:t>
             </a:r>
           </a:p>
         </p:txBody>
@@ -581,7 +604,22 @@
           <a:lstStyle/>
           <a:p>
             <a:r>
-              <a:t>Give students a few minutes to answer on mini whiteboards or paper, then reveal the answers on the next slide.</a:t>
+              <a:t>Answers:</a:t>
+            </a:r>
+          </a:p>
+          <a:p>
+            <a:r>
+              <a:t>1. Everyone being able to access and use digital services fairly.</a:t>
+            </a:r>
+          </a:p>
+          <a:p>
+            <a:r>
+              <a:t>2. Any two: age, digital skills, literacy, culture, accessibility needs.</a:t>
+            </a:r>
+          </a:p>
+          <a:p>
+            <a:r>
+              <a:t>3. Yes, it is required by regulations.</a:t>
             </a:r>
           </a:p>
         </p:txBody>
@@ -651,7 +689,22 @@
           <a:lstStyle/>
           <a:p>
             <a:r>
-              <a:t>Talk through any answers the class found difficult.</a:t>
+              <a:t>Answers:</a:t>
+            </a:r>
+          </a:p>
+          <a:p>
+            <a:r>
+              <a:t>1. Processing data close to where it's collected rather than centrally.</a:t>
+            </a:r>
+          </a:p>
+          <a:p>
+            <a:r>
+              <a:t>2. It could break current encryption.</a:t>
+            </a:r>
+          </a:p>
+          <a:p>
+            <a:r>
+              <a:t>3. Creates new content such as text, images or code.</a:t>
             </a:r>
           </a:p>
         </p:txBody>
@@ -677,6 +730,301 @@
 </file>
 
 <file path=ppt/notesSlides/notesSlide4.xml><?xml version="1.0" encoding="utf-8"?>
+<p:notes xmlns:a="http://schemas.openxmlformats.org/drawingml/2006/main" xmlns:p="http://schemas.openxmlformats.org/presentationml/2006/main" xmlns:r="http://schemas.openxmlformats.org/officeDocument/2006/relationships">
+  <p:cSld>
+    <p:spTree>
+      <p:nvGrpSpPr>
+        <p:cNvPr id="1" name=""/>
+        <p:cNvGrpSpPr/>
+        <p:nvPr/>
+      </p:nvGrpSpPr>
+      <p:grpSpPr>
+        <a:xfrm>
+          <a:off x="0" y="0"/>
+          <a:ext cx="0" cy="0"/>
+          <a:chOff x="0" y="0"/>
+          <a:chExt cx="0" cy="0"/>
+        </a:xfrm>
+      </p:grpSpPr>
+      <p:sp>
+        <p:nvSpPr>
+          <p:cNvPr id="2" name="Slide Image Placeholder 1"/>
+          <p:cNvSpPr>
+            <a:spLocks noGrp="1"/>
+          </p:cNvSpPr>
+          <p:nvPr>
+            <p:ph type="sldImg" idx="2"/>
+          </p:nvPr>
+        </p:nvSpPr>
+        <p:spPr/>
+      </p:sp>
+      <p:sp>
+        <p:nvSpPr>
+          <p:cNvPr id="3" name="Notes Placeholder 2"/>
+          <p:cNvSpPr>
+            <a:spLocks noGrp="1"/>
+          </p:cNvSpPr>
+          <p:nvPr>
+            <p:ph type="body" idx="3" sz="quarter"/>
+          </p:nvPr>
+        </p:nvSpPr>
+        <p:spPr/>
+        <p:txBody>
+          <a:bodyPr/>
+          <a:lstStyle/>
+          <a:p>
+            <a:r>
+              <a:t>Students should be able to judge how these technologies interrelate, e.g. AI plus drones plus IoT.</a:t>
+            </a:r>
+          </a:p>
+        </p:txBody>
+      </p:sp>
+      <p:sp>
+        <p:nvSpPr>
+          <p:cNvPr id="4" name="Slide Number Placeholder 3"/>
+          <p:cNvSpPr>
+            <a:spLocks noGrp="1"/>
+          </p:cNvSpPr>
+          <p:nvPr>
+            <p:ph type="sldNum" idx="5" sz="quarter"/>
+          </p:nvPr>
+        </p:nvSpPr>
+        <p:spPr/>
+      </p:sp>
+    </p:spTree>
+  </p:cSld>
+  <p:clrMapOvr>
+    <a:masterClrMapping/>
+  </p:clrMapOvr>
+</p:notes>
+</file>
+
+<file path=ppt/notesSlides/notesSlide5.xml><?xml version="1.0" encoding="utf-8"?>
+<p:notes xmlns:a="http://schemas.openxmlformats.org/drawingml/2006/main" xmlns:p="http://schemas.openxmlformats.org/presentationml/2006/main" xmlns:r="http://schemas.openxmlformats.org/officeDocument/2006/relationships">
+  <p:cSld>
+    <p:spTree>
+      <p:nvGrpSpPr>
+        <p:cNvPr id="1" name=""/>
+        <p:cNvGrpSpPr/>
+        <p:nvPr/>
+      </p:nvGrpSpPr>
+      <p:grpSpPr>
+        <a:xfrm>
+          <a:off x="0" y="0"/>
+          <a:ext cx="0" cy="0"/>
+          <a:chOff x="0" y="0"/>
+          <a:chExt cx="0" cy="0"/>
+        </a:xfrm>
+      </p:grpSpPr>
+      <p:sp>
+        <p:nvSpPr>
+          <p:cNvPr id="2" name="Slide Image Placeholder 1"/>
+          <p:cNvSpPr>
+            <a:spLocks noGrp="1"/>
+          </p:cNvSpPr>
+          <p:nvPr>
+            <p:ph type="sldImg" idx="2"/>
+          </p:nvPr>
+        </p:nvSpPr>
+        <p:spPr/>
+      </p:sp>
+      <p:sp>
+        <p:nvSpPr>
+          <p:cNvPr id="3" name="Notes Placeholder 2"/>
+          <p:cNvSpPr>
+            <a:spLocks noGrp="1"/>
+          </p:cNvSpPr>
+          <p:nvPr>
+            <p:ph type="body" idx="3" sz="quarter"/>
+          </p:nvPr>
+        </p:nvSpPr>
+        <p:spPr/>
+        <p:txBody>
+          <a:bodyPr/>
+          <a:lstStyle/>
+          <a:p>
+            <a:r>
+              <a:t>Answers:</a:t>
+            </a:r>
+          </a:p>
+          <a:p>
+            <a:r>
+              <a:t>1. Software that can be used and changed freely.</a:t>
+            </a:r>
+          </a:p>
+          <a:p>
+            <a:r>
+              <a:t>2. E.g. rare metal use, energy use, disposal.</a:t>
+            </a:r>
+          </a:p>
+          <a:p>
+            <a:r>
+              <a:t>3. It is very hard to tamper with.</a:t>
+            </a:r>
+          </a:p>
+        </p:txBody>
+      </p:sp>
+      <p:sp>
+        <p:nvSpPr>
+          <p:cNvPr id="4" name="Slide Number Placeholder 3"/>
+          <p:cNvSpPr>
+            <a:spLocks noGrp="1"/>
+          </p:cNvSpPr>
+          <p:nvPr>
+            <p:ph type="sldNum" idx="5" sz="quarter"/>
+          </p:nvPr>
+        </p:nvSpPr>
+        <p:spPr/>
+      </p:sp>
+    </p:spTree>
+  </p:cSld>
+  <p:clrMapOvr>
+    <a:masterClrMapping/>
+  </p:clrMapOvr>
+</p:notes>
+</file>
+
+<file path=ppt/notesSlides/notesSlide6.xml><?xml version="1.0" encoding="utf-8"?>
+<p:notes xmlns:a="http://schemas.openxmlformats.org/drawingml/2006/main" xmlns:p="http://schemas.openxmlformats.org/presentationml/2006/main" xmlns:r="http://schemas.openxmlformats.org/officeDocument/2006/relationships">
+  <p:cSld>
+    <p:spTree>
+      <p:nvGrpSpPr>
+        <p:cNvPr id="1" name=""/>
+        <p:cNvGrpSpPr/>
+        <p:nvPr/>
+      </p:nvGrpSpPr>
+      <p:grpSpPr>
+        <a:xfrm>
+          <a:off x="0" y="0"/>
+          <a:ext cx="0" cy="0"/>
+          <a:chOff x="0" y="0"/>
+          <a:chExt cx="0" cy="0"/>
+        </a:xfrm>
+      </p:grpSpPr>
+      <p:sp>
+        <p:nvSpPr>
+          <p:cNvPr id="2" name="Slide Image Placeholder 1"/>
+          <p:cNvSpPr>
+            <a:spLocks noGrp="1"/>
+          </p:cNvSpPr>
+          <p:nvPr>
+            <p:ph type="sldImg" idx="2"/>
+          </p:nvPr>
+        </p:nvSpPr>
+        <p:spPr/>
+      </p:sp>
+      <p:sp>
+        <p:nvSpPr>
+          <p:cNvPr id="3" name="Notes Placeholder 2"/>
+          <p:cNvSpPr>
+            <a:spLocks noGrp="1"/>
+          </p:cNvSpPr>
+          <p:nvPr>
+            <p:ph type="body" idx="3" sz="quarter"/>
+          </p:nvPr>
+        </p:nvSpPr>
+        <p:spPr/>
+        <p:txBody>
+          <a:bodyPr/>
+          <a:lstStyle/>
+          <a:p>
+            <a:r>
+              <a:t>Give students a few minutes to answer on mini whiteboards or paper, then reveal the answers on the next slide.</a:t>
+            </a:r>
+          </a:p>
+        </p:txBody>
+      </p:sp>
+      <p:sp>
+        <p:nvSpPr>
+          <p:cNvPr id="4" name="Slide Number Placeholder 3"/>
+          <p:cNvSpPr>
+            <a:spLocks noGrp="1"/>
+          </p:cNvSpPr>
+          <p:nvPr>
+            <p:ph type="sldNum" idx="5" sz="quarter"/>
+          </p:nvPr>
+        </p:nvSpPr>
+        <p:spPr/>
+      </p:sp>
+    </p:spTree>
+  </p:cSld>
+  <p:clrMapOvr>
+    <a:masterClrMapping/>
+  </p:clrMapOvr>
+</p:notes>
+</file>
+
+<file path=ppt/notesSlides/notesSlide7.xml><?xml version="1.0" encoding="utf-8"?>
+<p:notes xmlns:a="http://schemas.openxmlformats.org/drawingml/2006/main" xmlns:p="http://schemas.openxmlformats.org/presentationml/2006/main" xmlns:r="http://schemas.openxmlformats.org/officeDocument/2006/relationships">
+  <p:cSld>
+    <p:spTree>
+      <p:nvGrpSpPr>
+        <p:cNvPr id="1" name=""/>
+        <p:cNvGrpSpPr/>
+        <p:nvPr/>
+      </p:nvGrpSpPr>
+      <p:grpSpPr>
+        <a:xfrm>
+          <a:off x="0" y="0"/>
+          <a:ext cx="0" cy="0"/>
+          <a:chOff x="0" y="0"/>
+          <a:chExt cx="0" cy="0"/>
+        </a:xfrm>
+      </p:grpSpPr>
+      <p:sp>
+        <p:nvSpPr>
+          <p:cNvPr id="2" name="Slide Image Placeholder 1"/>
+          <p:cNvSpPr>
+            <a:spLocks noGrp="1"/>
+          </p:cNvSpPr>
+          <p:nvPr>
+            <p:ph type="sldImg" idx="2"/>
+          </p:nvPr>
+        </p:nvSpPr>
+        <p:spPr/>
+      </p:sp>
+      <p:sp>
+        <p:nvSpPr>
+          <p:cNvPr id="3" name="Notes Placeholder 2"/>
+          <p:cNvSpPr>
+            <a:spLocks noGrp="1"/>
+          </p:cNvSpPr>
+          <p:nvPr>
+            <p:ph type="body" idx="3" sz="quarter"/>
+          </p:nvPr>
+        </p:nvSpPr>
+        <p:spPr/>
+        <p:txBody>
+          <a:bodyPr/>
+          <a:lstStyle/>
+          <a:p>
+            <a:r>
+              <a:t>Talk through any answers the class found difficult.</a:t>
+            </a:r>
+          </a:p>
+        </p:txBody>
+      </p:sp>
+      <p:sp>
+        <p:nvSpPr>
+          <p:cNvPr id="4" name="Slide Number Placeholder 3"/>
+          <p:cNvSpPr>
+            <a:spLocks noGrp="1"/>
+          </p:cNvSpPr>
+          <p:nvPr>
+            <p:ph type="sldNum" idx="5" sz="quarter"/>
+          </p:nvPr>
+        </p:nvSpPr>
+        <p:spPr/>
+      </p:sp>
+    </p:spTree>
+  </p:cSld>
+  <p:clrMapOvr>
+    <a:masterClrMapping/>
+  </p:clrMapOvr>
+</p:notes>
+</file>
+
+<file path=ppt/notesSlides/notesSlide8.xml><?xml version="1.0" encoding="utf-8"?>
 <p:notes xmlns:a="http://schemas.openxmlformats.org/drawingml/2006/main" xmlns:p="http://schemas.openxmlformats.org/presentationml/2006/main" xmlns:r="http://schemas.openxmlformats.org/officeDocument/2006/relationships">
   <p:cSld>
     <p:spTree>
@@ -4052,6 +4400,4934 @@
     <p:bg>
       <p:bgPr>
         <a:solidFill>
+          <a:srgbClr val="FFFFFF"/>
+        </a:solidFill>
+        <a:effectLst/>
+      </p:bgPr>
+    </p:bg>
+    <p:spTree>
+      <p:nvGrpSpPr>
+        <p:cNvPr id="1" name=""/>
+        <p:cNvGrpSpPr/>
+        <p:nvPr/>
+      </p:nvGrpSpPr>
+      <p:grpSpPr/>
+      <p:sp>
+        <p:nvSpPr>
+          <p:cNvPr id="2" name="TextBox 1"/>
+          <p:cNvSpPr txBox="1"/>
+          <p:nvPr/>
+        </p:nvSpPr>
+        <p:spPr>
+          <a:xfrm>
+            <a:off x="548640" y="320040"/>
+            <a:ext cx="11094415" cy="274320"/>
+          </a:xfrm>
+          <a:prstGeom prst="rect">
+            <a:avLst/>
+          </a:prstGeom>
+          <a:noFill/>
+        </p:spPr>
+        <p:txBody>
+          <a:bodyPr wrap="square" anchor="t" lIns="0" rIns="0" tIns="0" bIns="0"/>
+          <a:lstStyle/>
+          <a:p>
+            <a:pPr algn="l"/>
+            <a:r>
+              <a:rPr sz="1100" b="1" i="0">
+                <a:solidFill>
+                  <a:srgbClr val="54595D"/>
+                </a:solidFill>
+                <a:latin typeface="Calibri"/>
+              </a:rPr>
+              <a:t>CORE COMPONENT  ·  Core Paper 2</a:t>
+            </a:r>
+          </a:p>
+        </p:txBody>
+      </p:sp>
+      <p:sp>
+        <p:nvSpPr>
+          <p:cNvPr id="3" name="TextBox 2"/>
+          <p:cNvSpPr txBox="1"/>
+          <p:nvPr/>
+        </p:nvSpPr>
+        <p:spPr>
+          <a:xfrm>
+            <a:off x="548640" y="566928"/>
+            <a:ext cx="11094415" cy="822960"/>
+          </a:xfrm>
+          <a:prstGeom prst="rect">
+            <a:avLst/>
+          </a:prstGeom>
+          <a:noFill/>
+        </p:spPr>
+        <p:txBody>
+          <a:bodyPr wrap="square" anchor="ctr" lIns="0" rIns="0" tIns="0" bIns="0"/>
+          <a:lstStyle/>
+          <a:p>
+            <a:pPr algn="l"/>
+            <a:r>
+              <a:rPr sz="3200" b="1" i="0">
+                <a:solidFill>
+                  <a:srgbClr val="03306E"/>
+                </a:solidFill>
+                <a:latin typeface="Cambria"/>
+              </a:rPr>
+              <a:t>Emerging technologies (1)</a:t>
+            </a:r>
+          </a:p>
+        </p:txBody>
+      </p:sp>
+      <p:sp>
+        <p:nvSpPr>
+          <p:cNvPr id="4" name="TextBox 3"/>
+          <p:cNvSpPr txBox="1"/>
+          <p:nvPr/>
+        </p:nvSpPr>
+        <p:spPr>
+          <a:xfrm>
+            <a:off x="548640" y="6446520"/>
+            <a:ext cx="8229600" cy="274320"/>
+          </a:xfrm>
+          <a:prstGeom prst="rect">
+            <a:avLst/>
+          </a:prstGeom>
+          <a:noFill/>
+        </p:spPr>
+        <p:txBody>
+          <a:bodyPr wrap="square" anchor="t" lIns="0" rIns="0" tIns="0" bIns="0"/>
+          <a:lstStyle/>
+          <a:p>
+            <a:pPr algn="l"/>
+            <a:r>
+              <a:rPr sz="1000" b="0" i="0">
+                <a:solidFill>
+                  <a:srgbClr val="54595D"/>
+                </a:solidFill>
+                <a:latin typeface="Calibri"/>
+              </a:rPr>
+              <a:t>Digital Support and Security T Level  ·  Emerging Issues and Technologies</a:t>
+            </a:r>
+          </a:p>
+        </p:txBody>
+      </p:sp>
+      <p:sp>
+        <p:nvSpPr>
+          <p:cNvPr id="5" name="TextBox 4"/>
+          <p:cNvSpPr txBox="1"/>
+          <p:nvPr/>
+        </p:nvSpPr>
+        <p:spPr>
+          <a:xfrm>
+            <a:off x="10728655" y="6446520"/>
+            <a:ext cx="914400" cy="274320"/>
+          </a:xfrm>
+          <a:prstGeom prst="rect">
+            <a:avLst/>
+          </a:prstGeom>
+          <a:noFill/>
+        </p:spPr>
+        <p:txBody>
+          <a:bodyPr wrap="square" anchor="t" lIns="0" rIns="0" tIns="0" bIns="0"/>
+          <a:lstStyle/>
+          <a:p>
+            <a:pPr algn="r"/>
+            <a:r>
+              <a:rPr sz="1000" b="0" i="0">
+                <a:solidFill>
+                  <a:srgbClr val="54595D"/>
+                </a:solidFill>
+                <a:latin typeface="Calibri"/>
+              </a:rPr>
+              <a:t>10</a:t>
+            </a:r>
+          </a:p>
+        </p:txBody>
+      </p:sp>
+      <p:sp>
+        <p:nvSpPr>
+          <p:cNvPr id="6" name="Rounded Rectangle 5"/>
+          <p:cNvSpPr/>
+          <p:nvPr/>
+        </p:nvSpPr>
+        <p:spPr>
+          <a:xfrm>
+            <a:off x="548640" y="1600200"/>
+            <a:ext cx="5410047" cy="2148840"/>
+          </a:xfrm>
+          <a:prstGeom prst="roundRect">
+            <a:avLst>
+              <a:gd name="adj" fmla="val 6000"/>
+            </a:avLst>
+          </a:prstGeom>
+          <a:solidFill>
+            <a:srgbClr val="EAF3FF"/>
+          </a:solidFill>
+          <a:ln>
+            <a:noFill/>
+          </a:ln>
+          <a:effectLst/>
+        </p:spPr>
+        <p:style>
+          <a:lnRef idx="1">
+            <a:schemeClr val="accent1"/>
+          </a:lnRef>
+          <a:fillRef idx="3">
+            <a:schemeClr val="accent1"/>
+          </a:fillRef>
+          <a:effectRef idx="2">
+            <a:schemeClr val="accent1"/>
+          </a:effectRef>
+          <a:fontRef idx="minor">
+            <a:schemeClr val="lt1"/>
+          </a:fontRef>
+        </p:style>
+        <p:txBody>
+          <a:bodyPr rtlCol="0" anchor="ctr"/>
+          <a:lstStyle/>
+          <a:p/>
+        </p:txBody>
+      </p:sp>
+      <p:sp>
+        <p:nvSpPr>
+          <p:cNvPr id="7" name="Oval 6"/>
+          <p:cNvSpPr/>
+          <p:nvPr/>
+        </p:nvSpPr>
+        <p:spPr>
+          <a:xfrm>
+            <a:off x="777240" y="1828800"/>
+            <a:ext cx="457200" cy="457200"/>
+          </a:xfrm>
+          <a:prstGeom prst="ellipse">
+            <a:avLst/>
+          </a:prstGeom>
+          <a:solidFill>
+            <a:srgbClr val="F2B705"/>
+          </a:solidFill>
+          <a:ln>
+            <a:noFill/>
+          </a:ln>
+          <a:effectLst/>
+        </p:spPr>
+        <p:style>
+          <a:lnRef idx="1">
+            <a:schemeClr val="accent1"/>
+          </a:lnRef>
+          <a:fillRef idx="3">
+            <a:schemeClr val="accent1"/>
+          </a:fillRef>
+          <a:effectRef idx="2">
+            <a:schemeClr val="accent1"/>
+          </a:effectRef>
+          <a:fontRef idx="minor">
+            <a:schemeClr val="lt1"/>
+          </a:fontRef>
+        </p:style>
+        <p:txBody>
+          <a:bodyPr rtlCol="0" anchor="ctr" lIns="0" rIns="0" tIns="0" bIns="0"/>
+          <a:lstStyle/>
+          <a:p>
+            <a:pPr algn="ctr"/>
+            <a:r>
+              <a:rPr sz="1500" b="1">
+                <a:solidFill>
+                  <a:srgbClr val="202122"/>
+                </a:solidFill>
+                <a:latin typeface="Calibri"/>
+              </a:rPr>
+              <a:t>1</a:t>
+            </a:r>
+          </a:p>
+        </p:txBody>
+      </p:sp>
+      <p:sp>
+        <p:nvSpPr>
+          <p:cNvPr id="8" name="TextBox 7"/>
+          <p:cNvSpPr txBox="1"/>
+          <p:nvPr/>
+        </p:nvSpPr>
+        <p:spPr>
+          <a:xfrm>
+            <a:off x="1371600" y="1801368"/>
+            <a:ext cx="4404207" cy="512064"/>
+          </a:xfrm>
+          <a:prstGeom prst="rect">
+            <a:avLst/>
+          </a:prstGeom>
+          <a:noFill/>
+        </p:spPr>
+        <p:txBody>
+          <a:bodyPr wrap="square" anchor="ctr" lIns="0" rIns="0" tIns="0" bIns="0"/>
+          <a:lstStyle/>
+          <a:p>
+            <a:pPr algn="l"/>
+            <a:r>
+              <a:rPr sz="1900" b="1" i="0">
+                <a:solidFill>
+                  <a:srgbClr val="03306E"/>
+                </a:solidFill>
+                <a:latin typeface="Calibri"/>
+              </a:rPr>
+              <a:t>Storage and processing</a:t>
+            </a:r>
+          </a:p>
+        </p:txBody>
+      </p:sp>
+      <p:sp>
+        <p:nvSpPr>
+          <p:cNvPr id="9" name="TextBox 8"/>
+          <p:cNvSpPr txBox="1"/>
+          <p:nvPr/>
+        </p:nvSpPr>
+        <p:spPr>
+          <a:xfrm>
+            <a:off x="777240" y="2468880"/>
+            <a:ext cx="4952847" cy="1143000"/>
+          </a:xfrm>
+          <a:prstGeom prst="rect">
+            <a:avLst/>
+          </a:prstGeom>
+          <a:noFill/>
+        </p:spPr>
+        <p:txBody>
+          <a:bodyPr wrap="square" anchor="t" lIns="0" rIns="0" tIns="0" bIns="0"/>
+          <a:lstStyle/>
+          <a:p>
+            <a:pPr algn="l"/>
+            <a:r>
+              <a:rPr sz="2000" b="0" i="0">
+                <a:solidFill>
+                  <a:srgbClr val="202122"/>
+                </a:solidFill>
+                <a:latin typeface="Calibri"/>
+              </a:rPr>
+              <a:t>Growing demand for storage; quantum computing could solve problems classical computers cannot.</a:t>
+            </a:r>
+          </a:p>
+        </p:txBody>
+      </p:sp>
+      <p:sp>
+        <p:nvSpPr>
+          <p:cNvPr id="10" name="Rounded Rectangle 9"/>
+          <p:cNvSpPr/>
+          <p:nvPr/>
+        </p:nvSpPr>
+        <p:spPr>
+          <a:xfrm>
+            <a:off x="6233007" y="1600200"/>
+            <a:ext cx="5410047" cy="2148840"/>
+          </a:xfrm>
+          <a:prstGeom prst="roundRect">
+            <a:avLst>
+              <a:gd name="adj" fmla="val 6000"/>
+            </a:avLst>
+          </a:prstGeom>
+          <a:solidFill>
+            <a:srgbClr val="EAF3FF"/>
+          </a:solidFill>
+          <a:ln>
+            <a:noFill/>
+          </a:ln>
+          <a:effectLst/>
+        </p:spPr>
+        <p:style>
+          <a:lnRef idx="1">
+            <a:schemeClr val="accent1"/>
+          </a:lnRef>
+          <a:fillRef idx="3">
+            <a:schemeClr val="accent1"/>
+          </a:fillRef>
+          <a:effectRef idx="2">
+            <a:schemeClr val="accent1"/>
+          </a:effectRef>
+          <a:fontRef idx="minor">
+            <a:schemeClr val="lt1"/>
+          </a:fontRef>
+        </p:style>
+        <p:txBody>
+          <a:bodyPr rtlCol="0" anchor="ctr"/>
+          <a:lstStyle/>
+          <a:p/>
+        </p:txBody>
+      </p:sp>
+      <p:sp>
+        <p:nvSpPr>
+          <p:cNvPr id="11" name="Oval 10"/>
+          <p:cNvSpPr/>
+          <p:nvPr/>
+        </p:nvSpPr>
+        <p:spPr>
+          <a:xfrm>
+            <a:off x="6461607" y="1828800"/>
+            <a:ext cx="457200" cy="457200"/>
+          </a:xfrm>
+          <a:prstGeom prst="ellipse">
+            <a:avLst/>
+          </a:prstGeom>
+          <a:solidFill>
+            <a:srgbClr val="F2B705"/>
+          </a:solidFill>
+          <a:ln>
+            <a:noFill/>
+          </a:ln>
+          <a:effectLst/>
+        </p:spPr>
+        <p:style>
+          <a:lnRef idx="1">
+            <a:schemeClr val="accent1"/>
+          </a:lnRef>
+          <a:fillRef idx="3">
+            <a:schemeClr val="accent1"/>
+          </a:fillRef>
+          <a:effectRef idx="2">
+            <a:schemeClr val="accent1"/>
+          </a:effectRef>
+          <a:fontRef idx="minor">
+            <a:schemeClr val="lt1"/>
+          </a:fontRef>
+        </p:style>
+        <p:txBody>
+          <a:bodyPr rtlCol="0" anchor="ctr" lIns="0" rIns="0" tIns="0" bIns="0"/>
+          <a:lstStyle/>
+          <a:p>
+            <a:pPr algn="ctr"/>
+            <a:r>
+              <a:rPr sz="1500" b="1">
+                <a:solidFill>
+                  <a:srgbClr val="202122"/>
+                </a:solidFill>
+                <a:latin typeface="Calibri"/>
+              </a:rPr>
+              <a:t>2</a:t>
+            </a:r>
+          </a:p>
+        </p:txBody>
+      </p:sp>
+      <p:sp>
+        <p:nvSpPr>
+          <p:cNvPr id="12" name="TextBox 11"/>
+          <p:cNvSpPr txBox="1"/>
+          <p:nvPr/>
+        </p:nvSpPr>
+        <p:spPr>
+          <a:xfrm>
+            <a:off x="7055967" y="1801368"/>
+            <a:ext cx="4404207" cy="512064"/>
+          </a:xfrm>
+          <a:prstGeom prst="rect">
+            <a:avLst/>
+          </a:prstGeom>
+          <a:noFill/>
+        </p:spPr>
+        <p:txBody>
+          <a:bodyPr wrap="square" anchor="ctr" lIns="0" rIns="0" tIns="0" bIns="0"/>
+          <a:lstStyle/>
+          <a:p>
+            <a:pPr algn="l"/>
+            <a:r>
+              <a:rPr sz="1900" b="1" i="0">
+                <a:solidFill>
+                  <a:srgbClr val="03306E"/>
+                </a:solidFill>
+                <a:latin typeface="Calibri"/>
+              </a:rPr>
+              <a:t>Internet of Things</a:t>
+            </a:r>
+          </a:p>
+        </p:txBody>
+      </p:sp>
+      <p:sp>
+        <p:nvSpPr>
+          <p:cNvPr id="13" name="TextBox 12"/>
+          <p:cNvSpPr txBox="1"/>
+          <p:nvPr/>
+        </p:nvSpPr>
+        <p:spPr>
+          <a:xfrm>
+            <a:off x="6461607" y="2468880"/>
+            <a:ext cx="4952847" cy="1143000"/>
+          </a:xfrm>
+          <a:prstGeom prst="rect">
+            <a:avLst/>
+          </a:prstGeom>
+          <a:noFill/>
+        </p:spPr>
+        <p:txBody>
+          <a:bodyPr wrap="square" anchor="t" lIns="0" rIns="0" tIns="0" bIns="0"/>
+          <a:lstStyle/>
+          <a:p>
+            <a:pPr algn="l"/>
+            <a:r>
+              <a:rPr sz="2000" b="0" i="0">
+                <a:solidFill>
+                  <a:srgbClr val="202122"/>
+                </a:solidFill>
+                <a:latin typeface="Calibri"/>
+              </a:rPr>
+              <a:t>Edge computing, extra network load, industrial, smart city and home uses.</a:t>
+            </a:r>
+          </a:p>
+        </p:txBody>
+      </p:sp>
+      <p:sp>
+        <p:nvSpPr>
+          <p:cNvPr id="14" name="Rounded Rectangle 13"/>
+          <p:cNvSpPr/>
+          <p:nvPr/>
+        </p:nvSpPr>
+        <p:spPr>
+          <a:xfrm>
+            <a:off x="548640" y="4023360"/>
+            <a:ext cx="5410047" cy="2148840"/>
+          </a:xfrm>
+          <a:prstGeom prst="roundRect">
+            <a:avLst>
+              <a:gd name="adj" fmla="val 6000"/>
+            </a:avLst>
+          </a:prstGeom>
+          <a:solidFill>
+            <a:srgbClr val="EAF3FF"/>
+          </a:solidFill>
+          <a:ln>
+            <a:noFill/>
+          </a:ln>
+          <a:effectLst/>
+        </p:spPr>
+        <p:style>
+          <a:lnRef idx="1">
+            <a:schemeClr val="accent1"/>
+          </a:lnRef>
+          <a:fillRef idx="3">
+            <a:schemeClr val="accent1"/>
+          </a:fillRef>
+          <a:effectRef idx="2">
+            <a:schemeClr val="accent1"/>
+          </a:effectRef>
+          <a:fontRef idx="minor">
+            <a:schemeClr val="lt1"/>
+          </a:fontRef>
+        </p:style>
+        <p:txBody>
+          <a:bodyPr rtlCol="0" anchor="ctr"/>
+          <a:lstStyle/>
+          <a:p/>
+        </p:txBody>
+      </p:sp>
+      <p:sp>
+        <p:nvSpPr>
+          <p:cNvPr id="15" name="Oval 14"/>
+          <p:cNvSpPr/>
+          <p:nvPr/>
+        </p:nvSpPr>
+        <p:spPr>
+          <a:xfrm>
+            <a:off x="777240" y="4251960"/>
+            <a:ext cx="457200" cy="457200"/>
+          </a:xfrm>
+          <a:prstGeom prst="ellipse">
+            <a:avLst/>
+          </a:prstGeom>
+          <a:solidFill>
+            <a:srgbClr val="F2B705"/>
+          </a:solidFill>
+          <a:ln>
+            <a:noFill/>
+          </a:ln>
+          <a:effectLst/>
+        </p:spPr>
+        <p:style>
+          <a:lnRef idx="1">
+            <a:schemeClr val="accent1"/>
+          </a:lnRef>
+          <a:fillRef idx="3">
+            <a:schemeClr val="accent1"/>
+          </a:fillRef>
+          <a:effectRef idx="2">
+            <a:schemeClr val="accent1"/>
+          </a:effectRef>
+          <a:fontRef idx="minor">
+            <a:schemeClr val="lt1"/>
+          </a:fontRef>
+        </p:style>
+        <p:txBody>
+          <a:bodyPr rtlCol="0" anchor="ctr" lIns="0" rIns="0" tIns="0" bIns="0"/>
+          <a:lstStyle/>
+          <a:p>
+            <a:pPr algn="ctr"/>
+            <a:r>
+              <a:rPr sz="1500" b="1">
+                <a:solidFill>
+                  <a:srgbClr val="202122"/>
+                </a:solidFill>
+                <a:latin typeface="Calibri"/>
+              </a:rPr>
+              <a:t>3</a:t>
+            </a:r>
+          </a:p>
+        </p:txBody>
+      </p:sp>
+      <p:sp>
+        <p:nvSpPr>
+          <p:cNvPr id="16" name="TextBox 15"/>
+          <p:cNvSpPr txBox="1"/>
+          <p:nvPr/>
+        </p:nvSpPr>
+        <p:spPr>
+          <a:xfrm>
+            <a:off x="1371600" y="4224528"/>
+            <a:ext cx="4404207" cy="512064"/>
+          </a:xfrm>
+          <a:prstGeom prst="rect">
+            <a:avLst/>
+          </a:prstGeom>
+          <a:noFill/>
+        </p:spPr>
+        <p:txBody>
+          <a:bodyPr wrap="square" anchor="ctr" lIns="0" rIns="0" tIns="0" bIns="0"/>
+          <a:lstStyle/>
+          <a:p>
+            <a:pPr algn="l"/>
+            <a:r>
+              <a:rPr sz="1900" b="1" i="0">
+                <a:solidFill>
+                  <a:srgbClr val="03306E"/>
+                </a:solidFill>
+                <a:latin typeface="Calibri"/>
+              </a:rPr>
+              <a:t>Artificial intelligence</a:t>
+            </a:r>
+          </a:p>
+        </p:txBody>
+      </p:sp>
+      <p:sp>
+        <p:nvSpPr>
+          <p:cNvPr id="17" name="TextBox 16"/>
+          <p:cNvSpPr txBox="1"/>
+          <p:nvPr/>
+        </p:nvSpPr>
+        <p:spPr>
+          <a:xfrm>
+            <a:off x="777240" y="4892040"/>
+            <a:ext cx="4952847" cy="1143000"/>
+          </a:xfrm>
+          <a:prstGeom prst="rect">
+            <a:avLst/>
+          </a:prstGeom>
+          <a:noFill/>
+        </p:spPr>
+        <p:txBody>
+          <a:bodyPr wrap="square" anchor="t" lIns="0" rIns="0" tIns="0" bIns="0"/>
+          <a:lstStyle/>
+          <a:p>
+            <a:pPr algn="l"/>
+            <a:r>
+              <a:rPr sz="2000" b="0" i="0">
+                <a:solidFill>
+                  <a:srgbClr val="202122"/>
+                </a:solidFill>
+                <a:latin typeface="Calibri"/>
+              </a:rPr>
+              <a:t>Generative AI and machine learning.</a:t>
+            </a:r>
+          </a:p>
+        </p:txBody>
+      </p:sp>
+      <p:sp>
+        <p:nvSpPr>
+          <p:cNvPr id="18" name="Rounded Rectangle 17"/>
+          <p:cNvSpPr/>
+          <p:nvPr/>
+        </p:nvSpPr>
+        <p:spPr>
+          <a:xfrm>
+            <a:off x="6233007" y="4023360"/>
+            <a:ext cx="5410047" cy="2148840"/>
+          </a:xfrm>
+          <a:prstGeom prst="roundRect">
+            <a:avLst>
+              <a:gd name="adj" fmla="val 6000"/>
+            </a:avLst>
+          </a:prstGeom>
+          <a:solidFill>
+            <a:srgbClr val="EAF3FF"/>
+          </a:solidFill>
+          <a:ln>
+            <a:noFill/>
+          </a:ln>
+          <a:effectLst/>
+        </p:spPr>
+        <p:style>
+          <a:lnRef idx="1">
+            <a:schemeClr val="accent1"/>
+          </a:lnRef>
+          <a:fillRef idx="3">
+            <a:schemeClr val="accent1"/>
+          </a:fillRef>
+          <a:effectRef idx="2">
+            <a:schemeClr val="accent1"/>
+          </a:effectRef>
+          <a:fontRef idx="minor">
+            <a:schemeClr val="lt1"/>
+          </a:fontRef>
+        </p:style>
+        <p:txBody>
+          <a:bodyPr rtlCol="0" anchor="ctr"/>
+          <a:lstStyle/>
+          <a:p/>
+        </p:txBody>
+      </p:sp>
+      <p:sp>
+        <p:nvSpPr>
+          <p:cNvPr id="19" name="Oval 18"/>
+          <p:cNvSpPr/>
+          <p:nvPr/>
+        </p:nvSpPr>
+        <p:spPr>
+          <a:xfrm>
+            <a:off x="6461607" y="4251960"/>
+            <a:ext cx="457200" cy="457200"/>
+          </a:xfrm>
+          <a:prstGeom prst="ellipse">
+            <a:avLst/>
+          </a:prstGeom>
+          <a:solidFill>
+            <a:srgbClr val="F2B705"/>
+          </a:solidFill>
+          <a:ln>
+            <a:noFill/>
+          </a:ln>
+          <a:effectLst/>
+        </p:spPr>
+        <p:style>
+          <a:lnRef idx="1">
+            <a:schemeClr val="accent1"/>
+          </a:lnRef>
+          <a:fillRef idx="3">
+            <a:schemeClr val="accent1"/>
+          </a:fillRef>
+          <a:effectRef idx="2">
+            <a:schemeClr val="accent1"/>
+          </a:effectRef>
+          <a:fontRef idx="minor">
+            <a:schemeClr val="lt1"/>
+          </a:fontRef>
+        </p:style>
+        <p:txBody>
+          <a:bodyPr rtlCol="0" anchor="ctr" lIns="0" rIns="0" tIns="0" bIns="0"/>
+          <a:lstStyle/>
+          <a:p>
+            <a:pPr algn="ctr"/>
+            <a:r>
+              <a:rPr sz="1500" b="1">
+                <a:solidFill>
+                  <a:srgbClr val="202122"/>
+                </a:solidFill>
+                <a:latin typeface="Calibri"/>
+              </a:rPr>
+              <a:t>4</a:t>
+            </a:r>
+          </a:p>
+        </p:txBody>
+      </p:sp>
+      <p:sp>
+        <p:nvSpPr>
+          <p:cNvPr id="20" name="TextBox 19"/>
+          <p:cNvSpPr txBox="1"/>
+          <p:nvPr/>
+        </p:nvSpPr>
+        <p:spPr>
+          <a:xfrm>
+            <a:off x="7055967" y="4224528"/>
+            <a:ext cx="4404207" cy="512064"/>
+          </a:xfrm>
+          <a:prstGeom prst="rect">
+            <a:avLst/>
+          </a:prstGeom>
+          <a:noFill/>
+        </p:spPr>
+        <p:txBody>
+          <a:bodyPr wrap="square" anchor="ctr" lIns="0" rIns="0" tIns="0" bIns="0"/>
+          <a:lstStyle/>
+          <a:p>
+            <a:pPr algn="l"/>
+            <a:r>
+              <a:rPr sz="1900" b="1" i="0">
+                <a:solidFill>
+                  <a:srgbClr val="03306E"/>
+                </a:solidFill>
+                <a:latin typeface="Calibri"/>
+              </a:rPr>
+              <a:t>Extended reality</a:t>
+            </a:r>
+          </a:p>
+        </p:txBody>
+      </p:sp>
+      <p:sp>
+        <p:nvSpPr>
+          <p:cNvPr id="21" name="TextBox 20"/>
+          <p:cNvSpPr txBox="1"/>
+          <p:nvPr/>
+        </p:nvSpPr>
+        <p:spPr>
+          <a:xfrm>
+            <a:off x="6461607" y="4892040"/>
+            <a:ext cx="4952847" cy="1143000"/>
+          </a:xfrm>
+          <a:prstGeom prst="rect">
+            <a:avLst/>
+          </a:prstGeom>
+          <a:noFill/>
+        </p:spPr>
+        <p:txBody>
+          <a:bodyPr wrap="square" anchor="t" lIns="0" rIns="0" tIns="0" bIns="0"/>
+          <a:lstStyle/>
+          <a:p>
+            <a:pPr algn="l"/>
+            <a:r>
+              <a:rPr sz="2000" b="0" i="0">
+                <a:solidFill>
+                  <a:srgbClr val="202122"/>
+                </a:solidFill>
+                <a:latin typeface="Calibri"/>
+              </a:rPr>
+              <a:t>Augmented and virtual reality for training, design and support.</a:t>
+            </a:r>
+          </a:p>
+        </p:txBody>
+      </p:sp>
+    </p:spTree>
+  </p:cSld>
+  <p:clrMapOvr>
+    <a:masterClrMapping/>
+  </p:clrMapOvr>
+</p:sld>
+</file>
+
+<file path=ppt/slides/slide11.xml><?xml version="1.0" encoding="utf-8"?>
+<p:sld xmlns:a="http://schemas.openxmlformats.org/drawingml/2006/main" xmlns:p="http://schemas.openxmlformats.org/presentationml/2006/main" xmlns:r="http://schemas.openxmlformats.org/officeDocument/2006/relationships">
+  <p:cSld>
+    <p:bg>
+      <p:bgPr>
+        <a:solidFill>
+          <a:srgbClr val="FFFFFF"/>
+        </a:solidFill>
+        <a:effectLst/>
+      </p:bgPr>
+    </p:bg>
+    <p:spTree>
+      <p:nvGrpSpPr>
+        <p:cNvPr id="1" name=""/>
+        <p:cNvGrpSpPr/>
+        <p:nvPr/>
+      </p:nvGrpSpPr>
+      <p:grpSpPr/>
+      <p:sp>
+        <p:nvSpPr>
+          <p:cNvPr id="2" name="TextBox 1"/>
+          <p:cNvSpPr txBox="1"/>
+          <p:nvPr/>
+        </p:nvSpPr>
+        <p:spPr>
+          <a:xfrm>
+            <a:off x="548640" y="320040"/>
+            <a:ext cx="11094415" cy="274320"/>
+          </a:xfrm>
+          <a:prstGeom prst="rect">
+            <a:avLst/>
+          </a:prstGeom>
+          <a:noFill/>
+        </p:spPr>
+        <p:txBody>
+          <a:bodyPr wrap="square" anchor="t" lIns="0" rIns="0" tIns="0" bIns="0"/>
+          <a:lstStyle/>
+          <a:p>
+            <a:pPr algn="l"/>
+            <a:r>
+              <a:rPr sz="1100" b="1" i="0">
+                <a:solidFill>
+                  <a:srgbClr val="54595D"/>
+                </a:solidFill>
+                <a:latin typeface="Calibri"/>
+              </a:rPr>
+              <a:t>CORE COMPONENT  ·  Core Paper 2</a:t>
+            </a:r>
+          </a:p>
+        </p:txBody>
+      </p:sp>
+      <p:sp>
+        <p:nvSpPr>
+          <p:cNvPr id="3" name="TextBox 2"/>
+          <p:cNvSpPr txBox="1"/>
+          <p:nvPr/>
+        </p:nvSpPr>
+        <p:spPr>
+          <a:xfrm>
+            <a:off x="548640" y="566928"/>
+            <a:ext cx="11094415" cy="822960"/>
+          </a:xfrm>
+          <a:prstGeom prst="rect">
+            <a:avLst/>
+          </a:prstGeom>
+          <a:noFill/>
+        </p:spPr>
+        <p:txBody>
+          <a:bodyPr wrap="square" anchor="ctr" lIns="0" rIns="0" tIns="0" bIns="0"/>
+          <a:lstStyle/>
+          <a:p>
+            <a:pPr algn="l"/>
+            <a:r>
+              <a:rPr sz="3200" b="1" i="0">
+                <a:solidFill>
+                  <a:srgbClr val="03306E"/>
+                </a:solidFill>
+                <a:latin typeface="Cambria"/>
+              </a:rPr>
+              <a:t>Quick check: Emerging technologies (1)</a:t>
+            </a:r>
+          </a:p>
+        </p:txBody>
+      </p:sp>
+      <p:sp>
+        <p:nvSpPr>
+          <p:cNvPr id="4" name="TextBox 3"/>
+          <p:cNvSpPr txBox="1"/>
+          <p:nvPr/>
+        </p:nvSpPr>
+        <p:spPr>
+          <a:xfrm>
+            <a:off x="548640" y="6446520"/>
+            <a:ext cx="8229600" cy="274320"/>
+          </a:xfrm>
+          <a:prstGeom prst="rect">
+            <a:avLst/>
+          </a:prstGeom>
+          <a:noFill/>
+        </p:spPr>
+        <p:txBody>
+          <a:bodyPr wrap="square" anchor="t" lIns="0" rIns="0" tIns="0" bIns="0"/>
+          <a:lstStyle/>
+          <a:p>
+            <a:pPr algn="l"/>
+            <a:r>
+              <a:rPr sz="1000" b="0" i="0">
+                <a:solidFill>
+                  <a:srgbClr val="54595D"/>
+                </a:solidFill>
+                <a:latin typeface="Calibri"/>
+              </a:rPr>
+              <a:t>Digital Support and Security T Level  ·  Emerging Issues and Technologies</a:t>
+            </a:r>
+          </a:p>
+        </p:txBody>
+      </p:sp>
+      <p:sp>
+        <p:nvSpPr>
+          <p:cNvPr id="5" name="TextBox 4"/>
+          <p:cNvSpPr txBox="1"/>
+          <p:nvPr/>
+        </p:nvSpPr>
+        <p:spPr>
+          <a:xfrm>
+            <a:off x="10728655" y="6446520"/>
+            <a:ext cx="914400" cy="274320"/>
+          </a:xfrm>
+          <a:prstGeom prst="rect">
+            <a:avLst/>
+          </a:prstGeom>
+          <a:noFill/>
+        </p:spPr>
+        <p:txBody>
+          <a:bodyPr wrap="square" anchor="t" lIns="0" rIns="0" tIns="0" bIns="0"/>
+          <a:lstStyle/>
+          <a:p>
+            <a:pPr algn="r"/>
+            <a:r>
+              <a:rPr sz="1000" b="0" i="0">
+                <a:solidFill>
+                  <a:srgbClr val="54595D"/>
+                </a:solidFill>
+                <a:latin typeface="Calibri"/>
+              </a:rPr>
+              <a:t>11</a:t>
+            </a:r>
+          </a:p>
+        </p:txBody>
+      </p:sp>
+      <p:sp>
+        <p:nvSpPr>
+          <p:cNvPr id="6" name="Oval 5"/>
+          <p:cNvSpPr/>
+          <p:nvPr/>
+        </p:nvSpPr>
+        <p:spPr>
+          <a:xfrm>
+            <a:off x="548640" y="1691640"/>
+            <a:ext cx="502920" cy="502920"/>
+          </a:xfrm>
+          <a:prstGeom prst="ellipse">
+            <a:avLst/>
+          </a:prstGeom>
+          <a:solidFill>
+            <a:srgbClr val="F2B705"/>
+          </a:solidFill>
+          <a:ln>
+            <a:noFill/>
+          </a:ln>
+          <a:effectLst/>
+        </p:spPr>
+        <p:style>
+          <a:lnRef idx="1">
+            <a:schemeClr val="accent1"/>
+          </a:lnRef>
+          <a:fillRef idx="3">
+            <a:schemeClr val="accent1"/>
+          </a:fillRef>
+          <a:effectRef idx="2">
+            <a:schemeClr val="accent1"/>
+          </a:effectRef>
+          <a:fontRef idx="minor">
+            <a:schemeClr val="lt1"/>
+          </a:fontRef>
+        </p:style>
+        <p:txBody>
+          <a:bodyPr rtlCol="0" anchor="ctr" lIns="0" rIns="0" tIns="0" bIns="0"/>
+          <a:lstStyle/>
+          <a:p>
+            <a:pPr algn="ctr"/>
+            <a:r>
+              <a:rPr sz="1600" b="1">
+                <a:solidFill>
+                  <a:srgbClr val="202122"/>
+                </a:solidFill>
+                <a:latin typeface="Calibri"/>
+              </a:rPr>
+              <a:t>1</a:t>
+            </a:r>
+          </a:p>
+        </p:txBody>
+      </p:sp>
+      <p:sp>
+        <p:nvSpPr>
+          <p:cNvPr id="7" name="TextBox 6"/>
+          <p:cNvSpPr txBox="1"/>
+          <p:nvPr/>
+        </p:nvSpPr>
+        <p:spPr>
+          <a:xfrm>
+            <a:off x="1371600" y="1645920"/>
+            <a:ext cx="10271455" cy="1188720"/>
+          </a:xfrm>
+          <a:prstGeom prst="rect">
+            <a:avLst/>
+          </a:prstGeom>
+          <a:noFill/>
+        </p:spPr>
+        <p:txBody>
+          <a:bodyPr wrap="square" anchor="t" lIns="0" rIns="0" tIns="0" bIns="0"/>
+          <a:lstStyle/>
+          <a:p>
+            <a:pPr algn="l"/>
+            <a:r>
+              <a:rPr sz="2400" b="0" i="0">
+                <a:solidFill>
+                  <a:srgbClr val="202122"/>
+                </a:solidFill>
+                <a:latin typeface="Calibri"/>
+              </a:rPr>
+              <a:t>What is edge computing?</a:t>
+            </a:r>
+          </a:p>
+        </p:txBody>
+      </p:sp>
+      <p:sp>
+        <p:nvSpPr>
+          <p:cNvPr id="8" name="Oval 7"/>
+          <p:cNvSpPr/>
+          <p:nvPr/>
+        </p:nvSpPr>
+        <p:spPr>
+          <a:xfrm>
+            <a:off x="548640" y="3108960"/>
+            <a:ext cx="502920" cy="502920"/>
+          </a:xfrm>
+          <a:prstGeom prst="ellipse">
+            <a:avLst/>
+          </a:prstGeom>
+          <a:solidFill>
+            <a:srgbClr val="F2B705"/>
+          </a:solidFill>
+          <a:ln>
+            <a:noFill/>
+          </a:ln>
+          <a:effectLst/>
+        </p:spPr>
+        <p:style>
+          <a:lnRef idx="1">
+            <a:schemeClr val="accent1"/>
+          </a:lnRef>
+          <a:fillRef idx="3">
+            <a:schemeClr val="accent1"/>
+          </a:fillRef>
+          <a:effectRef idx="2">
+            <a:schemeClr val="accent1"/>
+          </a:effectRef>
+          <a:fontRef idx="minor">
+            <a:schemeClr val="lt1"/>
+          </a:fontRef>
+        </p:style>
+        <p:txBody>
+          <a:bodyPr rtlCol="0" anchor="ctr" lIns="0" rIns="0" tIns="0" bIns="0"/>
+          <a:lstStyle/>
+          <a:p>
+            <a:pPr algn="ctr"/>
+            <a:r>
+              <a:rPr sz="1600" b="1">
+                <a:solidFill>
+                  <a:srgbClr val="202122"/>
+                </a:solidFill>
+                <a:latin typeface="Calibri"/>
+              </a:rPr>
+              <a:t>2</a:t>
+            </a:r>
+          </a:p>
+        </p:txBody>
+      </p:sp>
+      <p:sp>
+        <p:nvSpPr>
+          <p:cNvPr id="9" name="TextBox 8"/>
+          <p:cNvSpPr txBox="1"/>
+          <p:nvPr/>
+        </p:nvSpPr>
+        <p:spPr>
+          <a:xfrm>
+            <a:off x="1371600" y="3063240"/>
+            <a:ext cx="10271455" cy="1188720"/>
+          </a:xfrm>
+          <a:prstGeom prst="rect">
+            <a:avLst/>
+          </a:prstGeom>
+          <a:noFill/>
+        </p:spPr>
+        <p:txBody>
+          <a:bodyPr wrap="square" anchor="t" lIns="0" rIns="0" tIns="0" bIns="0"/>
+          <a:lstStyle/>
+          <a:p>
+            <a:pPr algn="l"/>
+            <a:r>
+              <a:rPr sz="2400" b="0" i="0">
+                <a:solidFill>
+                  <a:srgbClr val="202122"/>
+                </a:solidFill>
+                <a:latin typeface="Calibri"/>
+              </a:rPr>
+              <a:t>Why might quantum computing worry security experts?</a:t>
+            </a:r>
+          </a:p>
+        </p:txBody>
+      </p:sp>
+      <p:sp>
+        <p:nvSpPr>
+          <p:cNvPr id="10" name="Oval 9"/>
+          <p:cNvSpPr/>
+          <p:nvPr/>
+        </p:nvSpPr>
+        <p:spPr>
+          <a:xfrm>
+            <a:off x="548640" y="4526280"/>
+            <a:ext cx="502920" cy="502920"/>
+          </a:xfrm>
+          <a:prstGeom prst="ellipse">
+            <a:avLst/>
+          </a:prstGeom>
+          <a:solidFill>
+            <a:srgbClr val="F2B705"/>
+          </a:solidFill>
+          <a:ln>
+            <a:noFill/>
+          </a:ln>
+          <a:effectLst/>
+        </p:spPr>
+        <p:style>
+          <a:lnRef idx="1">
+            <a:schemeClr val="accent1"/>
+          </a:lnRef>
+          <a:fillRef idx="3">
+            <a:schemeClr val="accent1"/>
+          </a:fillRef>
+          <a:effectRef idx="2">
+            <a:schemeClr val="accent1"/>
+          </a:effectRef>
+          <a:fontRef idx="minor">
+            <a:schemeClr val="lt1"/>
+          </a:fontRef>
+        </p:style>
+        <p:txBody>
+          <a:bodyPr rtlCol="0" anchor="ctr" lIns="0" rIns="0" tIns="0" bIns="0"/>
+          <a:lstStyle/>
+          <a:p>
+            <a:pPr algn="ctr"/>
+            <a:r>
+              <a:rPr sz="1600" b="1">
+                <a:solidFill>
+                  <a:srgbClr val="202122"/>
+                </a:solidFill>
+                <a:latin typeface="Calibri"/>
+              </a:rPr>
+              <a:t>3</a:t>
+            </a:r>
+          </a:p>
+        </p:txBody>
+      </p:sp>
+      <p:sp>
+        <p:nvSpPr>
+          <p:cNvPr id="11" name="TextBox 10"/>
+          <p:cNvSpPr txBox="1"/>
+          <p:nvPr/>
+        </p:nvSpPr>
+        <p:spPr>
+          <a:xfrm>
+            <a:off x="1371600" y="4480560"/>
+            <a:ext cx="10271455" cy="1188720"/>
+          </a:xfrm>
+          <a:prstGeom prst="rect">
+            <a:avLst/>
+          </a:prstGeom>
+          <a:noFill/>
+        </p:spPr>
+        <p:txBody>
+          <a:bodyPr wrap="square" anchor="t" lIns="0" rIns="0" tIns="0" bIns="0"/>
+          <a:lstStyle/>
+          <a:p>
+            <a:pPr algn="l"/>
+            <a:r>
+              <a:rPr sz="2400" b="0" i="0">
+                <a:solidFill>
+                  <a:srgbClr val="202122"/>
+                </a:solidFill>
+                <a:latin typeface="Calibri"/>
+              </a:rPr>
+              <a:t>What does generative AI do?</a:t>
+            </a:r>
+          </a:p>
+        </p:txBody>
+      </p:sp>
+      <p:sp>
+        <p:nvSpPr>
+          <p:cNvPr id="12" name="TextBox 11"/>
+          <p:cNvSpPr txBox="1"/>
+          <p:nvPr/>
+        </p:nvSpPr>
+        <p:spPr>
+          <a:xfrm>
+            <a:off x="548640" y="5852160"/>
+            <a:ext cx="11094415" cy="365760"/>
+          </a:xfrm>
+          <a:prstGeom prst="rect">
+            <a:avLst/>
+          </a:prstGeom>
+          <a:noFill/>
+        </p:spPr>
+        <p:txBody>
+          <a:bodyPr wrap="square" anchor="t" lIns="0" rIns="0" tIns="0" bIns="0"/>
+          <a:lstStyle/>
+          <a:p>
+            <a:pPr algn="l"/>
+            <a:r>
+              <a:rPr sz="1300" b="0" i="1">
+                <a:solidFill>
+                  <a:srgbClr val="54595D"/>
+                </a:solidFill>
+                <a:latin typeface="Calibri"/>
+              </a:rPr>
+              <a:t>Answer on mini whiteboards or in your book. Answers are in the speaker notes.</a:t>
+            </a:r>
+          </a:p>
+        </p:txBody>
+      </p:sp>
+    </p:spTree>
+  </p:cSld>
+  <p:clrMapOvr>
+    <a:masterClrMapping/>
+  </p:clrMapOvr>
+</p:sld>
+</file>
+
+<file path=ppt/slides/slide12.xml><?xml version="1.0" encoding="utf-8"?>
+<p:sld xmlns:a="http://schemas.openxmlformats.org/drawingml/2006/main" xmlns:p="http://schemas.openxmlformats.org/presentationml/2006/main" xmlns:r="http://schemas.openxmlformats.org/officeDocument/2006/relationships">
+  <p:cSld>
+    <p:bg>
+      <p:bgPr>
+        <a:solidFill>
+          <a:srgbClr val="FFFFFF"/>
+        </a:solidFill>
+        <a:effectLst/>
+      </p:bgPr>
+    </p:bg>
+    <p:spTree>
+      <p:nvGrpSpPr>
+        <p:cNvPr id="1" name=""/>
+        <p:cNvGrpSpPr/>
+        <p:nvPr/>
+      </p:nvGrpSpPr>
+      <p:grpSpPr/>
+      <p:sp>
+        <p:nvSpPr>
+          <p:cNvPr id="2" name="TextBox 1"/>
+          <p:cNvSpPr txBox="1"/>
+          <p:nvPr/>
+        </p:nvSpPr>
+        <p:spPr>
+          <a:xfrm>
+            <a:off x="548640" y="320040"/>
+            <a:ext cx="11094415" cy="274320"/>
+          </a:xfrm>
+          <a:prstGeom prst="rect">
+            <a:avLst/>
+          </a:prstGeom>
+          <a:noFill/>
+        </p:spPr>
+        <p:txBody>
+          <a:bodyPr wrap="square" anchor="t" lIns="0" rIns="0" tIns="0" bIns="0"/>
+          <a:lstStyle/>
+          <a:p>
+            <a:pPr algn="l"/>
+            <a:r>
+              <a:rPr sz="1100" b="1" i="0">
+                <a:solidFill>
+                  <a:srgbClr val="54595D"/>
+                </a:solidFill>
+                <a:latin typeface="Calibri"/>
+              </a:rPr>
+              <a:t>CORE COMPONENT  ·  Core Paper 2</a:t>
+            </a:r>
+          </a:p>
+        </p:txBody>
+      </p:sp>
+      <p:sp>
+        <p:nvSpPr>
+          <p:cNvPr id="3" name="TextBox 2"/>
+          <p:cNvSpPr txBox="1"/>
+          <p:nvPr/>
+        </p:nvSpPr>
+        <p:spPr>
+          <a:xfrm>
+            <a:off x="548640" y="566928"/>
+            <a:ext cx="11094415" cy="822960"/>
+          </a:xfrm>
+          <a:prstGeom prst="rect">
+            <a:avLst/>
+          </a:prstGeom>
+          <a:noFill/>
+        </p:spPr>
+        <p:txBody>
+          <a:bodyPr wrap="square" anchor="ctr" lIns="0" rIns="0" tIns="0" bIns="0"/>
+          <a:lstStyle/>
+          <a:p>
+            <a:pPr algn="l"/>
+            <a:r>
+              <a:rPr sz="3200" b="1" i="0">
+                <a:solidFill>
+                  <a:srgbClr val="03306E"/>
+                </a:solidFill>
+                <a:latin typeface="Cambria"/>
+              </a:rPr>
+              <a:t>Emerging technologies (2)</a:t>
+            </a:r>
+          </a:p>
+        </p:txBody>
+      </p:sp>
+      <p:sp>
+        <p:nvSpPr>
+          <p:cNvPr id="4" name="TextBox 3"/>
+          <p:cNvSpPr txBox="1"/>
+          <p:nvPr/>
+        </p:nvSpPr>
+        <p:spPr>
+          <a:xfrm>
+            <a:off x="548640" y="6446520"/>
+            <a:ext cx="8229600" cy="274320"/>
+          </a:xfrm>
+          <a:prstGeom prst="rect">
+            <a:avLst/>
+          </a:prstGeom>
+          <a:noFill/>
+        </p:spPr>
+        <p:txBody>
+          <a:bodyPr wrap="square" anchor="t" lIns="0" rIns="0" tIns="0" bIns="0"/>
+          <a:lstStyle/>
+          <a:p>
+            <a:pPr algn="l"/>
+            <a:r>
+              <a:rPr sz="1000" b="0" i="0">
+                <a:solidFill>
+                  <a:srgbClr val="54595D"/>
+                </a:solidFill>
+                <a:latin typeface="Calibri"/>
+              </a:rPr>
+              <a:t>Digital Support and Security T Level  ·  Emerging Issues and Technologies</a:t>
+            </a:r>
+          </a:p>
+        </p:txBody>
+      </p:sp>
+      <p:sp>
+        <p:nvSpPr>
+          <p:cNvPr id="5" name="TextBox 4"/>
+          <p:cNvSpPr txBox="1"/>
+          <p:nvPr/>
+        </p:nvSpPr>
+        <p:spPr>
+          <a:xfrm>
+            <a:off x="10728655" y="6446520"/>
+            <a:ext cx="914400" cy="274320"/>
+          </a:xfrm>
+          <a:prstGeom prst="rect">
+            <a:avLst/>
+          </a:prstGeom>
+          <a:noFill/>
+        </p:spPr>
+        <p:txBody>
+          <a:bodyPr wrap="square" anchor="t" lIns="0" rIns="0" tIns="0" bIns="0"/>
+          <a:lstStyle/>
+          <a:p>
+            <a:pPr algn="r"/>
+            <a:r>
+              <a:rPr sz="1000" b="0" i="0">
+                <a:solidFill>
+                  <a:srgbClr val="54595D"/>
+                </a:solidFill>
+                <a:latin typeface="Calibri"/>
+              </a:rPr>
+              <a:t>12</a:t>
+            </a:r>
+          </a:p>
+        </p:txBody>
+      </p:sp>
+      <p:sp>
+        <p:nvSpPr>
+          <p:cNvPr id="6" name="TextBox 5"/>
+          <p:cNvSpPr txBox="1"/>
+          <p:nvPr/>
+        </p:nvSpPr>
+        <p:spPr>
+          <a:xfrm>
+            <a:off x="548640" y="1554480"/>
+            <a:ext cx="6720840" cy="4617720"/>
+          </a:xfrm>
+          <a:prstGeom prst="rect">
+            <a:avLst/>
+          </a:prstGeom>
+          <a:noFill/>
+        </p:spPr>
+        <p:txBody>
+          <a:bodyPr wrap="square" lIns="0" rIns="0" tIns="0" bIns="0">
+            <a:spAutoFit/>
+          </a:bodyPr>
+          <a:lstStyle/>
+          <a:p>
+            <a:pPr>
+              <a:spcAft>
+                <a:spcPts val="1080"/>
+              </a:spcAft>
+            </a:pPr>
+            <a:r>
+              <a:rPr sz="1800" b="0">
+                <a:solidFill>
+                  <a:srgbClr val="202122"/>
+                </a:solidFill>
+                <a:latin typeface="Calibri"/>
+              </a:rPr>
+              <a:t>Open source software can be used and changed freely, with community support, which cuts licence costs.</a:t>
+            </a:r>
+          </a:p>
+          <a:p>
+            <a:pPr>
+              <a:spcAft>
+                <a:spcPts val="1080"/>
+              </a:spcAft>
+            </a:pPr>
+            <a:r>
+              <a:rPr sz="1800" b="0">
+                <a:solidFill>
+                  <a:srgbClr val="202122"/>
+                </a:solidFill>
+                <a:latin typeface="Calibri"/>
+              </a:rPr>
+              <a:t>Blockchain is a shared ledger that's very hard to tamper with, used for cryptocurrency and supply-chain tracking.</a:t>
+            </a:r>
+          </a:p>
+          <a:p>
+            <a:pPr>
+              <a:spcAft>
+                <a:spcPts val="1080"/>
+              </a:spcAft>
+            </a:pPr>
+            <a:r>
+              <a:rPr sz="1800" b="0">
+                <a:solidFill>
+                  <a:srgbClr val="202122"/>
+                </a:solidFill>
+                <a:latin typeface="Calibri"/>
+              </a:rPr>
+              <a:t>3D printing and drones create new ways to make and deliver things. Autonomous machines such as self-driving vehicles and robotic assembly lines replace human control.</a:t>
+            </a:r>
+          </a:p>
+          <a:p>
+            <a:pPr>
+              <a:spcAft>
+                <a:spcPts val="1080"/>
+              </a:spcAft>
+            </a:pPr>
+            <a:r>
+              <a:rPr sz="1800" b="0">
+                <a:solidFill>
+                  <a:srgbClr val="202122"/>
+                </a:solidFill>
+                <a:latin typeface="Calibri"/>
+              </a:rPr>
+              <a:t>All of this has an environmental cost: devices use rare metals, data centres use huge amounts of energy, and old kit must be disposed of responsibly.</a:t>
+            </a:r>
+          </a:p>
+          <a:p>
+            <a:pPr>
+              <a:spcAft>
+                <a:spcPts val="1080"/>
+              </a:spcAft>
+            </a:pPr>
+            <a:r>
+              <a:rPr sz="1800" b="0">
+                <a:solidFill>
+                  <a:srgbClr val="202122"/>
+                </a:solidFill>
+                <a:latin typeface="Calibri"/>
+              </a:rPr>
+              <a:t>These technologies often work together, which multiplies their impact.</a:t>
+            </a:r>
+          </a:p>
+        </p:txBody>
+      </p:sp>
+      <p:sp>
+        <p:nvSpPr>
+          <p:cNvPr id="7" name="Rounded Rectangle 6"/>
+          <p:cNvSpPr/>
+          <p:nvPr/>
+        </p:nvSpPr>
+        <p:spPr>
+          <a:xfrm>
+            <a:off x="7772400" y="1554480"/>
+            <a:ext cx="3867912" cy="4526280"/>
+          </a:xfrm>
+          <a:prstGeom prst="roundRect">
+            <a:avLst>
+              <a:gd name="adj" fmla="val 8000"/>
+            </a:avLst>
+          </a:prstGeom>
+          <a:solidFill>
+            <a:srgbClr val="03306E"/>
+          </a:solidFill>
+          <a:ln>
+            <a:noFill/>
+          </a:ln>
+          <a:effectLst/>
+        </p:spPr>
+        <p:style>
+          <a:lnRef idx="1">
+            <a:schemeClr val="accent1"/>
+          </a:lnRef>
+          <a:fillRef idx="3">
+            <a:schemeClr val="accent1"/>
+          </a:fillRef>
+          <a:effectRef idx="2">
+            <a:schemeClr val="accent1"/>
+          </a:effectRef>
+          <a:fontRef idx="minor">
+            <a:schemeClr val="lt1"/>
+          </a:fontRef>
+        </p:style>
+        <p:txBody>
+          <a:bodyPr rtlCol="0" anchor="ctr"/>
+          <a:lstStyle/>
+          <a:p/>
+        </p:txBody>
+      </p:sp>
+      <p:sp>
+        <p:nvSpPr>
+          <p:cNvPr id="8" name="Oval 7"/>
+          <p:cNvSpPr/>
+          <p:nvPr/>
+        </p:nvSpPr>
+        <p:spPr>
+          <a:xfrm>
+            <a:off x="8046720" y="1828800"/>
+            <a:ext cx="548640" cy="548640"/>
+          </a:xfrm>
+          <a:prstGeom prst="ellipse">
+            <a:avLst/>
+          </a:prstGeom>
+          <a:solidFill>
+            <a:srgbClr val="F2B705"/>
+          </a:solidFill>
+          <a:ln>
+            <a:noFill/>
+          </a:ln>
+          <a:effectLst/>
+        </p:spPr>
+        <p:style>
+          <a:lnRef idx="1">
+            <a:schemeClr val="accent1"/>
+          </a:lnRef>
+          <a:fillRef idx="3">
+            <a:schemeClr val="accent1"/>
+          </a:fillRef>
+          <a:effectRef idx="2">
+            <a:schemeClr val="accent1"/>
+          </a:effectRef>
+          <a:fontRef idx="minor">
+            <a:schemeClr val="lt1"/>
+          </a:fontRef>
+        </p:style>
+        <p:txBody>
+          <a:bodyPr rtlCol="0" anchor="ctr" lIns="0" rIns="0" tIns="0" bIns="0"/>
+          <a:lstStyle/>
+          <a:p>
+            <a:pPr algn="ctr"/>
+            <a:r>
+              <a:rPr sz="1300" b="1">
+                <a:solidFill>
+                  <a:srgbClr val="202122"/>
+                </a:solidFill>
+                <a:latin typeface="Calibri"/>
+              </a:rPr>
+              <a:t>e.g.</a:t>
+            </a:r>
+          </a:p>
+        </p:txBody>
+      </p:sp>
+      <p:sp>
+        <p:nvSpPr>
+          <p:cNvPr id="9" name="TextBox 8"/>
+          <p:cNvSpPr txBox="1"/>
+          <p:nvPr/>
+        </p:nvSpPr>
+        <p:spPr>
+          <a:xfrm>
+            <a:off x="8046720" y="2560320"/>
+            <a:ext cx="3291840" cy="365760"/>
+          </a:xfrm>
+          <a:prstGeom prst="rect">
+            <a:avLst/>
+          </a:prstGeom>
+          <a:noFill/>
+        </p:spPr>
+        <p:txBody>
+          <a:bodyPr wrap="square" anchor="t" lIns="0" rIns="0" tIns="0" bIns="0"/>
+          <a:lstStyle/>
+          <a:p>
+            <a:pPr algn="l"/>
+            <a:r>
+              <a:rPr sz="1300" b="1" i="0">
+                <a:solidFill>
+                  <a:srgbClr val="A9C8F0"/>
+                </a:solidFill>
+                <a:latin typeface="Calibri"/>
+              </a:rPr>
+              <a:t>EXAMPLE</a:t>
+            </a:r>
+          </a:p>
+        </p:txBody>
+      </p:sp>
+      <p:sp>
+        <p:nvSpPr>
+          <p:cNvPr id="10" name="TextBox 9"/>
+          <p:cNvSpPr txBox="1"/>
+          <p:nvPr/>
+        </p:nvSpPr>
+        <p:spPr>
+          <a:xfrm>
+            <a:off x="8046720" y="2971800"/>
+            <a:ext cx="3291840" cy="2971800"/>
+          </a:xfrm>
+          <a:prstGeom prst="rect">
+            <a:avLst/>
+          </a:prstGeom>
+          <a:noFill/>
+        </p:spPr>
+        <p:txBody>
+          <a:bodyPr wrap="square" anchor="t" lIns="0" rIns="0" tIns="0" bIns="0"/>
+          <a:lstStyle/>
+          <a:p>
+            <a:pPr algn="l"/>
+            <a:r>
+              <a:rPr sz="1900" b="0" i="0">
+                <a:solidFill>
+                  <a:srgbClr val="FFFFFF"/>
+                </a:solidFill>
+                <a:latin typeface="Cambria"/>
+              </a:rPr>
+              <a:t>A warehouse uses IoT tags, AI to plan routes, autonomous robots to pick items and drones for stock checks: four technologies working together.</a:t>
+            </a:r>
+          </a:p>
+        </p:txBody>
+      </p:sp>
+    </p:spTree>
+  </p:cSld>
+  <p:clrMapOvr>
+    <a:masterClrMapping/>
+  </p:clrMapOvr>
+</p:sld>
+</file>
+
+<file path=ppt/slides/slide13.xml><?xml version="1.0" encoding="utf-8"?>
+<p:sld xmlns:a="http://schemas.openxmlformats.org/drawingml/2006/main" xmlns:p="http://schemas.openxmlformats.org/presentationml/2006/main" xmlns:r="http://schemas.openxmlformats.org/officeDocument/2006/relationships">
+  <p:cSld>
+    <p:bg>
+      <p:bgPr>
+        <a:solidFill>
+          <a:srgbClr val="FFFFFF"/>
+        </a:solidFill>
+        <a:effectLst/>
+      </p:bgPr>
+    </p:bg>
+    <p:spTree>
+      <p:nvGrpSpPr>
+        <p:cNvPr id="1" name=""/>
+        <p:cNvGrpSpPr/>
+        <p:nvPr/>
+      </p:nvGrpSpPr>
+      <p:grpSpPr/>
+      <p:sp>
+        <p:nvSpPr>
+          <p:cNvPr id="2" name="TextBox 1"/>
+          <p:cNvSpPr txBox="1"/>
+          <p:nvPr/>
+        </p:nvSpPr>
+        <p:spPr>
+          <a:xfrm>
+            <a:off x="548640" y="320040"/>
+            <a:ext cx="11094415" cy="274320"/>
+          </a:xfrm>
+          <a:prstGeom prst="rect">
+            <a:avLst/>
+          </a:prstGeom>
+          <a:noFill/>
+        </p:spPr>
+        <p:txBody>
+          <a:bodyPr wrap="square" anchor="t" lIns="0" rIns="0" tIns="0" bIns="0"/>
+          <a:lstStyle/>
+          <a:p>
+            <a:pPr algn="l"/>
+            <a:r>
+              <a:rPr sz="1100" b="1" i="0">
+                <a:solidFill>
+                  <a:srgbClr val="54595D"/>
+                </a:solidFill>
+                <a:latin typeface="Calibri"/>
+              </a:rPr>
+              <a:t>CORE COMPONENT  ·  Core Paper 2</a:t>
+            </a:r>
+          </a:p>
+        </p:txBody>
+      </p:sp>
+      <p:sp>
+        <p:nvSpPr>
+          <p:cNvPr id="3" name="TextBox 2"/>
+          <p:cNvSpPr txBox="1"/>
+          <p:nvPr/>
+        </p:nvSpPr>
+        <p:spPr>
+          <a:xfrm>
+            <a:off x="548640" y="566928"/>
+            <a:ext cx="11094415" cy="822960"/>
+          </a:xfrm>
+          <a:prstGeom prst="rect">
+            <a:avLst/>
+          </a:prstGeom>
+          <a:noFill/>
+        </p:spPr>
+        <p:txBody>
+          <a:bodyPr wrap="square" anchor="ctr" lIns="0" rIns="0" tIns="0" bIns="0"/>
+          <a:lstStyle/>
+          <a:p>
+            <a:pPr algn="l"/>
+            <a:r>
+              <a:rPr sz="3200" b="1" i="0">
+                <a:solidFill>
+                  <a:srgbClr val="03306E"/>
+                </a:solidFill>
+                <a:latin typeface="Cambria"/>
+              </a:rPr>
+              <a:t>Emerging technologies (2)</a:t>
+            </a:r>
+          </a:p>
+        </p:txBody>
+      </p:sp>
+      <p:sp>
+        <p:nvSpPr>
+          <p:cNvPr id="4" name="TextBox 3"/>
+          <p:cNvSpPr txBox="1"/>
+          <p:nvPr/>
+        </p:nvSpPr>
+        <p:spPr>
+          <a:xfrm>
+            <a:off x="548640" y="6446520"/>
+            <a:ext cx="8229600" cy="274320"/>
+          </a:xfrm>
+          <a:prstGeom prst="rect">
+            <a:avLst/>
+          </a:prstGeom>
+          <a:noFill/>
+        </p:spPr>
+        <p:txBody>
+          <a:bodyPr wrap="square" anchor="t" lIns="0" rIns="0" tIns="0" bIns="0"/>
+          <a:lstStyle/>
+          <a:p>
+            <a:pPr algn="l"/>
+            <a:r>
+              <a:rPr sz="1000" b="0" i="0">
+                <a:solidFill>
+                  <a:srgbClr val="54595D"/>
+                </a:solidFill>
+                <a:latin typeface="Calibri"/>
+              </a:rPr>
+              <a:t>Digital Support and Security T Level  ·  Emerging Issues and Technologies</a:t>
+            </a:r>
+          </a:p>
+        </p:txBody>
+      </p:sp>
+      <p:sp>
+        <p:nvSpPr>
+          <p:cNvPr id="5" name="TextBox 4"/>
+          <p:cNvSpPr txBox="1"/>
+          <p:nvPr/>
+        </p:nvSpPr>
+        <p:spPr>
+          <a:xfrm>
+            <a:off x="10728655" y="6446520"/>
+            <a:ext cx="914400" cy="274320"/>
+          </a:xfrm>
+          <a:prstGeom prst="rect">
+            <a:avLst/>
+          </a:prstGeom>
+          <a:noFill/>
+        </p:spPr>
+        <p:txBody>
+          <a:bodyPr wrap="square" anchor="t" lIns="0" rIns="0" tIns="0" bIns="0"/>
+          <a:lstStyle/>
+          <a:p>
+            <a:pPr algn="r"/>
+            <a:r>
+              <a:rPr sz="1000" b="0" i="0">
+                <a:solidFill>
+                  <a:srgbClr val="54595D"/>
+                </a:solidFill>
+                <a:latin typeface="Calibri"/>
+              </a:rPr>
+              <a:t>13</a:t>
+            </a:r>
+          </a:p>
+        </p:txBody>
+      </p:sp>
+      <p:sp>
+        <p:nvSpPr>
+          <p:cNvPr id="6" name="Rounded Rectangle 5"/>
+          <p:cNvSpPr/>
+          <p:nvPr/>
+        </p:nvSpPr>
+        <p:spPr>
+          <a:xfrm>
+            <a:off x="548640" y="1600200"/>
+            <a:ext cx="3515258" cy="2148840"/>
+          </a:xfrm>
+          <a:prstGeom prst="roundRect">
+            <a:avLst>
+              <a:gd name="adj" fmla="val 6000"/>
+            </a:avLst>
+          </a:prstGeom>
+          <a:solidFill>
+            <a:srgbClr val="EAF3FF"/>
+          </a:solidFill>
+          <a:ln>
+            <a:noFill/>
+          </a:ln>
+          <a:effectLst/>
+        </p:spPr>
+        <p:style>
+          <a:lnRef idx="1">
+            <a:schemeClr val="accent1"/>
+          </a:lnRef>
+          <a:fillRef idx="3">
+            <a:schemeClr val="accent1"/>
+          </a:fillRef>
+          <a:effectRef idx="2">
+            <a:schemeClr val="accent1"/>
+          </a:effectRef>
+          <a:fontRef idx="minor">
+            <a:schemeClr val="lt1"/>
+          </a:fontRef>
+        </p:style>
+        <p:txBody>
+          <a:bodyPr rtlCol="0" anchor="ctr"/>
+          <a:lstStyle/>
+          <a:p/>
+        </p:txBody>
+      </p:sp>
+      <p:sp>
+        <p:nvSpPr>
+          <p:cNvPr id="7" name="Oval 6"/>
+          <p:cNvSpPr/>
+          <p:nvPr/>
+        </p:nvSpPr>
+        <p:spPr>
+          <a:xfrm>
+            <a:off x="777240" y="1828800"/>
+            <a:ext cx="457200" cy="457200"/>
+          </a:xfrm>
+          <a:prstGeom prst="ellipse">
+            <a:avLst/>
+          </a:prstGeom>
+          <a:solidFill>
+            <a:srgbClr val="F2B705"/>
+          </a:solidFill>
+          <a:ln>
+            <a:noFill/>
+          </a:ln>
+          <a:effectLst/>
+        </p:spPr>
+        <p:style>
+          <a:lnRef idx="1">
+            <a:schemeClr val="accent1"/>
+          </a:lnRef>
+          <a:fillRef idx="3">
+            <a:schemeClr val="accent1"/>
+          </a:fillRef>
+          <a:effectRef idx="2">
+            <a:schemeClr val="accent1"/>
+          </a:effectRef>
+          <a:fontRef idx="minor">
+            <a:schemeClr val="lt1"/>
+          </a:fontRef>
+        </p:style>
+        <p:txBody>
+          <a:bodyPr rtlCol="0" anchor="ctr" lIns="0" rIns="0" tIns="0" bIns="0"/>
+          <a:lstStyle/>
+          <a:p>
+            <a:pPr algn="ctr"/>
+            <a:r>
+              <a:rPr sz="1500" b="1">
+                <a:solidFill>
+                  <a:srgbClr val="202122"/>
+                </a:solidFill>
+                <a:latin typeface="Calibri"/>
+              </a:rPr>
+              <a:t>1</a:t>
+            </a:r>
+          </a:p>
+        </p:txBody>
+      </p:sp>
+      <p:sp>
+        <p:nvSpPr>
+          <p:cNvPr id="8" name="TextBox 7"/>
+          <p:cNvSpPr txBox="1"/>
+          <p:nvPr/>
+        </p:nvSpPr>
+        <p:spPr>
+          <a:xfrm>
+            <a:off x="1371600" y="1801368"/>
+            <a:ext cx="2509418" cy="512064"/>
+          </a:xfrm>
+          <a:prstGeom prst="rect">
+            <a:avLst/>
+          </a:prstGeom>
+          <a:noFill/>
+        </p:spPr>
+        <p:txBody>
+          <a:bodyPr wrap="square" anchor="ctr" lIns="0" rIns="0" tIns="0" bIns="0"/>
+          <a:lstStyle/>
+          <a:p>
+            <a:pPr algn="l"/>
+            <a:r>
+              <a:rPr sz="1900" b="1" i="0">
+                <a:solidFill>
+                  <a:srgbClr val="03306E"/>
+                </a:solidFill>
+                <a:latin typeface="Calibri"/>
+              </a:rPr>
+              <a:t>Open source</a:t>
+            </a:r>
+          </a:p>
+        </p:txBody>
+      </p:sp>
+      <p:sp>
+        <p:nvSpPr>
+          <p:cNvPr id="9" name="TextBox 8"/>
+          <p:cNvSpPr txBox="1"/>
+          <p:nvPr/>
+        </p:nvSpPr>
+        <p:spPr>
+          <a:xfrm>
+            <a:off x="777240" y="2468880"/>
+            <a:ext cx="3058058" cy="1143000"/>
+          </a:xfrm>
+          <a:prstGeom prst="rect">
+            <a:avLst/>
+          </a:prstGeom>
+          <a:noFill/>
+        </p:spPr>
+        <p:txBody>
+          <a:bodyPr wrap="square" anchor="t" lIns="0" rIns="0" tIns="0" bIns="0"/>
+          <a:lstStyle/>
+          <a:p>
+            <a:pPr algn="l"/>
+            <a:r>
+              <a:rPr sz="2000" b="0" i="0">
+                <a:solidFill>
+                  <a:srgbClr val="202122"/>
+                </a:solidFill>
+                <a:latin typeface="Calibri"/>
+              </a:rPr>
+              <a:t>Free to use and change, with community support.</a:t>
+            </a:r>
+          </a:p>
+        </p:txBody>
+      </p:sp>
+      <p:sp>
+        <p:nvSpPr>
+          <p:cNvPr id="10" name="Rounded Rectangle 9"/>
+          <p:cNvSpPr/>
+          <p:nvPr/>
+        </p:nvSpPr>
+        <p:spPr>
+          <a:xfrm>
+            <a:off x="4338218" y="1600200"/>
+            <a:ext cx="3515258" cy="2148840"/>
+          </a:xfrm>
+          <a:prstGeom prst="roundRect">
+            <a:avLst>
+              <a:gd name="adj" fmla="val 6000"/>
+            </a:avLst>
+          </a:prstGeom>
+          <a:solidFill>
+            <a:srgbClr val="EAF3FF"/>
+          </a:solidFill>
+          <a:ln>
+            <a:noFill/>
+          </a:ln>
+          <a:effectLst/>
+        </p:spPr>
+        <p:style>
+          <a:lnRef idx="1">
+            <a:schemeClr val="accent1"/>
+          </a:lnRef>
+          <a:fillRef idx="3">
+            <a:schemeClr val="accent1"/>
+          </a:fillRef>
+          <a:effectRef idx="2">
+            <a:schemeClr val="accent1"/>
+          </a:effectRef>
+          <a:fontRef idx="minor">
+            <a:schemeClr val="lt1"/>
+          </a:fontRef>
+        </p:style>
+        <p:txBody>
+          <a:bodyPr rtlCol="0" anchor="ctr"/>
+          <a:lstStyle/>
+          <a:p/>
+        </p:txBody>
+      </p:sp>
+      <p:sp>
+        <p:nvSpPr>
+          <p:cNvPr id="11" name="Oval 10"/>
+          <p:cNvSpPr/>
+          <p:nvPr/>
+        </p:nvSpPr>
+        <p:spPr>
+          <a:xfrm>
+            <a:off x="4566818" y="1828800"/>
+            <a:ext cx="457200" cy="457200"/>
+          </a:xfrm>
+          <a:prstGeom prst="ellipse">
+            <a:avLst/>
+          </a:prstGeom>
+          <a:solidFill>
+            <a:srgbClr val="F2B705"/>
+          </a:solidFill>
+          <a:ln>
+            <a:noFill/>
+          </a:ln>
+          <a:effectLst/>
+        </p:spPr>
+        <p:style>
+          <a:lnRef idx="1">
+            <a:schemeClr val="accent1"/>
+          </a:lnRef>
+          <a:fillRef idx="3">
+            <a:schemeClr val="accent1"/>
+          </a:fillRef>
+          <a:effectRef idx="2">
+            <a:schemeClr val="accent1"/>
+          </a:effectRef>
+          <a:fontRef idx="minor">
+            <a:schemeClr val="lt1"/>
+          </a:fontRef>
+        </p:style>
+        <p:txBody>
+          <a:bodyPr rtlCol="0" anchor="ctr" lIns="0" rIns="0" tIns="0" bIns="0"/>
+          <a:lstStyle/>
+          <a:p>
+            <a:pPr algn="ctr"/>
+            <a:r>
+              <a:rPr sz="1500" b="1">
+                <a:solidFill>
+                  <a:srgbClr val="202122"/>
+                </a:solidFill>
+                <a:latin typeface="Calibri"/>
+              </a:rPr>
+              <a:t>2</a:t>
+            </a:r>
+          </a:p>
+        </p:txBody>
+      </p:sp>
+      <p:sp>
+        <p:nvSpPr>
+          <p:cNvPr id="12" name="TextBox 11"/>
+          <p:cNvSpPr txBox="1"/>
+          <p:nvPr/>
+        </p:nvSpPr>
+        <p:spPr>
+          <a:xfrm>
+            <a:off x="5161178" y="1801368"/>
+            <a:ext cx="2509418" cy="512064"/>
+          </a:xfrm>
+          <a:prstGeom prst="rect">
+            <a:avLst/>
+          </a:prstGeom>
+          <a:noFill/>
+        </p:spPr>
+        <p:txBody>
+          <a:bodyPr wrap="square" anchor="ctr" lIns="0" rIns="0" tIns="0" bIns="0"/>
+          <a:lstStyle/>
+          <a:p>
+            <a:pPr algn="l"/>
+            <a:r>
+              <a:rPr sz="1900" b="1" i="0">
+                <a:solidFill>
+                  <a:srgbClr val="03306E"/>
+                </a:solidFill>
+                <a:latin typeface="Calibri"/>
+              </a:rPr>
+              <a:t>Blockchain</a:t>
+            </a:r>
+          </a:p>
+        </p:txBody>
+      </p:sp>
+      <p:sp>
+        <p:nvSpPr>
+          <p:cNvPr id="13" name="TextBox 12"/>
+          <p:cNvSpPr txBox="1"/>
+          <p:nvPr/>
+        </p:nvSpPr>
+        <p:spPr>
+          <a:xfrm>
+            <a:off x="4566818" y="2468880"/>
+            <a:ext cx="3058058" cy="1143000"/>
+          </a:xfrm>
+          <a:prstGeom prst="rect">
+            <a:avLst/>
+          </a:prstGeom>
+          <a:noFill/>
+        </p:spPr>
+        <p:txBody>
+          <a:bodyPr wrap="square" anchor="t" lIns="0" rIns="0" tIns="0" bIns="0"/>
+          <a:lstStyle/>
+          <a:p>
+            <a:pPr algn="l"/>
+            <a:r>
+              <a:rPr sz="2000" b="0" i="0">
+                <a:solidFill>
+                  <a:srgbClr val="202122"/>
+                </a:solidFill>
+                <a:latin typeface="Calibri"/>
+              </a:rPr>
+              <a:t>Tamper-resistant shared ledgers.</a:t>
+            </a:r>
+          </a:p>
+        </p:txBody>
+      </p:sp>
+      <p:sp>
+        <p:nvSpPr>
+          <p:cNvPr id="14" name="Rounded Rectangle 13"/>
+          <p:cNvSpPr/>
+          <p:nvPr/>
+        </p:nvSpPr>
+        <p:spPr>
+          <a:xfrm>
+            <a:off x="8127796" y="1600200"/>
+            <a:ext cx="3515258" cy="2148840"/>
+          </a:xfrm>
+          <a:prstGeom prst="roundRect">
+            <a:avLst>
+              <a:gd name="adj" fmla="val 6000"/>
+            </a:avLst>
+          </a:prstGeom>
+          <a:solidFill>
+            <a:srgbClr val="EAF3FF"/>
+          </a:solidFill>
+          <a:ln>
+            <a:noFill/>
+          </a:ln>
+          <a:effectLst/>
+        </p:spPr>
+        <p:style>
+          <a:lnRef idx="1">
+            <a:schemeClr val="accent1"/>
+          </a:lnRef>
+          <a:fillRef idx="3">
+            <a:schemeClr val="accent1"/>
+          </a:fillRef>
+          <a:effectRef idx="2">
+            <a:schemeClr val="accent1"/>
+          </a:effectRef>
+          <a:fontRef idx="minor">
+            <a:schemeClr val="lt1"/>
+          </a:fontRef>
+        </p:style>
+        <p:txBody>
+          <a:bodyPr rtlCol="0" anchor="ctr"/>
+          <a:lstStyle/>
+          <a:p/>
+        </p:txBody>
+      </p:sp>
+      <p:sp>
+        <p:nvSpPr>
+          <p:cNvPr id="15" name="Oval 14"/>
+          <p:cNvSpPr/>
+          <p:nvPr/>
+        </p:nvSpPr>
+        <p:spPr>
+          <a:xfrm>
+            <a:off x="8356396" y="1828800"/>
+            <a:ext cx="457200" cy="457200"/>
+          </a:xfrm>
+          <a:prstGeom prst="ellipse">
+            <a:avLst/>
+          </a:prstGeom>
+          <a:solidFill>
+            <a:srgbClr val="F2B705"/>
+          </a:solidFill>
+          <a:ln>
+            <a:noFill/>
+          </a:ln>
+          <a:effectLst/>
+        </p:spPr>
+        <p:style>
+          <a:lnRef idx="1">
+            <a:schemeClr val="accent1"/>
+          </a:lnRef>
+          <a:fillRef idx="3">
+            <a:schemeClr val="accent1"/>
+          </a:fillRef>
+          <a:effectRef idx="2">
+            <a:schemeClr val="accent1"/>
+          </a:effectRef>
+          <a:fontRef idx="minor">
+            <a:schemeClr val="lt1"/>
+          </a:fontRef>
+        </p:style>
+        <p:txBody>
+          <a:bodyPr rtlCol="0" anchor="ctr" lIns="0" rIns="0" tIns="0" bIns="0"/>
+          <a:lstStyle/>
+          <a:p>
+            <a:pPr algn="ctr"/>
+            <a:r>
+              <a:rPr sz="1500" b="1">
+                <a:solidFill>
+                  <a:srgbClr val="202122"/>
+                </a:solidFill>
+                <a:latin typeface="Calibri"/>
+              </a:rPr>
+              <a:t>3</a:t>
+            </a:r>
+          </a:p>
+        </p:txBody>
+      </p:sp>
+      <p:sp>
+        <p:nvSpPr>
+          <p:cNvPr id="16" name="TextBox 15"/>
+          <p:cNvSpPr txBox="1"/>
+          <p:nvPr/>
+        </p:nvSpPr>
+        <p:spPr>
+          <a:xfrm>
+            <a:off x="8950756" y="1801368"/>
+            <a:ext cx="2509418" cy="512064"/>
+          </a:xfrm>
+          <a:prstGeom prst="rect">
+            <a:avLst/>
+          </a:prstGeom>
+          <a:noFill/>
+        </p:spPr>
+        <p:txBody>
+          <a:bodyPr wrap="square" anchor="ctr" lIns="0" rIns="0" tIns="0" bIns="0"/>
+          <a:lstStyle/>
+          <a:p>
+            <a:pPr algn="l"/>
+            <a:r>
+              <a:rPr sz="1600" b="1" i="0">
+                <a:solidFill>
+                  <a:srgbClr val="03306E"/>
+                </a:solidFill>
+                <a:latin typeface="Calibri"/>
+              </a:rPr>
+              <a:t>3D printing and drones</a:t>
+            </a:r>
+          </a:p>
+        </p:txBody>
+      </p:sp>
+      <p:sp>
+        <p:nvSpPr>
+          <p:cNvPr id="17" name="TextBox 16"/>
+          <p:cNvSpPr txBox="1"/>
+          <p:nvPr/>
+        </p:nvSpPr>
+        <p:spPr>
+          <a:xfrm>
+            <a:off x="8356396" y="2468880"/>
+            <a:ext cx="3058058" cy="1143000"/>
+          </a:xfrm>
+          <a:prstGeom prst="rect">
+            <a:avLst/>
+          </a:prstGeom>
+          <a:noFill/>
+        </p:spPr>
+        <p:txBody>
+          <a:bodyPr wrap="square" anchor="t" lIns="0" rIns="0" tIns="0" bIns="0"/>
+          <a:lstStyle/>
+          <a:p>
+            <a:pPr algn="l"/>
+            <a:r>
+              <a:rPr sz="2000" b="0" i="0">
+                <a:solidFill>
+                  <a:srgbClr val="202122"/>
+                </a:solidFill>
+                <a:latin typeface="Calibri"/>
+              </a:rPr>
+              <a:t>New ways to make and deliver things.</a:t>
+            </a:r>
+          </a:p>
+        </p:txBody>
+      </p:sp>
+      <p:sp>
+        <p:nvSpPr>
+          <p:cNvPr id="18" name="Rounded Rectangle 17"/>
+          <p:cNvSpPr/>
+          <p:nvPr/>
+        </p:nvSpPr>
+        <p:spPr>
+          <a:xfrm>
+            <a:off x="548640" y="4023360"/>
+            <a:ext cx="3515258" cy="2148840"/>
+          </a:xfrm>
+          <a:prstGeom prst="roundRect">
+            <a:avLst>
+              <a:gd name="adj" fmla="val 6000"/>
+            </a:avLst>
+          </a:prstGeom>
+          <a:solidFill>
+            <a:srgbClr val="EAF3FF"/>
+          </a:solidFill>
+          <a:ln>
+            <a:noFill/>
+          </a:ln>
+          <a:effectLst/>
+        </p:spPr>
+        <p:style>
+          <a:lnRef idx="1">
+            <a:schemeClr val="accent1"/>
+          </a:lnRef>
+          <a:fillRef idx="3">
+            <a:schemeClr val="accent1"/>
+          </a:fillRef>
+          <a:effectRef idx="2">
+            <a:schemeClr val="accent1"/>
+          </a:effectRef>
+          <a:fontRef idx="minor">
+            <a:schemeClr val="lt1"/>
+          </a:fontRef>
+        </p:style>
+        <p:txBody>
+          <a:bodyPr rtlCol="0" anchor="ctr"/>
+          <a:lstStyle/>
+          <a:p/>
+        </p:txBody>
+      </p:sp>
+      <p:sp>
+        <p:nvSpPr>
+          <p:cNvPr id="19" name="Oval 18"/>
+          <p:cNvSpPr/>
+          <p:nvPr/>
+        </p:nvSpPr>
+        <p:spPr>
+          <a:xfrm>
+            <a:off x="777240" y="4251960"/>
+            <a:ext cx="457200" cy="457200"/>
+          </a:xfrm>
+          <a:prstGeom prst="ellipse">
+            <a:avLst/>
+          </a:prstGeom>
+          <a:solidFill>
+            <a:srgbClr val="F2B705"/>
+          </a:solidFill>
+          <a:ln>
+            <a:noFill/>
+          </a:ln>
+          <a:effectLst/>
+        </p:spPr>
+        <p:style>
+          <a:lnRef idx="1">
+            <a:schemeClr val="accent1"/>
+          </a:lnRef>
+          <a:fillRef idx="3">
+            <a:schemeClr val="accent1"/>
+          </a:fillRef>
+          <a:effectRef idx="2">
+            <a:schemeClr val="accent1"/>
+          </a:effectRef>
+          <a:fontRef idx="minor">
+            <a:schemeClr val="lt1"/>
+          </a:fontRef>
+        </p:style>
+        <p:txBody>
+          <a:bodyPr rtlCol="0" anchor="ctr" lIns="0" rIns="0" tIns="0" bIns="0"/>
+          <a:lstStyle/>
+          <a:p>
+            <a:pPr algn="ctr"/>
+            <a:r>
+              <a:rPr sz="1500" b="1">
+                <a:solidFill>
+                  <a:srgbClr val="202122"/>
+                </a:solidFill>
+                <a:latin typeface="Calibri"/>
+              </a:rPr>
+              <a:t>4</a:t>
+            </a:r>
+          </a:p>
+        </p:txBody>
+      </p:sp>
+      <p:sp>
+        <p:nvSpPr>
+          <p:cNvPr id="20" name="TextBox 19"/>
+          <p:cNvSpPr txBox="1"/>
+          <p:nvPr/>
+        </p:nvSpPr>
+        <p:spPr>
+          <a:xfrm>
+            <a:off x="1371600" y="4224528"/>
+            <a:ext cx="2509418" cy="512064"/>
+          </a:xfrm>
+          <a:prstGeom prst="rect">
+            <a:avLst/>
+          </a:prstGeom>
+          <a:noFill/>
+        </p:spPr>
+        <p:txBody>
+          <a:bodyPr wrap="square" anchor="ctr" lIns="0" rIns="0" tIns="0" bIns="0"/>
+          <a:lstStyle/>
+          <a:p>
+            <a:pPr algn="l"/>
+            <a:r>
+              <a:rPr sz="1900" b="1" i="0">
+                <a:solidFill>
+                  <a:srgbClr val="03306E"/>
+                </a:solidFill>
+                <a:latin typeface="Calibri"/>
+              </a:rPr>
+              <a:t>Autonomous machines</a:t>
+            </a:r>
+          </a:p>
+        </p:txBody>
+      </p:sp>
+      <p:sp>
+        <p:nvSpPr>
+          <p:cNvPr id="21" name="TextBox 20"/>
+          <p:cNvSpPr txBox="1"/>
+          <p:nvPr/>
+        </p:nvSpPr>
+        <p:spPr>
+          <a:xfrm>
+            <a:off x="777240" y="4892040"/>
+            <a:ext cx="3058058" cy="1143000"/>
+          </a:xfrm>
+          <a:prstGeom prst="rect">
+            <a:avLst/>
+          </a:prstGeom>
+          <a:noFill/>
+        </p:spPr>
+        <p:txBody>
+          <a:bodyPr wrap="square" anchor="t" lIns="0" rIns="0" tIns="0" bIns="0"/>
+          <a:lstStyle/>
+          <a:p>
+            <a:pPr algn="l"/>
+            <a:r>
+              <a:rPr sz="2000" b="0" i="0">
+                <a:solidFill>
+                  <a:srgbClr val="202122"/>
+                </a:solidFill>
+                <a:latin typeface="Calibri"/>
+              </a:rPr>
+              <a:t>Self-driving cars and robotic assembly.</a:t>
+            </a:r>
+          </a:p>
+        </p:txBody>
+      </p:sp>
+      <p:sp>
+        <p:nvSpPr>
+          <p:cNvPr id="22" name="Rounded Rectangle 21"/>
+          <p:cNvSpPr/>
+          <p:nvPr/>
+        </p:nvSpPr>
+        <p:spPr>
+          <a:xfrm>
+            <a:off x="4338218" y="4023360"/>
+            <a:ext cx="3515258" cy="2148840"/>
+          </a:xfrm>
+          <a:prstGeom prst="roundRect">
+            <a:avLst>
+              <a:gd name="adj" fmla="val 6000"/>
+            </a:avLst>
+          </a:prstGeom>
+          <a:solidFill>
+            <a:srgbClr val="EAF3FF"/>
+          </a:solidFill>
+          <a:ln>
+            <a:noFill/>
+          </a:ln>
+          <a:effectLst/>
+        </p:spPr>
+        <p:style>
+          <a:lnRef idx="1">
+            <a:schemeClr val="accent1"/>
+          </a:lnRef>
+          <a:fillRef idx="3">
+            <a:schemeClr val="accent1"/>
+          </a:fillRef>
+          <a:effectRef idx="2">
+            <a:schemeClr val="accent1"/>
+          </a:effectRef>
+          <a:fontRef idx="minor">
+            <a:schemeClr val="lt1"/>
+          </a:fontRef>
+        </p:style>
+        <p:txBody>
+          <a:bodyPr rtlCol="0" anchor="ctr"/>
+          <a:lstStyle/>
+          <a:p/>
+        </p:txBody>
+      </p:sp>
+      <p:sp>
+        <p:nvSpPr>
+          <p:cNvPr id="23" name="Oval 22"/>
+          <p:cNvSpPr/>
+          <p:nvPr/>
+        </p:nvSpPr>
+        <p:spPr>
+          <a:xfrm>
+            <a:off x="4566818" y="4251960"/>
+            <a:ext cx="457200" cy="457200"/>
+          </a:xfrm>
+          <a:prstGeom prst="ellipse">
+            <a:avLst/>
+          </a:prstGeom>
+          <a:solidFill>
+            <a:srgbClr val="F2B705"/>
+          </a:solidFill>
+          <a:ln>
+            <a:noFill/>
+          </a:ln>
+          <a:effectLst/>
+        </p:spPr>
+        <p:style>
+          <a:lnRef idx="1">
+            <a:schemeClr val="accent1"/>
+          </a:lnRef>
+          <a:fillRef idx="3">
+            <a:schemeClr val="accent1"/>
+          </a:fillRef>
+          <a:effectRef idx="2">
+            <a:schemeClr val="accent1"/>
+          </a:effectRef>
+          <a:fontRef idx="minor">
+            <a:schemeClr val="lt1"/>
+          </a:fontRef>
+        </p:style>
+        <p:txBody>
+          <a:bodyPr rtlCol="0" anchor="ctr" lIns="0" rIns="0" tIns="0" bIns="0"/>
+          <a:lstStyle/>
+          <a:p>
+            <a:pPr algn="ctr"/>
+            <a:r>
+              <a:rPr sz="1500" b="1">
+                <a:solidFill>
+                  <a:srgbClr val="202122"/>
+                </a:solidFill>
+                <a:latin typeface="Calibri"/>
+              </a:rPr>
+              <a:t>5</a:t>
+            </a:r>
+          </a:p>
+        </p:txBody>
+      </p:sp>
+      <p:sp>
+        <p:nvSpPr>
+          <p:cNvPr id="24" name="TextBox 23"/>
+          <p:cNvSpPr txBox="1"/>
+          <p:nvPr/>
+        </p:nvSpPr>
+        <p:spPr>
+          <a:xfrm>
+            <a:off x="5161178" y="4224528"/>
+            <a:ext cx="2509418" cy="512064"/>
+          </a:xfrm>
+          <a:prstGeom prst="rect">
+            <a:avLst/>
+          </a:prstGeom>
+          <a:noFill/>
+        </p:spPr>
+        <p:txBody>
+          <a:bodyPr wrap="square" anchor="ctr" lIns="0" rIns="0" tIns="0" bIns="0"/>
+          <a:lstStyle/>
+          <a:p>
+            <a:pPr algn="l"/>
+            <a:r>
+              <a:rPr sz="1800" b="1" i="0">
+                <a:solidFill>
+                  <a:srgbClr val="03306E"/>
+                </a:solidFill>
+                <a:latin typeface="Calibri"/>
+              </a:rPr>
+              <a:t>Environmental impact</a:t>
+            </a:r>
+          </a:p>
+        </p:txBody>
+      </p:sp>
+      <p:sp>
+        <p:nvSpPr>
+          <p:cNvPr id="25" name="TextBox 24"/>
+          <p:cNvSpPr txBox="1"/>
+          <p:nvPr/>
+        </p:nvSpPr>
+        <p:spPr>
+          <a:xfrm>
+            <a:off x="4566818" y="4892040"/>
+            <a:ext cx="3058058" cy="1143000"/>
+          </a:xfrm>
+          <a:prstGeom prst="rect">
+            <a:avLst/>
+          </a:prstGeom>
+          <a:noFill/>
+        </p:spPr>
+        <p:txBody>
+          <a:bodyPr wrap="square" anchor="t" lIns="0" rIns="0" tIns="0" bIns="0"/>
+          <a:lstStyle/>
+          <a:p>
+            <a:pPr algn="l"/>
+            <a:r>
+              <a:rPr sz="2000" b="0" i="0">
+                <a:solidFill>
+                  <a:srgbClr val="202122"/>
+                </a:solidFill>
+                <a:latin typeface="Calibri"/>
+              </a:rPr>
+              <a:t>Rare metals, energy use and disposal.</a:t>
+            </a:r>
+          </a:p>
+        </p:txBody>
+      </p:sp>
+    </p:spTree>
+  </p:cSld>
+  <p:clrMapOvr>
+    <a:masterClrMapping/>
+  </p:clrMapOvr>
+</p:sld>
+</file>
+
+<file path=ppt/slides/slide14.xml><?xml version="1.0" encoding="utf-8"?>
+<p:sld xmlns:a="http://schemas.openxmlformats.org/drawingml/2006/main" xmlns:p="http://schemas.openxmlformats.org/presentationml/2006/main" xmlns:r="http://schemas.openxmlformats.org/officeDocument/2006/relationships">
+  <p:cSld>
+    <p:bg>
+      <p:bgPr>
+        <a:solidFill>
+          <a:srgbClr val="FFFFFF"/>
+        </a:solidFill>
+        <a:effectLst/>
+      </p:bgPr>
+    </p:bg>
+    <p:spTree>
+      <p:nvGrpSpPr>
+        <p:cNvPr id="1" name=""/>
+        <p:cNvGrpSpPr/>
+        <p:nvPr/>
+      </p:nvGrpSpPr>
+      <p:grpSpPr/>
+      <p:sp>
+        <p:nvSpPr>
+          <p:cNvPr id="2" name="TextBox 1"/>
+          <p:cNvSpPr txBox="1"/>
+          <p:nvPr/>
+        </p:nvSpPr>
+        <p:spPr>
+          <a:xfrm>
+            <a:off x="548640" y="320040"/>
+            <a:ext cx="11094415" cy="274320"/>
+          </a:xfrm>
+          <a:prstGeom prst="rect">
+            <a:avLst/>
+          </a:prstGeom>
+          <a:noFill/>
+        </p:spPr>
+        <p:txBody>
+          <a:bodyPr wrap="square" anchor="t" lIns="0" rIns="0" tIns="0" bIns="0"/>
+          <a:lstStyle/>
+          <a:p>
+            <a:pPr algn="l"/>
+            <a:r>
+              <a:rPr sz="1100" b="1" i="0">
+                <a:solidFill>
+                  <a:srgbClr val="54595D"/>
+                </a:solidFill>
+                <a:latin typeface="Calibri"/>
+              </a:rPr>
+              <a:t>CORE COMPONENT  ·  Core Paper 2</a:t>
+            </a:r>
+          </a:p>
+        </p:txBody>
+      </p:sp>
+      <p:sp>
+        <p:nvSpPr>
+          <p:cNvPr id="3" name="TextBox 2"/>
+          <p:cNvSpPr txBox="1"/>
+          <p:nvPr/>
+        </p:nvSpPr>
+        <p:spPr>
+          <a:xfrm>
+            <a:off x="548640" y="566928"/>
+            <a:ext cx="11094415" cy="822960"/>
+          </a:xfrm>
+          <a:prstGeom prst="rect">
+            <a:avLst/>
+          </a:prstGeom>
+          <a:noFill/>
+        </p:spPr>
+        <p:txBody>
+          <a:bodyPr wrap="square" anchor="ctr" lIns="0" rIns="0" tIns="0" bIns="0"/>
+          <a:lstStyle/>
+          <a:p>
+            <a:pPr algn="l"/>
+            <a:r>
+              <a:rPr sz="3200" b="1" i="0">
+                <a:solidFill>
+                  <a:srgbClr val="03306E"/>
+                </a:solidFill>
+                <a:latin typeface="Cambria"/>
+              </a:rPr>
+              <a:t>Quick check: Emerging technologies (2)</a:t>
+            </a:r>
+          </a:p>
+        </p:txBody>
+      </p:sp>
+      <p:sp>
+        <p:nvSpPr>
+          <p:cNvPr id="4" name="TextBox 3"/>
+          <p:cNvSpPr txBox="1"/>
+          <p:nvPr/>
+        </p:nvSpPr>
+        <p:spPr>
+          <a:xfrm>
+            <a:off x="548640" y="6446520"/>
+            <a:ext cx="8229600" cy="274320"/>
+          </a:xfrm>
+          <a:prstGeom prst="rect">
+            <a:avLst/>
+          </a:prstGeom>
+          <a:noFill/>
+        </p:spPr>
+        <p:txBody>
+          <a:bodyPr wrap="square" anchor="t" lIns="0" rIns="0" tIns="0" bIns="0"/>
+          <a:lstStyle/>
+          <a:p>
+            <a:pPr algn="l"/>
+            <a:r>
+              <a:rPr sz="1000" b="0" i="0">
+                <a:solidFill>
+                  <a:srgbClr val="54595D"/>
+                </a:solidFill>
+                <a:latin typeface="Calibri"/>
+              </a:rPr>
+              <a:t>Digital Support and Security T Level  ·  Emerging Issues and Technologies</a:t>
+            </a:r>
+          </a:p>
+        </p:txBody>
+      </p:sp>
+      <p:sp>
+        <p:nvSpPr>
+          <p:cNvPr id="5" name="TextBox 4"/>
+          <p:cNvSpPr txBox="1"/>
+          <p:nvPr/>
+        </p:nvSpPr>
+        <p:spPr>
+          <a:xfrm>
+            <a:off x="10728655" y="6446520"/>
+            <a:ext cx="914400" cy="274320"/>
+          </a:xfrm>
+          <a:prstGeom prst="rect">
+            <a:avLst/>
+          </a:prstGeom>
+          <a:noFill/>
+        </p:spPr>
+        <p:txBody>
+          <a:bodyPr wrap="square" anchor="t" lIns="0" rIns="0" tIns="0" bIns="0"/>
+          <a:lstStyle/>
+          <a:p>
+            <a:pPr algn="r"/>
+            <a:r>
+              <a:rPr sz="1000" b="0" i="0">
+                <a:solidFill>
+                  <a:srgbClr val="54595D"/>
+                </a:solidFill>
+                <a:latin typeface="Calibri"/>
+              </a:rPr>
+              <a:t>14</a:t>
+            </a:r>
+          </a:p>
+        </p:txBody>
+      </p:sp>
+      <p:sp>
+        <p:nvSpPr>
+          <p:cNvPr id="6" name="Oval 5"/>
+          <p:cNvSpPr/>
+          <p:nvPr/>
+        </p:nvSpPr>
+        <p:spPr>
+          <a:xfrm>
+            <a:off x="548640" y="1691640"/>
+            <a:ext cx="502920" cy="502920"/>
+          </a:xfrm>
+          <a:prstGeom prst="ellipse">
+            <a:avLst/>
+          </a:prstGeom>
+          <a:solidFill>
+            <a:srgbClr val="F2B705"/>
+          </a:solidFill>
+          <a:ln>
+            <a:noFill/>
+          </a:ln>
+          <a:effectLst/>
+        </p:spPr>
+        <p:style>
+          <a:lnRef idx="1">
+            <a:schemeClr val="accent1"/>
+          </a:lnRef>
+          <a:fillRef idx="3">
+            <a:schemeClr val="accent1"/>
+          </a:fillRef>
+          <a:effectRef idx="2">
+            <a:schemeClr val="accent1"/>
+          </a:effectRef>
+          <a:fontRef idx="minor">
+            <a:schemeClr val="lt1"/>
+          </a:fontRef>
+        </p:style>
+        <p:txBody>
+          <a:bodyPr rtlCol="0" anchor="ctr" lIns="0" rIns="0" tIns="0" bIns="0"/>
+          <a:lstStyle/>
+          <a:p>
+            <a:pPr algn="ctr"/>
+            <a:r>
+              <a:rPr sz="1600" b="1">
+                <a:solidFill>
+                  <a:srgbClr val="202122"/>
+                </a:solidFill>
+                <a:latin typeface="Calibri"/>
+              </a:rPr>
+              <a:t>1</a:t>
+            </a:r>
+          </a:p>
+        </p:txBody>
+      </p:sp>
+      <p:sp>
+        <p:nvSpPr>
+          <p:cNvPr id="7" name="TextBox 6"/>
+          <p:cNvSpPr txBox="1"/>
+          <p:nvPr/>
+        </p:nvSpPr>
+        <p:spPr>
+          <a:xfrm>
+            <a:off x="1371600" y="1645920"/>
+            <a:ext cx="10271455" cy="1188720"/>
+          </a:xfrm>
+          <a:prstGeom prst="rect">
+            <a:avLst/>
+          </a:prstGeom>
+          <a:noFill/>
+        </p:spPr>
+        <p:txBody>
+          <a:bodyPr wrap="square" anchor="t" lIns="0" rIns="0" tIns="0" bIns="0"/>
+          <a:lstStyle/>
+          <a:p>
+            <a:pPr algn="l"/>
+            <a:r>
+              <a:rPr sz="2400" b="0" i="0">
+                <a:solidFill>
+                  <a:srgbClr val="202122"/>
+                </a:solidFill>
+                <a:latin typeface="Calibri"/>
+              </a:rPr>
+              <a:t>What is open source software?</a:t>
+            </a:r>
+          </a:p>
+        </p:txBody>
+      </p:sp>
+      <p:sp>
+        <p:nvSpPr>
+          <p:cNvPr id="8" name="Oval 7"/>
+          <p:cNvSpPr/>
+          <p:nvPr/>
+        </p:nvSpPr>
+        <p:spPr>
+          <a:xfrm>
+            <a:off x="548640" y="3108960"/>
+            <a:ext cx="502920" cy="502920"/>
+          </a:xfrm>
+          <a:prstGeom prst="ellipse">
+            <a:avLst/>
+          </a:prstGeom>
+          <a:solidFill>
+            <a:srgbClr val="F2B705"/>
+          </a:solidFill>
+          <a:ln>
+            <a:noFill/>
+          </a:ln>
+          <a:effectLst/>
+        </p:spPr>
+        <p:style>
+          <a:lnRef idx="1">
+            <a:schemeClr val="accent1"/>
+          </a:lnRef>
+          <a:fillRef idx="3">
+            <a:schemeClr val="accent1"/>
+          </a:fillRef>
+          <a:effectRef idx="2">
+            <a:schemeClr val="accent1"/>
+          </a:effectRef>
+          <a:fontRef idx="minor">
+            <a:schemeClr val="lt1"/>
+          </a:fontRef>
+        </p:style>
+        <p:txBody>
+          <a:bodyPr rtlCol="0" anchor="ctr" lIns="0" rIns="0" tIns="0" bIns="0"/>
+          <a:lstStyle/>
+          <a:p>
+            <a:pPr algn="ctr"/>
+            <a:r>
+              <a:rPr sz="1600" b="1">
+                <a:solidFill>
+                  <a:srgbClr val="202122"/>
+                </a:solidFill>
+                <a:latin typeface="Calibri"/>
+              </a:rPr>
+              <a:t>2</a:t>
+            </a:r>
+          </a:p>
+        </p:txBody>
+      </p:sp>
+      <p:sp>
+        <p:nvSpPr>
+          <p:cNvPr id="9" name="TextBox 8"/>
+          <p:cNvSpPr txBox="1"/>
+          <p:nvPr/>
+        </p:nvSpPr>
+        <p:spPr>
+          <a:xfrm>
+            <a:off x="1371600" y="3063240"/>
+            <a:ext cx="10271455" cy="1188720"/>
+          </a:xfrm>
+          <a:prstGeom prst="rect">
+            <a:avLst/>
+          </a:prstGeom>
+          <a:noFill/>
+        </p:spPr>
+        <p:txBody>
+          <a:bodyPr wrap="square" anchor="t" lIns="0" rIns="0" tIns="0" bIns="0"/>
+          <a:lstStyle/>
+          <a:p>
+            <a:pPr algn="l"/>
+            <a:r>
+              <a:rPr sz="2400" b="0" i="0">
+                <a:solidFill>
+                  <a:srgbClr val="202122"/>
+                </a:solidFill>
+                <a:latin typeface="Calibri"/>
+              </a:rPr>
+              <a:t>Give one environmental impact of technology.</a:t>
+            </a:r>
+          </a:p>
+        </p:txBody>
+      </p:sp>
+      <p:sp>
+        <p:nvSpPr>
+          <p:cNvPr id="10" name="Oval 9"/>
+          <p:cNvSpPr/>
+          <p:nvPr/>
+        </p:nvSpPr>
+        <p:spPr>
+          <a:xfrm>
+            <a:off x="548640" y="4526280"/>
+            <a:ext cx="502920" cy="502920"/>
+          </a:xfrm>
+          <a:prstGeom prst="ellipse">
+            <a:avLst/>
+          </a:prstGeom>
+          <a:solidFill>
+            <a:srgbClr val="F2B705"/>
+          </a:solidFill>
+          <a:ln>
+            <a:noFill/>
+          </a:ln>
+          <a:effectLst/>
+        </p:spPr>
+        <p:style>
+          <a:lnRef idx="1">
+            <a:schemeClr val="accent1"/>
+          </a:lnRef>
+          <a:fillRef idx="3">
+            <a:schemeClr val="accent1"/>
+          </a:fillRef>
+          <a:effectRef idx="2">
+            <a:schemeClr val="accent1"/>
+          </a:effectRef>
+          <a:fontRef idx="minor">
+            <a:schemeClr val="lt1"/>
+          </a:fontRef>
+        </p:style>
+        <p:txBody>
+          <a:bodyPr rtlCol="0" anchor="ctr" lIns="0" rIns="0" tIns="0" bIns="0"/>
+          <a:lstStyle/>
+          <a:p>
+            <a:pPr algn="ctr"/>
+            <a:r>
+              <a:rPr sz="1600" b="1">
+                <a:solidFill>
+                  <a:srgbClr val="202122"/>
+                </a:solidFill>
+                <a:latin typeface="Calibri"/>
+              </a:rPr>
+              <a:t>3</a:t>
+            </a:r>
+          </a:p>
+        </p:txBody>
+      </p:sp>
+      <p:sp>
+        <p:nvSpPr>
+          <p:cNvPr id="11" name="TextBox 10"/>
+          <p:cNvSpPr txBox="1"/>
+          <p:nvPr/>
+        </p:nvSpPr>
+        <p:spPr>
+          <a:xfrm>
+            <a:off x="1371600" y="4480560"/>
+            <a:ext cx="10271455" cy="1188720"/>
+          </a:xfrm>
+          <a:prstGeom prst="rect">
+            <a:avLst/>
+          </a:prstGeom>
+          <a:noFill/>
+        </p:spPr>
+        <p:txBody>
+          <a:bodyPr wrap="square" anchor="t" lIns="0" rIns="0" tIns="0" bIns="0"/>
+          <a:lstStyle/>
+          <a:p>
+            <a:pPr algn="l"/>
+            <a:r>
+              <a:rPr sz="2400" b="0" i="0">
+                <a:solidFill>
+                  <a:srgbClr val="202122"/>
+                </a:solidFill>
+                <a:latin typeface="Calibri"/>
+              </a:rPr>
+              <a:t>What makes blockchain useful?</a:t>
+            </a:r>
+          </a:p>
+        </p:txBody>
+      </p:sp>
+      <p:sp>
+        <p:nvSpPr>
+          <p:cNvPr id="12" name="TextBox 11"/>
+          <p:cNvSpPr txBox="1"/>
+          <p:nvPr/>
+        </p:nvSpPr>
+        <p:spPr>
+          <a:xfrm>
+            <a:off x="548640" y="5852160"/>
+            <a:ext cx="11094415" cy="365760"/>
+          </a:xfrm>
+          <a:prstGeom prst="rect">
+            <a:avLst/>
+          </a:prstGeom>
+          <a:noFill/>
+        </p:spPr>
+        <p:txBody>
+          <a:bodyPr wrap="square" anchor="t" lIns="0" rIns="0" tIns="0" bIns="0"/>
+          <a:lstStyle/>
+          <a:p>
+            <a:pPr algn="l"/>
+            <a:r>
+              <a:rPr sz="1300" b="0" i="1">
+                <a:solidFill>
+                  <a:srgbClr val="54595D"/>
+                </a:solidFill>
+                <a:latin typeface="Calibri"/>
+              </a:rPr>
+              <a:t>Answer on mini whiteboards or in your book. Answers are in the speaker notes.</a:t>
+            </a:r>
+          </a:p>
+        </p:txBody>
+      </p:sp>
+    </p:spTree>
+  </p:cSld>
+  <p:clrMapOvr>
+    <a:masterClrMapping/>
+  </p:clrMapOvr>
+</p:sld>
+</file>
+
+<file path=ppt/slides/slide15.xml><?xml version="1.0" encoding="utf-8"?>
+<p:sld xmlns:a="http://schemas.openxmlformats.org/drawingml/2006/main" xmlns:p="http://schemas.openxmlformats.org/presentationml/2006/main" xmlns:r="http://schemas.openxmlformats.org/officeDocument/2006/relationships">
+  <p:cSld>
+    <p:bg>
+      <p:bgPr>
+        <a:solidFill>
+          <a:srgbClr val="FFFFFF"/>
+        </a:solidFill>
+        <a:effectLst/>
+      </p:bgPr>
+    </p:bg>
+    <p:spTree>
+      <p:nvGrpSpPr>
+        <p:cNvPr id="1" name=""/>
+        <p:cNvGrpSpPr/>
+        <p:nvPr/>
+      </p:nvGrpSpPr>
+      <p:grpSpPr/>
+      <p:sp>
+        <p:nvSpPr>
+          <p:cNvPr id="2" name="TextBox 1"/>
+          <p:cNvSpPr txBox="1"/>
+          <p:nvPr/>
+        </p:nvSpPr>
+        <p:spPr>
+          <a:xfrm>
+            <a:off x="548640" y="320040"/>
+            <a:ext cx="11094415" cy="274320"/>
+          </a:xfrm>
+          <a:prstGeom prst="rect">
+            <a:avLst/>
+          </a:prstGeom>
+          <a:noFill/>
+        </p:spPr>
+        <p:txBody>
+          <a:bodyPr wrap="square" anchor="t" lIns="0" rIns="0" tIns="0" bIns="0"/>
+          <a:lstStyle/>
+          <a:p>
+            <a:pPr algn="l"/>
+            <a:r>
+              <a:rPr sz="1100" b="1" i="0">
+                <a:solidFill>
+                  <a:srgbClr val="54595D"/>
+                </a:solidFill>
+                <a:latin typeface="Calibri"/>
+              </a:rPr>
+              <a:t>CORE COMPONENT  ·  Core Paper 2</a:t>
+            </a:r>
+          </a:p>
+        </p:txBody>
+      </p:sp>
+      <p:sp>
+        <p:nvSpPr>
+          <p:cNvPr id="3" name="TextBox 2"/>
+          <p:cNvSpPr txBox="1"/>
+          <p:nvPr/>
+        </p:nvSpPr>
+        <p:spPr>
+          <a:xfrm>
+            <a:off x="548640" y="566928"/>
+            <a:ext cx="11094415" cy="822960"/>
+          </a:xfrm>
+          <a:prstGeom prst="rect">
+            <a:avLst/>
+          </a:prstGeom>
+          <a:noFill/>
+        </p:spPr>
+        <p:txBody>
+          <a:bodyPr wrap="square" anchor="ctr" lIns="0" rIns="0" tIns="0" bIns="0"/>
+          <a:lstStyle/>
+          <a:p>
+            <a:pPr algn="l"/>
+            <a:r>
+              <a:rPr sz="3200" b="1" i="0">
+                <a:solidFill>
+                  <a:srgbClr val="03306E"/>
+                </a:solidFill>
+                <a:latin typeface="Cambria"/>
+              </a:rPr>
+              <a:t>Check your understanding</a:t>
+            </a:r>
+          </a:p>
+        </p:txBody>
+      </p:sp>
+      <p:sp>
+        <p:nvSpPr>
+          <p:cNvPr id="4" name="TextBox 3"/>
+          <p:cNvSpPr txBox="1"/>
+          <p:nvPr/>
+        </p:nvSpPr>
+        <p:spPr>
+          <a:xfrm>
+            <a:off x="548640" y="6446520"/>
+            <a:ext cx="8229600" cy="274320"/>
+          </a:xfrm>
+          <a:prstGeom prst="rect">
+            <a:avLst/>
+          </a:prstGeom>
+          <a:noFill/>
+        </p:spPr>
+        <p:txBody>
+          <a:bodyPr wrap="square" anchor="t" lIns="0" rIns="0" tIns="0" bIns="0"/>
+          <a:lstStyle/>
+          <a:p>
+            <a:pPr algn="l"/>
+            <a:r>
+              <a:rPr sz="1000" b="0" i="0">
+                <a:solidFill>
+                  <a:srgbClr val="54595D"/>
+                </a:solidFill>
+                <a:latin typeface="Calibri"/>
+              </a:rPr>
+              <a:t>Digital Support and Security T Level  ·  Emerging Issues and Technologies</a:t>
+            </a:r>
+          </a:p>
+        </p:txBody>
+      </p:sp>
+      <p:sp>
+        <p:nvSpPr>
+          <p:cNvPr id="5" name="TextBox 4"/>
+          <p:cNvSpPr txBox="1"/>
+          <p:nvPr/>
+        </p:nvSpPr>
+        <p:spPr>
+          <a:xfrm>
+            <a:off x="10728655" y="6446520"/>
+            <a:ext cx="914400" cy="274320"/>
+          </a:xfrm>
+          <a:prstGeom prst="rect">
+            <a:avLst/>
+          </a:prstGeom>
+          <a:noFill/>
+        </p:spPr>
+        <p:txBody>
+          <a:bodyPr wrap="square" anchor="t" lIns="0" rIns="0" tIns="0" bIns="0"/>
+          <a:lstStyle/>
+          <a:p>
+            <a:pPr algn="r"/>
+            <a:r>
+              <a:rPr sz="1000" b="0" i="0">
+                <a:solidFill>
+                  <a:srgbClr val="54595D"/>
+                </a:solidFill>
+                <a:latin typeface="Calibri"/>
+              </a:rPr>
+              <a:t>15</a:t>
+            </a:r>
+          </a:p>
+        </p:txBody>
+      </p:sp>
+      <p:sp>
+        <p:nvSpPr>
+          <p:cNvPr id="6" name="Oval 5"/>
+          <p:cNvSpPr/>
+          <p:nvPr/>
+        </p:nvSpPr>
+        <p:spPr>
+          <a:xfrm>
+            <a:off x="548640" y="1618488"/>
+            <a:ext cx="411480" cy="411480"/>
+          </a:xfrm>
+          <a:prstGeom prst="ellipse">
+            <a:avLst/>
+          </a:prstGeom>
+          <a:solidFill>
+            <a:srgbClr val="F2B705"/>
+          </a:solidFill>
+          <a:ln>
+            <a:noFill/>
+          </a:ln>
+          <a:effectLst/>
+        </p:spPr>
+        <p:style>
+          <a:lnRef idx="1">
+            <a:schemeClr val="accent1"/>
+          </a:lnRef>
+          <a:fillRef idx="3">
+            <a:schemeClr val="accent1"/>
+          </a:fillRef>
+          <a:effectRef idx="2">
+            <a:schemeClr val="accent1"/>
+          </a:effectRef>
+          <a:fontRef idx="minor">
+            <a:schemeClr val="lt1"/>
+          </a:fontRef>
+        </p:style>
+        <p:txBody>
+          <a:bodyPr rtlCol="0" anchor="ctr" lIns="0" rIns="0" tIns="0" bIns="0"/>
+          <a:lstStyle/>
+          <a:p>
+            <a:pPr algn="ctr"/>
+            <a:r>
+              <a:rPr sz="1400" b="1">
+                <a:solidFill>
+                  <a:srgbClr val="202122"/>
+                </a:solidFill>
+                <a:latin typeface="Calibri"/>
+              </a:rPr>
+              <a:t>1</a:t>
+            </a:r>
+          </a:p>
+        </p:txBody>
+      </p:sp>
+      <p:sp>
+        <p:nvSpPr>
+          <p:cNvPr id="7" name="TextBox 6"/>
+          <p:cNvSpPr txBox="1"/>
+          <p:nvPr/>
+        </p:nvSpPr>
+        <p:spPr>
+          <a:xfrm>
+            <a:off x="1234440" y="1600200"/>
+            <a:ext cx="10408615" cy="1030986"/>
+          </a:xfrm>
+          <a:prstGeom prst="rect">
+            <a:avLst/>
+          </a:prstGeom>
+          <a:noFill/>
+        </p:spPr>
+        <p:txBody>
+          <a:bodyPr wrap="square" anchor="t" lIns="0" rIns="0" tIns="0" bIns="0"/>
+          <a:lstStyle/>
+          <a:p>
+            <a:pPr algn="l"/>
+            <a:r>
+              <a:rPr sz="2200" b="0" i="0">
+                <a:solidFill>
+                  <a:srgbClr val="202122"/>
+                </a:solidFill>
+                <a:latin typeface="Calibri"/>
+              </a:rPr>
+              <a:t>Give two ways digital technology has changed organisational culture.</a:t>
+            </a:r>
+          </a:p>
+        </p:txBody>
+      </p:sp>
+      <p:sp>
+        <p:nvSpPr>
+          <p:cNvPr id="8" name="Oval 7"/>
+          <p:cNvSpPr/>
+          <p:nvPr/>
+        </p:nvSpPr>
+        <p:spPr>
+          <a:xfrm>
+            <a:off x="548640" y="2814066"/>
+            <a:ext cx="411480" cy="411480"/>
+          </a:xfrm>
+          <a:prstGeom prst="ellipse">
+            <a:avLst/>
+          </a:prstGeom>
+          <a:solidFill>
+            <a:srgbClr val="F2B705"/>
+          </a:solidFill>
+          <a:ln>
+            <a:noFill/>
+          </a:ln>
+          <a:effectLst/>
+        </p:spPr>
+        <p:style>
+          <a:lnRef idx="1">
+            <a:schemeClr val="accent1"/>
+          </a:lnRef>
+          <a:fillRef idx="3">
+            <a:schemeClr val="accent1"/>
+          </a:fillRef>
+          <a:effectRef idx="2">
+            <a:schemeClr val="accent1"/>
+          </a:effectRef>
+          <a:fontRef idx="minor">
+            <a:schemeClr val="lt1"/>
+          </a:fontRef>
+        </p:style>
+        <p:txBody>
+          <a:bodyPr rtlCol="0" anchor="ctr" lIns="0" rIns="0" tIns="0" bIns="0"/>
+          <a:lstStyle/>
+          <a:p>
+            <a:pPr algn="ctr"/>
+            <a:r>
+              <a:rPr sz="1400" b="1">
+                <a:solidFill>
+                  <a:srgbClr val="202122"/>
+                </a:solidFill>
+                <a:latin typeface="Calibri"/>
+              </a:rPr>
+              <a:t>2</a:t>
+            </a:r>
+          </a:p>
+        </p:txBody>
+      </p:sp>
+      <p:sp>
+        <p:nvSpPr>
+          <p:cNvPr id="9" name="TextBox 8"/>
+          <p:cNvSpPr txBox="1"/>
+          <p:nvPr/>
+        </p:nvSpPr>
+        <p:spPr>
+          <a:xfrm>
+            <a:off x="1234440" y="2795778"/>
+            <a:ext cx="10408615" cy="1030986"/>
+          </a:xfrm>
+          <a:prstGeom prst="rect">
+            <a:avLst/>
+          </a:prstGeom>
+          <a:noFill/>
+        </p:spPr>
+        <p:txBody>
+          <a:bodyPr wrap="square" anchor="t" lIns="0" rIns="0" tIns="0" bIns="0"/>
+          <a:lstStyle/>
+          <a:p>
+            <a:pPr algn="l"/>
+            <a:r>
+              <a:rPr sz="2200" b="0" i="0">
+                <a:solidFill>
+                  <a:srgbClr val="202122"/>
+                </a:solidFill>
+                <a:latin typeface="Calibri"/>
+              </a:rPr>
+              <a:t>What is digital isolation?</a:t>
+            </a:r>
+          </a:p>
+        </p:txBody>
+      </p:sp>
+      <p:sp>
+        <p:nvSpPr>
+          <p:cNvPr id="10" name="Oval 9"/>
+          <p:cNvSpPr/>
+          <p:nvPr/>
+        </p:nvSpPr>
+        <p:spPr>
+          <a:xfrm>
+            <a:off x="548640" y="4009644"/>
+            <a:ext cx="411480" cy="411480"/>
+          </a:xfrm>
+          <a:prstGeom prst="ellipse">
+            <a:avLst/>
+          </a:prstGeom>
+          <a:solidFill>
+            <a:srgbClr val="F2B705"/>
+          </a:solidFill>
+          <a:ln>
+            <a:noFill/>
+          </a:ln>
+          <a:effectLst/>
+        </p:spPr>
+        <p:style>
+          <a:lnRef idx="1">
+            <a:schemeClr val="accent1"/>
+          </a:lnRef>
+          <a:fillRef idx="3">
+            <a:schemeClr val="accent1"/>
+          </a:fillRef>
+          <a:effectRef idx="2">
+            <a:schemeClr val="accent1"/>
+          </a:effectRef>
+          <a:fontRef idx="minor">
+            <a:schemeClr val="lt1"/>
+          </a:fontRef>
+        </p:style>
+        <p:txBody>
+          <a:bodyPr rtlCol="0" anchor="ctr" lIns="0" rIns="0" tIns="0" bIns="0"/>
+          <a:lstStyle/>
+          <a:p>
+            <a:pPr algn="ctr"/>
+            <a:r>
+              <a:rPr sz="1400" b="1">
+                <a:solidFill>
+                  <a:srgbClr val="202122"/>
+                </a:solidFill>
+                <a:latin typeface="Calibri"/>
+              </a:rPr>
+              <a:t>3</a:t>
+            </a:r>
+          </a:p>
+        </p:txBody>
+      </p:sp>
+      <p:sp>
+        <p:nvSpPr>
+          <p:cNvPr id="11" name="TextBox 10"/>
+          <p:cNvSpPr txBox="1"/>
+          <p:nvPr/>
+        </p:nvSpPr>
+        <p:spPr>
+          <a:xfrm>
+            <a:off x="1234440" y="3991356"/>
+            <a:ext cx="10408615" cy="1030986"/>
+          </a:xfrm>
+          <a:prstGeom prst="rect">
+            <a:avLst/>
+          </a:prstGeom>
+          <a:noFill/>
+        </p:spPr>
+        <p:txBody>
+          <a:bodyPr wrap="square" anchor="t" lIns="0" rIns="0" tIns="0" bIns="0"/>
+          <a:lstStyle/>
+          <a:p>
+            <a:pPr algn="l"/>
+            <a:r>
+              <a:rPr sz="2200" b="0" i="0">
+                <a:solidFill>
+                  <a:srgbClr val="202122"/>
+                </a:solidFill>
+                <a:latin typeface="Calibri"/>
+              </a:rPr>
+              <a:t>What is edge computing?</a:t>
+            </a:r>
+          </a:p>
+        </p:txBody>
+      </p:sp>
+      <p:sp>
+        <p:nvSpPr>
+          <p:cNvPr id="12" name="Oval 11"/>
+          <p:cNvSpPr/>
+          <p:nvPr/>
+        </p:nvSpPr>
+        <p:spPr>
+          <a:xfrm>
+            <a:off x="548640" y="5205221"/>
+            <a:ext cx="411480" cy="411480"/>
+          </a:xfrm>
+          <a:prstGeom prst="ellipse">
+            <a:avLst/>
+          </a:prstGeom>
+          <a:solidFill>
+            <a:srgbClr val="F2B705"/>
+          </a:solidFill>
+          <a:ln>
+            <a:noFill/>
+          </a:ln>
+          <a:effectLst/>
+        </p:spPr>
+        <p:style>
+          <a:lnRef idx="1">
+            <a:schemeClr val="accent1"/>
+          </a:lnRef>
+          <a:fillRef idx="3">
+            <a:schemeClr val="accent1"/>
+          </a:fillRef>
+          <a:effectRef idx="2">
+            <a:schemeClr val="accent1"/>
+          </a:effectRef>
+          <a:fontRef idx="minor">
+            <a:schemeClr val="lt1"/>
+          </a:fontRef>
+        </p:style>
+        <p:txBody>
+          <a:bodyPr rtlCol="0" anchor="ctr" lIns="0" rIns="0" tIns="0" bIns="0"/>
+          <a:lstStyle/>
+          <a:p>
+            <a:pPr algn="ctr"/>
+            <a:r>
+              <a:rPr sz="1400" b="1">
+                <a:solidFill>
+                  <a:srgbClr val="202122"/>
+                </a:solidFill>
+                <a:latin typeface="Calibri"/>
+              </a:rPr>
+              <a:t>4</a:t>
+            </a:r>
+          </a:p>
+        </p:txBody>
+      </p:sp>
+      <p:sp>
+        <p:nvSpPr>
+          <p:cNvPr id="13" name="TextBox 12"/>
+          <p:cNvSpPr txBox="1"/>
+          <p:nvPr/>
+        </p:nvSpPr>
+        <p:spPr>
+          <a:xfrm>
+            <a:off x="1234440" y="5186933"/>
+            <a:ext cx="10408615" cy="1030986"/>
+          </a:xfrm>
+          <a:prstGeom prst="rect">
+            <a:avLst/>
+          </a:prstGeom>
+          <a:noFill/>
+        </p:spPr>
+        <p:txBody>
+          <a:bodyPr wrap="square" anchor="t" lIns="0" rIns="0" tIns="0" bIns="0"/>
+          <a:lstStyle/>
+          <a:p>
+            <a:pPr algn="l"/>
+            <a:r>
+              <a:rPr sz="2200" b="0" i="0">
+                <a:solidFill>
+                  <a:srgbClr val="202122"/>
+                </a:solidFill>
+                <a:latin typeface="Calibri"/>
+              </a:rPr>
+              <a:t>Give one environmental impact of emerging technology.</a:t>
+            </a:r>
+          </a:p>
+        </p:txBody>
+      </p:sp>
+    </p:spTree>
+  </p:cSld>
+  <p:clrMapOvr>
+    <a:masterClrMapping/>
+  </p:clrMapOvr>
+</p:sld>
+</file>
+
+<file path=ppt/slides/slide16.xml><?xml version="1.0" encoding="utf-8"?>
+<p:sld xmlns:a="http://schemas.openxmlformats.org/drawingml/2006/main" xmlns:p="http://schemas.openxmlformats.org/presentationml/2006/main" xmlns:r="http://schemas.openxmlformats.org/officeDocument/2006/relationships">
+  <p:cSld>
+    <p:bg>
+      <p:bgPr>
+        <a:solidFill>
+          <a:srgbClr val="FFFFFF"/>
+        </a:solidFill>
+        <a:effectLst/>
+      </p:bgPr>
+    </p:bg>
+    <p:spTree>
+      <p:nvGrpSpPr>
+        <p:cNvPr id="1" name=""/>
+        <p:cNvGrpSpPr/>
+        <p:nvPr/>
+      </p:nvGrpSpPr>
+      <p:grpSpPr/>
+      <p:sp>
+        <p:nvSpPr>
+          <p:cNvPr id="2" name="TextBox 1"/>
+          <p:cNvSpPr txBox="1"/>
+          <p:nvPr/>
+        </p:nvSpPr>
+        <p:spPr>
+          <a:xfrm>
+            <a:off x="548640" y="320040"/>
+            <a:ext cx="11094415" cy="274320"/>
+          </a:xfrm>
+          <a:prstGeom prst="rect">
+            <a:avLst/>
+          </a:prstGeom>
+          <a:noFill/>
+        </p:spPr>
+        <p:txBody>
+          <a:bodyPr wrap="square" anchor="t" lIns="0" rIns="0" tIns="0" bIns="0"/>
+          <a:lstStyle/>
+          <a:p>
+            <a:pPr algn="l"/>
+            <a:r>
+              <a:rPr sz="1100" b="1" i="0">
+                <a:solidFill>
+                  <a:srgbClr val="54595D"/>
+                </a:solidFill>
+                <a:latin typeface="Calibri"/>
+              </a:rPr>
+              <a:t>CORE COMPONENT  ·  Core Paper 2</a:t>
+            </a:r>
+          </a:p>
+        </p:txBody>
+      </p:sp>
+      <p:sp>
+        <p:nvSpPr>
+          <p:cNvPr id="3" name="TextBox 2"/>
+          <p:cNvSpPr txBox="1"/>
+          <p:nvPr/>
+        </p:nvSpPr>
+        <p:spPr>
+          <a:xfrm>
+            <a:off x="548640" y="566928"/>
+            <a:ext cx="11094415" cy="822960"/>
+          </a:xfrm>
+          <a:prstGeom prst="rect">
+            <a:avLst/>
+          </a:prstGeom>
+          <a:noFill/>
+        </p:spPr>
+        <p:txBody>
+          <a:bodyPr wrap="square" anchor="ctr" lIns="0" rIns="0" tIns="0" bIns="0"/>
+          <a:lstStyle/>
+          <a:p>
+            <a:pPr algn="l"/>
+            <a:r>
+              <a:rPr sz="3200" b="1" i="0">
+                <a:solidFill>
+                  <a:srgbClr val="03306E"/>
+                </a:solidFill>
+                <a:latin typeface="Cambria"/>
+              </a:rPr>
+              <a:t>Answers</a:t>
+            </a:r>
+          </a:p>
+        </p:txBody>
+      </p:sp>
+      <p:sp>
+        <p:nvSpPr>
+          <p:cNvPr id="4" name="TextBox 3"/>
+          <p:cNvSpPr txBox="1"/>
+          <p:nvPr/>
+        </p:nvSpPr>
+        <p:spPr>
+          <a:xfrm>
+            <a:off x="548640" y="6446520"/>
+            <a:ext cx="8229600" cy="274320"/>
+          </a:xfrm>
+          <a:prstGeom prst="rect">
+            <a:avLst/>
+          </a:prstGeom>
+          <a:noFill/>
+        </p:spPr>
+        <p:txBody>
+          <a:bodyPr wrap="square" anchor="t" lIns="0" rIns="0" tIns="0" bIns="0"/>
+          <a:lstStyle/>
+          <a:p>
+            <a:pPr algn="l"/>
+            <a:r>
+              <a:rPr sz="1000" b="0" i="0">
+                <a:solidFill>
+                  <a:srgbClr val="54595D"/>
+                </a:solidFill>
+                <a:latin typeface="Calibri"/>
+              </a:rPr>
+              <a:t>Digital Support and Security T Level  ·  Emerging Issues and Technologies</a:t>
+            </a:r>
+          </a:p>
+        </p:txBody>
+      </p:sp>
+      <p:sp>
+        <p:nvSpPr>
+          <p:cNvPr id="5" name="TextBox 4"/>
+          <p:cNvSpPr txBox="1"/>
+          <p:nvPr/>
+        </p:nvSpPr>
+        <p:spPr>
+          <a:xfrm>
+            <a:off x="10728655" y="6446520"/>
+            <a:ext cx="914400" cy="274320"/>
+          </a:xfrm>
+          <a:prstGeom prst="rect">
+            <a:avLst/>
+          </a:prstGeom>
+          <a:noFill/>
+        </p:spPr>
+        <p:txBody>
+          <a:bodyPr wrap="square" anchor="t" lIns="0" rIns="0" tIns="0" bIns="0"/>
+          <a:lstStyle/>
+          <a:p>
+            <a:pPr algn="r"/>
+            <a:r>
+              <a:rPr sz="1000" b="0" i="0">
+                <a:solidFill>
+                  <a:srgbClr val="54595D"/>
+                </a:solidFill>
+                <a:latin typeface="Calibri"/>
+              </a:rPr>
+              <a:t>16</a:t>
+            </a:r>
+          </a:p>
+        </p:txBody>
+      </p:sp>
+      <p:sp>
+        <p:nvSpPr>
+          <p:cNvPr id="6" name="Oval 5"/>
+          <p:cNvSpPr/>
+          <p:nvPr/>
+        </p:nvSpPr>
+        <p:spPr>
+          <a:xfrm>
+            <a:off x="548640" y="1618488"/>
+            <a:ext cx="411480" cy="411480"/>
+          </a:xfrm>
+          <a:prstGeom prst="ellipse">
+            <a:avLst/>
+          </a:prstGeom>
+          <a:solidFill>
+            <a:srgbClr val="F2B705"/>
+          </a:solidFill>
+          <a:ln>
+            <a:noFill/>
+          </a:ln>
+          <a:effectLst/>
+        </p:spPr>
+        <p:style>
+          <a:lnRef idx="1">
+            <a:schemeClr val="accent1"/>
+          </a:lnRef>
+          <a:fillRef idx="3">
+            <a:schemeClr val="accent1"/>
+          </a:fillRef>
+          <a:effectRef idx="2">
+            <a:schemeClr val="accent1"/>
+          </a:effectRef>
+          <a:fontRef idx="minor">
+            <a:schemeClr val="lt1"/>
+          </a:fontRef>
+        </p:style>
+        <p:txBody>
+          <a:bodyPr rtlCol="0" anchor="ctr" lIns="0" rIns="0" tIns="0" bIns="0"/>
+          <a:lstStyle/>
+          <a:p>
+            <a:pPr algn="ctr"/>
+            <a:r>
+              <a:rPr sz="1400" b="1">
+                <a:solidFill>
+                  <a:srgbClr val="202122"/>
+                </a:solidFill>
+                <a:latin typeface="Calibri"/>
+              </a:rPr>
+              <a:t>1</a:t>
+            </a:r>
+          </a:p>
+        </p:txBody>
+      </p:sp>
+      <p:sp>
+        <p:nvSpPr>
+          <p:cNvPr id="7" name="TextBox 6"/>
+          <p:cNvSpPr txBox="1"/>
+          <p:nvPr/>
+        </p:nvSpPr>
+        <p:spPr>
+          <a:xfrm>
+            <a:off x="1234440" y="1600200"/>
+            <a:ext cx="10408615" cy="1030986"/>
+          </a:xfrm>
+          <a:prstGeom prst="rect">
+            <a:avLst/>
+          </a:prstGeom>
+          <a:noFill/>
+        </p:spPr>
+        <p:txBody>
+          <a:bodyPr wrap="square" anchor="t" lIns="0" rIns="0" tIns="0" bIns="0"/>
+          <a:lstStyle/>
+          <a:p>
+            <a:pPr algn="l"/>
+            <a:r>
+              <a:rPr sz="1800" b="0" i="0">
+                <a:solidFill>
+                  <a:srgbClr val="54595D"/>
+                </a:solidFill>
+                <a:latin typeface="Calibri"/>
+              </a:rPr>
+              <a:t>Give two ways digital technology has changed organisational culture.</a:t>
+            </a:r>
+          </a:p>
+          <a:p>
+            <a:r>
+              <a:rPr sz="1800" b="1">
+                <a:solidFill>
+                  <a:srgbClr val="03306E"/>
+                </a:solidFill>
+                <a:latin typeface="Calibri"/>
+              </a:rPr>
+              <a:t>Any two, e.g. remote working, staff monitoring, automation.</a:t>
+            </a:r>
+          </a:p>
+        </p:txBody>
+      </p:sp>
+      <p:sp>
+        <p:nvSpPr>
+          <p:cNvPr id="8" name="Oval 7"/>
+          <p:cNvSpPr/>
+          <p:nvPr/>
+        </p:nvSpPr>
+        <p:spPr>
+          <a:xfrm>
+            <a:off x="548640" y="2814066"/>
+            <a:ext cx="411480" cy="411480"/>
+          </a:xfrm>
+          <a:prstGeom prst="ellipse">
+            <a:avLst/>
+          </a:prstGeom>
+          <a:solidFill>
+            <a:srgbClr val="F2B705"/>
+          </a:solidFill>
+          <a:ln>
+            <a:noFill/>
+          </a:ln>
+          <a:effectLst/>
+        </p:spPr>
+        <p:style>
+          <a:lnRef idx="1">
+            <a:schemeClr val="accent1"/>
+          </a:lnRef>
+          <a:fillRef idx="3">
+            <a:schemeClr val="accent1"/>
+          </a:fillRef>
+          <a:effectRef idx="2">
+            <a:schemeClr val="accent1"/>
+          </a:effectRef>
+          <a:fontRef idx="minor">
+            <a:schemeClr val="lt1"/>
+          </a:fontRef>
+        </p:style>
+        <p:txBody>
+          <a:bodyPr rtlCol="0" anchor="ctr" lIns="0" rIns="0" tIns="0" bIns="0"/>
+          <a:lstStyle/>
+          <a:p>
+            <a:pPr algn="ctr"/>
+            <a:r>
+              <a:rPr sz="1400" b="1">
+                <a:solidFill>
+                  <a:srgbClr val="202122"/>
+                </a:solidFill>
+                <a:latin typeface="Calibri"/>
+              </a:rPr>
+              <a:t>2</a:t>
+            </a:r>
+          </a:p>
+        </p:txBody>
+      </p:sp>
+      <p:sp>
+        <p:nvSpPr>
+          <p:cNvPr id="9" name="TextBox 8"/>
+          <p:cNvSpPr txBox="1"/>
+          <p:nvPr/>
+        </p:nvSpPr>
+        <p:spPr>
+          <a:xfrm>
+            <a:off x="1234440" y="2795778"/>
+            <a:ext cx="10408615" cy="1030986"/>
+          </a:xfrm>
+          <a:prstGeom prst="rect">
+            <a:avLst/>
+          </a:prstGeom>
+          <a:noFill/>
+        </p:spPr>
+        <p:txBody>
+          <a:bodyPr wrap="square" anchor="t" lIns="0" rIns="0" tIns="0" bIns="0"/>
+          <a:lstStyle/>
+          <a:p>
+            <a:pPr algn="l"/>
+            <a:r>
+              <a:rPr sz="1800" b="0" i="0">
+                <a:solidFill>
+                  <a:srgbClr val="54595D"/>
+                </a:solidFill>
+                <a:latin typeface="Calibri"/>
+              </a:rPr>
+              <a:t>What is digital isolation?</a:t>
+            </a:r>
+          </a:p>
+          <a:p>
+            <a:r>
+              <a:rPr sz="1800" b="1">
+                <a:solidFill>
+                  <a:srgbClr val="03306E"/>
+                </a:solidFill>
+                <a:latin typeface="Calibri"/>
+              </a:rPr>
+              <a:t>Being left out because of a lack of skills, equipment, connectivity or resistance to change.</a:t>
+            </a:r>
+          </a:p>
+        </p:txBody>
+      </p:sp>
+      <p:sp>
+        <p:nvSpPr>
+          <p:cNvPr id="10" name="Oval 9"/>
+          <p:cNvSpPr/>
+          <p:nvPr/>
+        </p:nvSpPr>
+        <p:spPr>
+          <a:xfrm>
+            <a:off x="548640" y="4009644"/>
+            <a:ext cx="411480" cy="411480"/>
+          </a:xfrm>
+          <a:prstGeom prst="ellipse">
+            <a:avLst/>
+          </a:prstGeom>
+          <a:solidFill>
+            <a:srgbClr val="F2B705"/>
+          </a:solidFill>
+          <a:ln>
+            <a:noFill/>
+          </a:ln>
+          <a:effectLst/>
+        </p:spPr>
+        <p:style>
+          <a:lnRef idx="1">
+            <a:schemeClr val="accent1"/>
+          </a:lnRef>
+          <a:fillRef idx="3">
+            <a:schemeClr val="accent1"/>
+          </a:fillRef>
+          <a:effectRef idx="2">
+            <a:schemeClr val="accent1"/>
+          </a:effectRef>
+          <a:fontRef idx="minor">
+            <a:schemeClr val="lt1"/>
+          </a:fontRef>
+        </p:style>
+        <p:txBody>
+          <a:bodyPr rtlCol="0" anchor="ctr" lIns="0" rIns="0" tIns="0" bIns="0"/>
+          <a:lstStyle/>
+          <a:p>
+            <a:pPr algn="ctr"/>
+            <a:r>
+              <a:rPr sz="1400" b="1">
+                <a:solidFill>
+                  <a:srgbClr val="202122"/>
+                </a:solidFill>
+                <a:latin typeface="Calibri"/>
+              </a:rPr>
+              <a:t>3</a:t>
+            </a:r>
+          </a:p>
+        </p:txBody>
+      </p:sp>
+      <p:sp>
+        <p:nvSpPr>
+          <p:cNvPr id="11" name="TextBox 10"/>
+          <p:cNvSpPr txBox="1"/>
+          <p:nvPr/>
+        </p:nvSpPr>
+        <p:spPr>
+          <a:xfrm>
+            <a:off x="1234440" y="3991356"/>
+            <a:ext cx="10408615" cy="1030986"/>
+          </a:xfrm>
+          <a:prstGeom prst="rect">
+            <a:avLst/>
+          </a:prstGeom>
+          <a:noFill/>
+        </p:spPr>
+        <p:txBody>
+          <a:bodyPr wrap="square" anchor="t" lIns="0" rIns="0" tIns="0" bIns="0"/>
+          <a:lstStyle/>
+          <a:p>
+            <a:pPr algn="l"/>
+            <a:r>
+              <a:rPr sz="1800" b="0" i="0">
+                <a:solidFill>
+                  <a:srgbClr val="54595D"/>
+                </a:solidFill>
+                <a:latin typeface="Calibri"/>
+              </a:rPr>
+              <a:t>What is edge computing?</a:t>
+            </a:r>
+          </a:p>
+          <a:p>
+            <a:r>
+              <a:rPr sz="1800" b="1">
+                <a:solidFill>
+                  <a:srgbClr val="03306E"/>
+                </a:solidFill>
+                <a:latin typeface="Calibri"/>
+              </a:rPr>
+              <a:t>Processing data close to where it is collected, e.g. on IoT devices, rather than in a central data centre.</a:t>
+            </a:r>
+          </a:p>
+        </p:txBody>
+      </p:sp>
+      <p:sp>
+        <p:nvSpPr>
+          <p:cNvPr id="12" name="Oval 11"/>
+          <p:cNvSpPr/>
+          <p:nvPr/>
+        </p:nvSpPr>
+        <p:spPr>
+          <a:xfrm>
+            <a:off x="548640" y="5205221"/>
+            <a:ext cx="411480" cy="411480"/>
+          </a:xfrm>
+          <a:prstGeom prst="ellipse">
+            <a:avLst/>
+          </a:prstGeom>
+          <a:solidFill>
+            <a:srgbClr val="F2B705"/>
+          </a:solidFill>
+          <a:ln>
+            <a:noFill/>
+          </a:ln>
+          <a:effectLst/>
+        </p:spPr>
+        <p:style>
+          <a:lnRef idx="1">
+            <a:schemeClr val="accent1"/>
+          </a:lnRef>
+          <a:fillRef idx="3">
+            <a:schemeClr val="accent1"/>
+          </a:fillRef>
+          <a:effectRef idx="2">
+            <a:schemeClr val="accent1"/>
+          </a:effectRef>
+          <a:fontRef idx="minor">
+            <a:schemeClr val="lt1"/>
+          </a:fontRef>
+        </p:style>
+        <p:txBody>
+          <a:bodyPr rtlCol="0" anchor="ctr" lIns="0" rIns="0" tIns="0" bIns="0"/>
+          <a:lstStyle/>
+          <a:p>
+            <a:pPr algn="ctr"/>
+            <a:r>
+              <a:rPr sz="1400" b="1">
+                <a:solidFill>
+                  <a:srgbClr val="202122"/>
+                </a:solidFill>
+                <a:latin typeface="Calibri"/>
+              </a:rPr>
+              <a:t>4</a:t>
+            </a:r>
+          </a:p>
+        </p:txBody>
+      </p:sp>
+      <p:sp>
+        <p:nvSpPr>
+          <p:cNvPr id="13" name="TextBox 12"/>
+          <p:cNvSpPr txBox="1"/>
+          <p:nvPr/>
+        </p:nvSpPr>
+        <p:spPr>
+          <a:xfrm>
+            <a:off x="1234440" y="5186933"/>
+            <a:ext cx="10408615" cy="1030986"/>
+          </a:xfrm>
+          <a:prstGeom prst="rect">
+            <a:avLst/>
+          </a:prstGeom>
+          <a:noFill/>
+        </p:spPr>
+        <p:txBody>
+          <a:bodyPr wrap="square" anchor="t" lIns="0" rIns="0" tIns="0" bIns="0"/>
+          <a:lstStyle/>
+          <a:p>
+            <a:pPr algn="l"/>
+            <a:r>
+              <a:rPr sz="1800" b="0" i="0">
+                <a:solidFill>
+                  <a:srgbClr val="54595D"/>
+                </a:solidFill>
+                <a:latin typeface="Calibri"/>
+              </a:rPr>
+              <a:t>Give one environmental impact of emerging technology.</a:t>
+            </a:r>
+          </a:p>
+          <a:p>
+            <a:r>
+              <a:rPr sz="1800" b="1">
+                <a:solidFill>
+                  <a:srgbClr val="03306E"/>
+                </a:solidFill>
+                <a:latin typeface="Calibri"/>
+              </a:rPr>
+              <a:t>Rare metal use, energy consumption or disposal.</a:t>
+            </a:r>
+          </a:p>
+        </p:txBody>
+      </p:sp>
+    </p:spTree>
+  </p:cSld>
+  <p:clrMapOvr>
+    <a:masterClrMapping/>
+  </p:clrMapOvr>
+</p:sld>
+</file>
+
+<file path=ppt/slides/slide17.xml><?xml version="1.0" encoding="utf-8"?>
+<p:sld xmlns:a="http://schemas.openxmlformats.org/drawingml/2006/main" xmlns:p="http://schemas.openxmlformats.org/presentationml/2006/main" xmlns:r="http://schemas.openxmlformats.org/officeDocument/2006/relationships">
+  <p:cSld>
+    <p:bg>
+      <p:bgPr>
+        <a:solidFill>
+          <a:srgbClr val="FFFFFF"/>
+        </a:solidFill>
+        <a:effectLst/>
+      </p:bgPr>
+    </p:bg>
+    <p:spTree>
+      <p:nvGrpSpPr>
+        <p:cNvPr id="1" name=""/>
+        <p:cNvGrpSpPr/>
+        <p:nvPr/>
+      </p:nvGrpSpPr>
+      <p:grpSpPr/>
+      <p:sp>
+        <p:nvSpPr>
+          <p:cNvPr id="2" name="TextBox 1"/>
+          <p:cNvSpPr txBox="1"/>
+          <p:nvPr/>
+        </p:nvSpPr>
+        <p:spPr>
+          <a:xfrm>
+            <a:off x="548640" y="320040"/>
+            <a:ext cx="11094415" cy="274320"/>
+          </a:xfrm>
+          <a:prstGeom prst="rect">
+            <a:avLst/>
+          </a:prstGeom>
+          <a:noFill/>
+        </p:spPr>
+        <p:txBody>
+          <a:bodyPr wrap="square" anchor="t" lIns="0" rIns="0" tIns="0" bIns="0"/>
+          <a:lstStyle/>
+          <a:p>
+            <a:pPr algn="l"/>
+            <a:r>
+              <a:rPr sz="1100" b="1" i="0">
+                <a:solidFill>
+                  <a:srgbClr val="54595D"/>
+                </a:solidFill>
+                <a:latin typeface="Calibri"/>
+              </a:rPr>
+              <a:t>CORE COMPONENT  ·  Core Paper 2</a:t>
+            </a:r>
+          </a:p>
+        </p:txBody>
+      </p:sp>
+      <p:sp>
+        <p:nvSpPr>
+          <p:cNvPr id="3" name="TextBox 2"/>
+          <p:cNvSpPr txBox="1"/>
+          <p:nvPr/>
+        </p:nvSpPr>
+        <p:spPr>
+          <a:xfrm>
+            <a:off x="548640" y="566928"/>
+            <a:ext cx="11094415" cy="822960"/>
+          </a:xfrm>
+          <a:prstGeom prst="rect">
+            <a:avLst/>
+          </a:prstGeom>
+          <a:noFill/>
+        </p:spPr>
+        <p:txBody>
+          <a:bodyPr wrap="square" anchor="ctr" lIns="0" rIns="0" tIns="0" bIns="0"/>
+          <a:lstStyle/>
+          <a:p>
+            <a:pPr algn="l"/>
+            <a:r>
+              <a:rPr sz="3200" b="1" i="0">
+                <a:solidFill>
+                  <a:srgbClr val="03306E"/>
+                </a:solidFill>
+                <a:latin typeface="Cambria"/>
+              </a:rPr>
+              <a:t>Activity: Tech pitch and critique</a:t>
+            </a:r>
+          </a:p>
+        </p:txBody>
+      </p:sp>
+      <p:sp>
+        <p:nvSpPr>
+          <p:cNvPr id="4" name="TextBox 3"/>
+          <p:cNvSpPr txBox="1"/>
+          <p:nvPr/>
+        </p:nvSpPr>
+        <p:spPr>
+          <a:xfrm>
+            <a:off x="548640" y="6446520"/>
+            <a:ext cx="8229600" cy="274320"/>
+          </a:xfrm>
+          <a:prstGeom prst="rect">
+            <a:avLst/>
+          </a:prstGeom>
+          <a:noFill/>
+        </p:spPr>
+        <p:txBody>
+          <a:bodyPr wrap="square" anchor="t" lIns="0" rIns="0" tIns="0" bIns="0"/>
+          <a:lstStyle/>
+          <a:p>
+            <a:pPr algn="l"/>
+            <a:r>
+              <a:rPr sz="1000" b="0" i="0">
+                <a:solidFill>
+                  <a:srgbClr val="54595D"/>
+                </a:solidFill>
+                <a:latin typeface="Calibri"/>
+              </a:rPr>
+              <a:t>Digital Support and Security T Level  ·  Emerging Issues and Technologies</a:t>
+            </a:r>
+          </a:p>
+        </p:txBody>
+      </p:sp>
+      <p:sp>
+        <p:nvSpPr>
+          <p:cNvPr id="5" name="TextBox 4"/>
+          <p:cNvSpPr txBox="1"/>
+          <p:nvPr/>
+        </p:nvSpPr>
+        <p:spPr>
+          <a:xfrm>
+            <a:off x="10728655" y="6446520"/>
+            <a:ext cx="914400" cy="274320"/>
+          </a:xfrm>
+          <a:prstGeom prst="rect">
+            <a:avLst/>
+          </a:prstGeom>
+          <a:noFill/>
+        </p:spPr>
+        <p:txBody>
+          <a:bodyPr wrap="square" anchor="t" lIns="0" rIns="0" tIns="0" bIns="0"/>
+          <a:lstStyle/>
+          <a:p>
+            <a:pPr algn="r"/>
+            <a:r>
+              <a:rPr sz="1000" b="0" i="0">
+                <a:solidFill>
+                  <a:srgbClr val="54595D"/>
+                </a:solidFill>
+                <a:latin typeface="Calibri"/>
+              </a:rPr>
+              <a:t>17</a:t>
+            </a:r>
+          </a:p>
+        </p:txBody>
+      </p:sp>
+      <p:sp>
+        <p:nvSpPr>
+          <p:cNvPr id="6" name="Rounded Rectangle 5"/>
+          <p:cNvSpPr/>
+          <p:nvPr/>
+        </p:nvSpPr>
+        <p:spPr>
+          <a:xfrm>
+            <a:off x="548640" y="1508760"/>
+            <a:ext cx="2011680" cy="457200"/>
+          </a:xfrm>
+          <a:prstGeom prst="roundRect">
+            <a:avLst>
+              <a:gd name="adj" fmla="val 50000"/>
+            </a:avLst>
+          </a:prstGeom>
+          <a:solidFill>
+            <a:srgbClr val="F2B705"/>
+          </a:solidFill>
+          <a:ln>
+            <a:noFill/>
+          </a:ln>
+          <a:effectLst/>
+        </p:spPr>
+        <p:style>
+          <a:lnRef idx="1">
+            <a:schemeClr val="accent1"/>
+          </a:lnRef>
+          <a:fillRef idx="3">
+            <a:schemeClr val="accent1"/>
+          </a:fillRef>
+          <a:effectRef idx="2">
+            <a:schemeClr val="accent1"/>
+          </a:effectRef>
+          <a:fontRef idx="minor">
+            <a:schemeClr val="lt1"/>
+          </a:fontRef>
+        </p:style>
+        <p:txBody>
+          <a:bodyPr rtlCol="0" anchor="ctr"/>
+          <a:lstStyle/>
+          <a:p/>
+        </p:txBody>
+      </p:sp>
+      <p:sp>
+        <p:nvSpPr>
+          <p:cNvPr id="7" name="TextBox 6"/>
+          <p:cNvSpPr txBox="1"/>
+          <p:nvPr/>
+        </p:nvSpPr>
+        <p:spPr>
+          <a:xfrm>
+            <a:off x="548640" y="1508760"/>
+            <a:ext cx="2011680" cy="457200"/>
+          </a:xfrm>
+          <a:prstGeom prst="rect">
+            <a:avLst/>
+          </a:prstGeom>
+          <a:noFill/>
+        </p:spPr>
+        <p:txBody>
+          <a:bodyPr wrap="square" anchor="ctr" lIns="0" rIns="0" tIns="0" bIns="0"/>
+          <a:lstStyle/>
+          <a:p>
+            <a:pPr algn="ctr"/>
+            <a:r>
+              <a:rPr sz="1400" b="1" i="0">
+                <a:solidFill>
+                  <a:srgbClr val="202122"/>
+                </a:solidFill>
+                <a:latin typeface="Calibri"/>
+              </a:rPr>
+              <a:t>25 minutes</a:t>
+            </a:r>
+          </a:p>
+        </p:txBody>
+      </p:sp>
+      <p:sp>
+        <p:nvSpPr>
+          <p:cNvPr id="8" name="TextBox 7"/>
+          <p:cNvSpPr txBox="1"/>
+          <p:nvPr/>
+        </p:nvSpPr>
+        <p:spPr>
+          <a:xfrm>
+            <a:off x="2743200" y="1508760"/>
+            <a:ext cx="4754880" cy="457200"/>
+          </a:xfrm>
+          <a:prstGeom prst="rect">
+            <a:avLst/>
+          </a:prstGeom>
+          <a:noFill/>
+        </p:spPr>
+        <p:txBody>
+          <a:bodyPr wrap="square" anchor="ctr" lIns="0" rIns="0" tIns="0" bIns="0"/>
+          <a:lstStyle/>
+          <a:p>
+            <a:pPr algn="l"/>
+            <a:r>
+              <a:rPr sz="1400" b="0" i="1">
+                <a:solidFill>
+                  <a:srgbClr val="54595D"/>
+                </a:solidFill>
+                <a:latin typeface="Calibri"/>
+              </a:rPr>
+              <a:t>Small groups</a:t>
+            </a:r>
+          </a:p>
+        </p:txBody>
+      </p:sp>
+      <p:sp>
+        <p:nvSpPr>
+          <p:cNvPr id="9" name="Oval 8"/>
+          <p:cNvSpPr/>
+          <p:nvPr/>
+        </p:nvSpPr>
+        <p:spPr>
+          <a:xfrm>
+            <a:off x="548640" y="2482596"/>
+            <a:ext cx="384048" cy="384048"/>
+          </a:xfrm>
+          <a:prstGeom prst="ellipse">
+            <a:avLst/>
+          </a:prstGeom>
+          <a:solidFill>
+            <a:srgbClr val="0645AD"/>
+          </a:solidFill>
+          <a:ln>
+            <a:noFill/>
+          </a:ln>
+          <a:effectLst/>
+        </p:spPr>
+        <p:style>
+          <a:lnRef idx="1">
+            <a:schemeClr val="accent1"/>
+          </a:lnRef>
+          <a:fillRef idx="3">
+            <a:schemeClr val="accent1"/>
+          </a:fillRef>
+          <a:effectRef idx="2">
+            <a:schemeClr val="accent1"/>
+          </a:effectRef>
+          <a:fontRef idx="minor">
+            <a:schemeClr val="lt1"/>
+          </a:fontRef>
+        </p:style>
+        <p:txBody>
+          <a:bodyPr rtlCol="0" anchor="ctr" lIns="0" rIns="0" tIns="0" bIns="0"/>
+          <a:lstStyle/>
+          <a:p>
+            <a:pPr algn="ctr"/>
+            <a:r>
+              <a:rPr sz="1300" b="1">
+                <a:solidFill>
+                  <a:srgbClr val="FFFFFF"/>
+                </a:solidFill>
+                <a:latin typeface="Calibri"/>
+              </a:rPr>
+              <a:t>1</a:t>
+            </a:r>
+          </a:p>
+        </p:txBody>
+      </p:sp>
+      <p:sp>
+        <p:nvSpPr>
+          <p:cNvPr id="10" name="TextBox 9"/>
+          <p:cNvSpPr txBox="1"/>
+          <p:nvPr/>
+        </p:nvSpPr>
+        <p:spPr>
+          <a:xfrm>
+            <a:off x="1143000" y="2240280"/>
+            <a:ext cx="5943600" cy="868680"/>
+          </a:xfrm>
+          <a:prstGeom prst="rect">
+            <a:avLst/>
+          </a:prstGeom>
+          <a:noFill/>
+        </p:spPr>
+        <p:txBody>
+          <a:bodyPr wrap="square" anchor="ctr" lIns="0" rIns="0" tIns="0" bIns="0"/>
+          <a:lstStyle/>
+          <a:p>
+            <a:pPr algn="l"/>
+            <a:r>
+              <a:rPr sz="1700" b="0" i="0">
+                <a:solidFill>
+                  <a:srgbClr val="202122"/>
+                </a:solidFill>
+                <a:latin typeface="Calibri"/>
+              </a:rPr>
+              <a:t>Each group is given one emerging technology.</a:t>
+            </a:r>
+          </a:p>
+        </p:txBody>
+      </p:sp>
+      <p:sp>
+        <p:nvSpPr>
+          <p:cNvPr id="11" name="Oval 10"/>
+          <p:cNvSpPr/>
+          <p:nvPr/>
+        </p:nvSpPr>
+        <p:spPr>
+          <a:xfrm>
+            <a:off x="548640" y="3461004"/>
+            <a:ext cx="384048" cy="384048"/>
+          </a:xfrm>
+          <a:prstGeom prst="ellipse">
+            <a:avLst/>
+          </a:prstGeom>
+          <a:solidFill>
+            <a:srgbClr val="0645AD"/>
+          </a:solidFill>
+          <a:ln>
+            <a:noFill/>
+          </a:ln>
+          <a:effectLst/>
+        </p:spPr>
+        <p:style>
+          <a:lnRef idx="1">
+            <a:schemeClr val="accent1"/>
+          </a:lnRef>
+          <a:fillRef idx="3">
+            <a:schemeClr val="accent1"/>
+          </a:fillRef>
+          <a:effectRef idx="2">
+            <a:schemeClr val="accent1"/>
+          </a:effectRef>
+          <a:fontRef idx="minor">
+            <a:schemeClr val="lt1"/>
+          </a:fontRef>
+        </p:style>
+        <p:txBody>
+          <a:bodyPr rtlCol="0" anchor="ctr" lIns="0" rIns="0" tIns="0" bIns="0"/>
+          <a:lstStyle/>
+          <a:p>
+            <a:pPr algn="ctr"/>
+            <a:r>
+              <a:rPr sz="1300" b="1">
+                <a:solidFill>
+                  <a:srgbClr val="FFFFFF"/>
+                </a:solidFill>
+                <a:latin typeface="Calibri"/>
+              </a:rPr>
+              <a:t>2</a:t>
+            </a:r>
+          </a:p>
+        </p:txBody>
+      </p:sp>
+      <p:sp>
+        <p:nvSpPr>
+          <p:cNvPr id="12" name="TextBox 11"/>
+          <p:cNvSpPr txBox="1"/>
+          <p:nvPr/>
+        </p:nvSpPr>
+        <p:spPr>
+          <a:xfrm>
+            <a:off x="1143000" y="3218688"/>
+            <a:ext cx="5943600" cy="868680"/>
+          </a:xfrm>
+          <a:prstGeom prst="rect">
+            <a:avLst/>
+          </a:prstGeom>
+          <a:noFill/>
+        </p:spPr>
+        <p:txBody>
+          <a:bodyPr wrap="square" anchor="ctr" lIns="0" rIns="0" tIns="0" bIns="0"/>
+          <a:lstStyle/>
+          <a:p>
+            <a:pPr algn="l"/>
+            <a:r>
+              <a:rPr sz="1700" b="0" i="0">
+                <a:solidFill>
+                  <a:srgbClr val="202122"/>
+                </a:solidFill>
+                <a:latin typeface="Calibri"/>
+              </a:rPr>
+              <a:t>Prepare a one-minute pitch on its benefits to organisations.</a:t>
+            </a:r>
+          </a:p>
+        </p:txBody>
+      </p:sp>
+      <p:sp>
+        <p:nvSpPr>
+          <p:cNvPr id="13" name="Oval 12"/>
+          <p:cNvSpPr/>
+          <p:nvPr/>
+        </p:nvSpPr>
+        <p:spPr>
+          <a:xfrm>
+            <a:off x="548640" y="4439412"/>
+            <a:ext cx="384048" cy="384048"/>
+          </a:xfrm>
+          <a:prstGeom prst="ellipse">
+            <a:avLst/>
+          </a:prstGeom>
+          <a:solidFill>
+            <a:srgbClr val="0645AD"/>
+          </a:solidFill>
+          <a:ln>
+            <a:noFill/>
+          </a:ln>
+          <a:effectLst/>
+        </p:spPr>
+        <p:style>
+          <a:lnRef idx="1">
+            <a:schemeClr val="accent1"/>
+          </a:lnRef>
+          <a:fillRef idx="3">
+            <a:schemeClr val="accent1"/>
+          </a:fillRef>
+          <a:effectRef idx="2">
+            <a:schemeClr val="accent1"/>
+          </a:effectRef>
+          <a:fontRef idx="minor">
+            <a:schemeClr val="lt1"/>
+          </a:fontRef>
+        </p:style>
+        <p:txBody>
+          <a:bodyPr rtlCol="0" anchor="ctr" lIns="0" rIns="0" tIns="0" bIns="0"/>
+          <a:lstStyle/>
+          <a:p>
+            <a:pPr algn="ctr"/>
+            <a:r>
+              <a:rPr sz="1300" b="1">
+                <a:solidFill>
+                  <a:srgbClr val="FFFFFF"/>
+                </a:solidFill>
+                <a:latin typeface="Calibri"/>
+              </a:rPr>
+              <a:t>3</a:t>
+            </a:r>
+          </a:p>
+        </p:txBody>
+      </p:sp>
+      <p:sp>
+        <p:nvSpPr>
+          <p:cNvPr id="14" name="TextBox 13"/>
+          <p:cNvSpPr txBox="1"/>
+          <p:nvPr/>
+        </p:nvSpPr>
+        <p:spPr>
+          <a:xfrm>
+            <a:off x="1143000" y="4197096"/>
+            <a:ext cx="5943600" cy="868680"/>
+          </a:xfrm>
+          <a:prstGeom prst="rect">
+            <a:avLst/>
+          </a:prstGeom>
+          <a:noFill/>
+        </p:spPr>
+        <p:txBody>
+          <a:bodyPr wrap="square" anchor="ctr" lIns="0" rIns="0" tIns="0" bIns="0"/>
+          <a:lstStyle/>
+          <a:p>
+            <a:pPr algn="l"/>
+            <a:r>
+              <a:rPr sz="1700" b="0" i="0">
+                <a:solidFill>
+                  <a:srgbClr val="202122"/>
+                </a:solidFill>
+                <a:latin typeface="Calibri"/>
+              </a:rPr>
+              <a:t>Another group responds with its risks to individuals and society.</a:t>
+            </a:r>
+          </a:p>
+        </p:txBody>
+      </p:sp>
+      <p:sp>
+        <p:nvSpPr>
+          <p:cNvPr id="15" name="Oval 14"/>
+          <p:cNvSpPr/>
+          <p:nvPr/>
+        </p:nvSpPr>
+        <p:spPr>
+          <a:xfrm>
+            <a:off x="548640" y="5417820"/>
+            <a:ext cx="384048" cy="384048"/>
+          </a:xfrm>
+          <a:prstGeom prst="ellipse">
+            <a:avLst/>
+          </a:prstGeom>
+          <a:solidFill>
+            <a:srgbClr val="0645AD"/>
+          </a:solidFill>
+          <a:ln>
+            <a:noFill/>
+          </a:ln>
+          <a:effectLst/>
+        </p:spPr>
+        <p:style>
+          <a:lnRef idx="1">
+            <a:schemeClr val="accent1"/>
+          </a:lnRef>
+          <a:fillRef idx="3">
+            <a:schemeClr val="accent1"/>
+          </a:fillRef>
+          <a:effectRef idx="2">
+            <a:schemeClr val="accent1"/>
+          </a:effectRef>
+          <a:fontRef idx="minor">
+            <a:schemeClr val="lt1"/>
+          </a:fontRef>
+        </p:style>
+        <p:txBody>
+          <a:bodyPr rtlCol="0" anchor="ctr" lIns="0" rIns="0" tIns="0" bIns="0"/>
+          <a:lstStyle/>
+          <a:p>
+            <a:pPr algn="ctr"/>
+            <a:r>
+              <a:rPr sz="1300" b="1">
+                <a:solidFill>
+                  <a:srgbClr val="FFFFFF"/>
+                </a:solidFill>
+                <a:latin typeface="Calibri"/>
+              </a:rPr>
+              <a:t>4</a:t>
+            </a:r>
+          </a:p>
+        </p:txBody>
+      </p:sp>
+      <p:sp>
+        <p:nvSpPr>
+          <p:cNvPr id="16" name="TextBox 15"/>
+          <p:cNvSpPr txBox="1"/>
+          <p:nvPr/>
+        </p:nvSpPr>
+        <p:spPr>
+          <a:xfrm>
+            <a:off x="1143000" y="5175504"/>
+            <a:ext cx="5943600" cy="868680"/>
+          </a:xfrm>
+          <a:prstGeom prst="rect">
+            <a:avLst/>
+          </a:prstGeom>
+          <a:noFill/>
+        </p:spPr>
+        <p:txBody>
+          <a:bodyPr wrap="square" anchor="ctr" lIns="0" rIns="0" tIns="0" bIns="0"/>
+          <a:lstStyle/>
+          <a:p>
+            <a:pPr algn="l"/>
+            <a:r>
+              <a:rPr sz="1700" b="0" i="0">
+                <a:solidFill>
+                  <a:srgbClr val="202122"/>
+                </a:solidFill>
+                <a:latin typeface="Calibri"/>
+              </a:rPr>
+              <a:t>The class votes on whether benefits outweigh risks.</a:t>
+            </a:r>
+          </a:p>
+        </p:txBody>
+      </p:sp>
+      <p:sp>
+        <p:nvSpPr>
+          <p:cNvPr id="17" name="Rounded Rectangle 16"/>
+          <p:cNvSpPr/>
+          <p:nvPr/>
+        </p:nvSpPr>
+        <p:spPr>
+          <a:xfrm>
+            <a:off x="7772400" y="1508760"/>
+            <a:ext cx="3867912" cy="4572000"/>
+          </a:xfrm>
+          <a:prstGeom prst="roundRect">
+            <a:avLst>
+              <a:gd name="adj" fmla="val 8000"/>
+            </a:avLst>
+          </a:prstGeom>
+          <a:solidFill>
+            <a:srgbClr val="EAF3FF"/>
+          </a:solidFill>
+          <a:ln>
+            <a:noFill/>
+          </a:ln>
+          <a:effectLst/>
+        </p:spPr>
+        <p:style>
+          <a:lnRef idx="1">
+            <a:schemeClr val="accent1"/>
+          </a:lnRef>
+          <a:fillRef idx="3">
+            <a:schemeClr val="accent1"/>
+          </a:fillRef>
+          <a:effectRef idx="2">
+            <a:schemeClr val="accent1"/>
+          </a:effectRef>
+          <a:fontRef idx="minor">
+            <a:schemeClr val="lt1"/>
+          </a:fontRef>
+        </p:style>
+        <p:txBody>
+          <a:bodyPr rtlCol="0" anchor="ctr"/>
+          <a:lstStyle/>
+          <a:p/>
+        </p:txBody>
+      </p:sp>
+      <p:sp>
+        <p:nvSpPr>
+          <p:cNvPr id="18" name="TextBox 17"/>
+          <p:cNvSpPr txBox="1"/>
+          <p:nvPr/>
+        </p:nvSpPr>
+        <p:spPr>
+          <a:xfrm>
+            <a:off x="8046720" y="1737360"/>
+            <a:ext cx="3291840" cy="365760"/>
+          </a:xfrm>
+          <a:prstGeom prst="rect">
+            <a:avLst/>
+          </a:prstGeom>
+          <a:noFill/>
+        </p:spPr>
+        <p:txBody>
+          <a:bodyPr wrap="square" anchor="t" lIns="0" rIns="0" tIns="0" bIns="0"/>
+          <a:lstStyle/>
+          <a:p>
+            <a:pPr algn="l"/>
+            <a:r>
+              <a:rPr sz="1300" b="1" i="0">
+                <a:solidFill>
+                  <a:srgbClr val="0645AD"/>
+                </a:solidFill>
+                <a:latin typeface="Calibri"/>
+              </a:rPr>
+              <a:t>SUCCESS CRITERIA</a:t>
+            </a:r>
+          </a:p>
+        </p:txBody>
+      </p:sp>
+      <p:sp>
+        <p:nvSpPr>
+          <p:cNvPr id="19" name="TextBox 18"/>
+          <p:cNvSpPr txBox="1"/>
+          <p:nvPr/>
+        </p:nvSpPr>
+        <p:spPr>
+          <a:xfrm>
+            <a:off x="8046720" y="2240280"/>
+            <a:ext cx="3337560" cy="3657600"/>
+          </a:xfrm>
+          <a:prstGeom prst="rect">
+            <a:avLst/>
+          </a:prstGeom>
+          <a:noFill/>
+        </p:spPr>
+        <p:txBody>
+          <a:bodyPr wrap="square" lIns="0" rIns="0" tIns="0" bIns="0">
+            <a:spAutoFit/>
+          </a:bodyPr>
+          <a:lstStyle/>
+          <a:p>
+            <a:pPr marL="274320" indent="-274320">
+              <a:spcAft>
+                <a:spcPts val="810"/>
+              </a:spcAft>
+              <a:buClr>
+                <a:srgbClr val="0645AD"/>
+              </a:buClr>
+              <a:buFont typeface="Arial"/>
+              <a:buChar char="•"/>
+            </a:pPr>
+            <a:r>
+              <a:rPr sz="1800" b="0">
+                <a:solidFill>
+                  <a:srgbClr val="202122"/>
+                </a:solidFill>
+                <a:latin typeface="Calibri"/>
+              </a:rPr>
+              <a:t>Covers organisations, individuals and society</a:t>
+            </a:r>
+          </a:p>
+          <a:p>
+            <a:pPr marL="274320" indent="-274320">
+              <a:spcAft>
+                <a:spcPts val="810"/>
+              </a:spcAft>
+              <a:buClr>
+                <a:srgbClr val="0645AD"/>
+              </a:buClr>
+              <a:buFont typeface="Arial"/>
+              <a:buChar char="•"/>
+            </a:pPr>
+            <a:r>
+              <a:rPr sz="1800" b="0">
+                <a:solidFill>
+                  <a:srgbClr val="202122"/>
+                </a:solidFill>
+                <a:latin typeface="Calibri"/>
+              </a:rPr>
+              <a:t>Considers inclusion and the environment</a:t>
+            </a:r>
+          </a:p>
+          <a:p>
+            <a:pPr marL="274320" indent="-274320">
+              <a:spcAft>
+                <a:spcPts val="810"/>
+              </a:spcAft>
+              <a:buClr>
+                <a:srgbClr val="0645AD"/>
+              </a:buClr>
+              <a:buFont typeface="Arial"/>
+              <a:buChar char="•"/>
+            </a:pPr>
+            <a:r>
+              <a:rPr sz="1800" b="0">
+                <a:solidFill>
+                  <a:srgbClr val="202122"/>
+                </a:solidFill>
+                <a:latin typeface="Calibri"/>
+              </a:rPr>
+              <a:t>Uses real examples</a:t>
+            </a:r>
+          </a:p>
+        </p:txBody>
+      </p:sp>
+    </p:spTree>
+  </p:cSld>
+  <p:clrMapOvr>
+    <a:masterClrMapping/>
+  </p:clrMapOvr>
+</p:sld>
+</file>
+
+<file path=ppt/slides/slide18.xml><?xml version="1.0" encoding="utf-8"?>
+<p:sld xmlns:a="http://schemas.openxmlformats.org/drawingml/2006/main" xmlns:p="http://schemas.openxmlformats.org/presentationml/2006/main" xmlns:r="http://schemas.openxmlformats.org/officeDocument/2006/relationships">
+  <p:cSld>
+    <p:bg>
+      <p:bgPr>
+        <a:solidFill>
           <a:srgbClr val="03306E"/>
         </a:solidFill>
         <a:effectLst/>
@@ -5283,18 +10559,89 @@
       </p:sp>
       <p:sp>
         <p:nvSpPr>
-          <p:cNvPr id="6" name="Rounded Rectangle 5"/>
+          <p:cNvPr id="6" name="TextBox 5"/>
+          <p:cNvSpPr txBox="1"/>
+          <p:nvPr/>
+        </p:nvSpPr>
+        <p:spPr>
+          <a:xfrm>
+            <a:off x="548640" y="1554480"/>
+            <a:ext cx="6720840" cy="4617720"/>
+          </a:xfrm>
+          <a:prstGeom prst="rect">
+            <a:avLst/>
+          </a:prstGeom>
+          <a:noFill/>
+        </p:spPr>
+        <p:txBody>
+          <a:bodyPr wrap="square" lIns="0" rIns="0" tIns="0" bIns="0">
+            <a:spAutoFit/>
+          </a:bodyPr>
+          <a:lstStyle/>
+          <a:p>
+            <a:pPr>
+              <a:spcAft>
+                <a:spcPts val="1260"/>
+              </a:spcAft>
+            </a:pPr>
+            <a:r>
+              <a:rPr sz="2100" b="0">
+                <a:solidFill>
+                  <a:srgbClr val="202122"/>
+                </a:solidFill>
+                <a:latin typeface="Calibri"/>
+              </a:rPr>
+              <a:t>Technology changes how organisations work and how society lives.</a:t>
+            </a:r>
+          </a:p>
+          <a:p>
+            <a:pPr>
+              <a:spcAft>
+                <a:spcPts val="1260"/>
+              </a:spcAft>
+            </a:pPr>
+            <a:r>
+              <a:rPr sz="2100" b="0">
+                <a:solidFill>
+                  <a:srgbClr val="202122"/>
+                </a:solidFill>
+                <a:latin typeface="Calibri"/>
+              </a:rPr>
+              <a:t>In organisations, communication has moved to email, chat and video; people are expected to be more productive and more available; staff are monitored more; remote and hybrid working are normal; and automation, including AI, takes over routine tasks.</a:t>
+            </a:r>
+          </a:p>
+          <a:p>
+            <a:pPr>
+              <a:spcAft>
+                <a:spcPts val="1260"/>
+              </a:spcAft>
+            </a:pPr>
+            <a:r>
+              <a:rPr sz="2100" b="0">
+                <a:solidFill>
+                  <a:srgbClr val="202122"/>
+                </a:solidFill>
+                <a:latin typeface="Calibri"/>
+              </a:rPr>
+              <a:t>In society, some jobs disappear while new skills are needed. Fewer decisions involve humans, privacy is harder to protect, and behaviour changes. Access to information and services has improved for many, but people without skills, equipment or connectivity risk digital isolation.</a:t>
+            </a:r>
+          </a:p>
+        </p:txBody>
+      </p:sp>
+      <p:sp>
+        <p:nvSpPr>
+          <p:cNvPr id="7" name="Rounded Rectangle 6"/>
           <p:cNvSpPr/>
           <p:nvPr/>
         </p:nvSpPr>
         <p:spPr>
           <a:xfrm>
-            <a:off x="548640" y="1600200"/>
-            <a:ext cx="5364327" cy="640080"/>
+            <a:off x="7772400" y="1554480"/>
+            <a:ext cx="3867912" cy="4526280"/>
           </a:xfrm>
           <a:prstGeom prst="roundRect">
             <a:avLst>
-              <a:gd name="adj" fmla="val 15000"/>
+              <a:gd name="adj" fmla="val 8000"/>
             </a:avLst>
           </a:prstGeom>
           <a:solidFill>
@@ -5327,55 +10674,20 @@
       </p:sp>
       <p:sp>
         <p:nvSpPr>
-          <p:cNvPr id="7" name="TextBox 6"/>
-          <p:cNvSpPr txBox="1"/>
-          <p:nvPr/>
-        </p:nvSpPr>
-        <p:spPr>
-          <a:xfrm>
-            <a:off x="777240" y="1600200"/>
-            <a:ext cx="4907127" cy="640080"/>
-          </a:xfrm>
-          <a:prstGeom prst="rect">
-            <a:avLst/>
-          </a:prstGeom>
-          <a:noFill/>
-        </p:spPr>
-        <p:txBody>
-          <a:bodyPr wrap="square" anchor="ctr" lIns="0" rIns="0" tIns="0" bIns="0"/>
-          <a:lstStyle/>
-          <a:p>
-            <a:pPr algn="l"/>
-            <a:r>
-              <a:rPr sz="2000" b="1" i="0">
-                <a:solidFill>
-                  <a:srgbClr val="FFFFFF"/>
-                </a:solidFill>
-                <a:latin typeface="Calibri"/>
-              </a:rPr>
-              <a:t>On organisational culture</a:t>
-            </a:r>
-          </a:p>
-        </p:txBody>
-      </p:sp>
-      <p:sp>
-        <p:nvSpPr>
-          <p:cNvPr id="8" name="Rounded Rectangle 7"/>
+          <p:cNvPr id="8" name="Oval 7"/>
           <p:cNvSpPr/>
           <p:nvPr/>
         </p:nvSpPr>
         <p:spPr>
           <a:xfrm>
-            <a:off x="548640" y="2377440"/>
-            <a:ext cx="5364327" cy="3794760"/>
-          </a:xfrm>
-          <a:prstGeom prst="roundRect">
-            <a:avLst>
-              <a:gd name="adj" fmla="val 4000"/>
-            </a:avLst>
+            <a:off x="8046720" y="1828800"/>
+            <a:ext cx="548640" cy="548640"/>
+          </a:xfrm>
+          <a:prstGeom prst="ellipse">
+            <a:avLst/>
           </a:prstGeom>
           <a:solidFill>
-            <a:srgbClr val="EAF3FF"/>
+            <a:srgbClr val="F2B705"/>
           </a:solidFill>
           <a:ln>
             <a:noFill/>
@@ -5397,9 +10709,20 @@
           </a:fontRef>
         </p:style>
         <p:txBody>
-          <a:bodyPr rtlCol="0" anchor="ctr"/>
-          <a:lstStyle/>
-          <a:p/>
+          <a:bodyPr rtlCol="0" anchor="ctr" lIns="0" rIns="0" tIns="0" bIns="0"/>
+          <a:lstStyle/>
+          <a:p>
+            <a:pPr algn="ctr"/>
+            <a:r>
+              <a:rPr sz="1300" b="1">
+                <a:solidFill>
+                  <a:srgbClr val="202122"/>
+                </a:solidFill>
+                <a:latin typeface="Calibri"/>
+              </a:rPr>
+              <a:t>e.g.</a:t>
+            </a:r>
+          </a:p>
         </p:txBody>
       </p:sp>
       <p:sp>
@@ -5410,380 +10733,60 @@
         </p:nvSpPr>
         <p:spPr>
           <a:xfrm>
-            <a:off x="822959" y="2606040"/>
-            <a:ext cx="4815687" cy="3337560"/>
-          </a:xfrm>
-          <a:prstGeom prst="rect">
-            <a:avLst/>
-          </a:prstGeom>
-          <a:noFill/>
-        </p:spPr>
-        <p:txBody>
-          <a:bodyPr wrap="square" lIns="0" rIns="0" tIns="0" bIns="0">
-            <a:spAutoFit/>
-          </a:bodyPr>
-          <a:lstStyle/>
-          <a:p>
-            <a:pPr marL="274320" indent="-274320">
-              <a:spcAft>
-                <a:spcPts val="990"/>
-              </a:spcAft>
-              <a:buClr>
-                <a:srgbClr val="0645AD"/>
-              </a:buClr>
-              <a:buFont typeface="Arial"/>
-              <a:buChar char="•"/>
-            </a:pPr>
-            <a:r>
-              <a:rPr sz="2200" b="0">
-                <a:solidFill>
-                  <a:srgbClr val="202122"/>
-                </a:solidFill>
-                <a:latin typeface="Calibri"/>
-              </a:rPr>
-              <a:t>New ways of communicating</a:t>
-            </a:r>
-          </a:p>
-          <a:p>
-            <a:pPr marL="274320" indent="-274320">
-              <a:spcAft>
-                <a:spcPts val="990"/>
-              </a:spcAft>
-              <a:buClr>
-                <a:srgbClr val="0645AD"/>
-              </a:buClr>
-              <a:buFont typeface="Arial"/>
-              <a:buChar char="•"/>
-            </a:pPr>
-            <a:r>
-              <a:rPr sz="2200" b="0">
-                <a:solidFill>
-                  <a:srgbClr val="202122"/>
-                </a:solidFill>
-                <a:latin typeface="Calibri"/>
-              </a:rPr>
-              <a:t>Higher expectations of productivity and availability</a:t>
-            </a:r>
-          </a:p>
-          <a:p>
-            <a:pPr marL="274320" indent="-274320">
-              <a:spcAft>
-                <a:spcPts val="990"/>
-              </a:spcAft>
-              <a:buClr>
-                <a:srgbClr val="0645AD"/>
-              </a:buClr>
-              <a:buFont typeface="Arial"/>
-              <a:buChar char="•"/>
-            </a:pPr>
-            <a:r>
-              <a:rPr sz="2200" b="0">
-                <a:solidFill>
-                  <a:srgbClr val="202122"/>
-                </a:solidFill>
-                <a:latin typeface="Calibri"/>
-              </a:rPr>
-              <a:t>More monitoring of staff</a:t>
-            </a:r>
-          </a:p>
-          <a:p>
-            <a:pPr marL="274320" indent="-274320">
-              <a:spcAft>
-                <a:spcPts val="990"/>
-              </a:spcAft>
-              <a:buClr>
-                <a:srgbClr val="0645AD"/>
-              </a:buClr>
-              <a:buFont typeface="Arial"/>
-              <a:buChar char="•"/>
-            </a:pPr>
-            <a:r>
-              <a:rPr sz="2200" b="0">
-                <a:solidFill>
-                  <a:srgbClr val="202122"/>
-                </a:solidFill>
-                <a:latin typeface="Calibri"/>
-              </a:rPr>
-              <a:t>Remote, hybrid and in-office working</a:t>
-            </a:r>
-          </a:p>
-          <a:p>
-            <a:pPr marL="274320" indent="-274320">
-              <a:spcAft>
-                <a:spcPts val="990"/>
-              </a:spcAft>
-              <a:buClr>
-                <a:srgbClr val="0645AD"/>
-              </a:buClr>
-              <a:buFont typeface="Arial"/>
-              <a:buChar char="•"/>
-            </a:pPr>
-            <a:r>
-              <a:rPr sz="2200" b="0">
-                <a:solidFill>
-                  <a:srgbClr val="202122"/>
-                </a:solidFill>
-                <a:latin typeface="Calibri"/>
-              </a:rPr>
-              <a:t>Automation, including AI</a:t>
-            </a:r>
-          </a:p>
-        </p:txBody>
-      </p:sp>
-      <p:sp>
-        <p:nvSpPr>
-          <p:cNvPr id="10" name="Rounded Rectangle 9"/>
-          <p:cNvSpPr/>
-          <p:nvPr/>
-        </p:nvSpPr>
-        <p:spPr>
-          <a:xfrm>
-            <a:off x="6278727" y="1600200"/>
-            <a:ext cx="5364327" cy="640080"/>
-          </a:xfrm>
-          <a:prstGeom prst="roundRect">
-            <a:avLst>
-              <a:gd name="adj" fmla="val 15000"/>
-            </a:avLst>
-          </a:prstGeom>
-          <a:solidFill>
-            <a:srgbClr val="0645AD"/>
-          </a:solidFill>
-          <a:ln>
-            <a:noFill/>
-          </a:ln>
-          <a:effectLst/>
-        </p:spPr>
-        <p:style>
-          <a:lnRef idx="1">
-            <a:schemeClr val="accent1"/>
-          </a:lnRef>
-          <a:fillRef idx="3">
-            <a:schemeClr val="accent1"/>
-          </a:fillRef>
-          <a:effectRef idx="2">
-            <a:schemeClr val="accent1"/>
-          </a:effectRef>
-          <a:fontRef idx="minor">
-            <a:schemeClr val="lt1"/>
-          </a:fontRef>
-        </p:style>
-        <p:txBody>
-          <a:bodyPr rtlCol="0" anchor="ctr"/>
-          <a:lstStyle/>
-          <a:p/>
-        </p:txBody>
-      </p:sp>
-      <p:sp>
-        <p:nvSpPr>
-          <p:cNvPr id="11" name="TextBox 10"/>
-          <p:cNvSpPr txBox="1"/>
-          <p:nvPr/>
-        </p:nvSpPr>
-        <p:spPr>
-          <a:xfrm>
-            <a:off x="6507327" y="1600200"/>
-            <a:ext cx="4907127" cy="640080"/>
-          </a:xfrm>
-          <a:prstGeom prst="rect">
-            <a:avLst/>
-          </a:prstGeom>
-          <a:noFill/>
-        </p:spPr>
-        <p:txBody>
-          <a:bodyPr wrap="square" anchor="ctr" lIns="0" rIns="0" tIns="0" bIns="0"/>
+            <a:off x="8046720" y="2560320"/>
+            <a:ext cx="3291840" cy="365760"/>
+          </a:xfrm>
+          <a:prstGeom prst="rect">
+            <a:avLst/>
+          </a:prstGeom>
+          <a:noFill/>
+        </p:spPr>
+        <p:txBody>
+          <a:bodyPr wrap="square" anchor="t" lIns="0" rIns="0" tIns="0" bIns="0"/>
           <a:lstStyle/>
           <a:p>
             <a:pPr algn="l"/>
             <a:r>
-              <a:rPr sz="2000" b="1" i="0">
+              <a:rPr sz="1300" b="1" i="0">
+                <a:solidFill>
+                  <a:srgbClr val="A9C8F0"/>
+                </a:solidFill>
+                <a:latin typeface="Calibri"/>
+              </a:rPr>
+              <a:t>EXAMPLE</a:t>
+            </a:r>
+          </a:p>
+        </p:txBody>
+      </p:sp>
+      <p:sp>
+        <p:nvSpPr>
+          <p:cNvPr id="10" name="TextBox 9"/>
+          <p:cNvSpPr txBox="1"/>
+          <p:nvPr/>
+        </p:nvSpPr>
+        <p:spPr>
+          <a:xfrm>
+            <a:off x="8046720" y="2971800"/>
+            <a:ext cx="3291840" cy="2971800"/>
+          </a:xfrm>
+          <a:prstGeom prst="rect">
+            <a:avLst/>
+          </a:prstGeom>
+          <a:noFill/>
+        </p:spPr>
+        <p:txBody>
+          <a:bodyPr wrap="square" anchor="t" lIns="0" rIns="0" tIns="0" bIns="0"/>
+          <a:lstStyle/>
+          <a:p>
+            <a:pPr algn="l"/>
+            <a:r>
+              <a:rPr sz="1900" b="0" i="0">
                 <a:solidFill>
                   <a:srgbClr val="FFFFFF"/>
                 </a:solidFill>
-                <a:latin typeface="Calibri"/>
-              </a:rPr>
-              <a:t>On society</a:t>
-            </a:r>
-          </a:p>
-        </p:txBody>
-      </p:sp>
-      <p:sp>
-        <p:nvSpPr>
-          <p:cNvPr id="12" name="Rounded Rectangle 11"/>
-          <p:cNvSpPr/>
-          <p:nvPr/>
-        </p:nvSpPr>
-        <p:spPr>
-          <a:xfrm>
-            <a:off x="6278727" y="2377440"/>
-            <a:ext cx="5364327" cy="3794760"/>
-          </a:xfrm>
-          <a:prstGeom prst="roundRect">
-            <a:avLst>
-              <a:gd name="adj" fmla="val 4000"/>
-            </a:avLst>
-          </a:prstGeom>
-          <a:solidFill>
-            <a:srgbClr val="EAF3FF"/>
-          </a:solidFill>
-          <a:ln>
-            <a:noFill/>
-          </a:ln>
-          <a:effectLst/>
-        </p:spPr>
-        <p:style>
-          <a:lnRef idx="1">
-            <a:schemeClr val="accent1"/>
-          </a:lnRef>
-          <a:fillRef idx="3">
-            <a:schemeClr val="accent1"/>
-          </a:fillRef>
-          <a:effectRef idx="2">
-            <a:schemeClr val="accent1"/>
-          </a:effectRef>
-          <a:fontRef idx="minor">
-            <a:schemeClr val="lt1"/>
-          </a:fontRef>
-        </p:style>
-        <p:txBody>
-          <a:bodyPr rtlCol="0" anchor="ctr"/>
-          <a:lstStyle/>
-          <a:p/>
-        </p:txBody>
-      </p:sp>
-      <p:sp>
-        <p:nvSpPr>
-          <p:cNvPr id="13" name="TextBox 12"/>
-          <p:cNvSpPr txBox="1"/>
-          <p:nvPr/>
-        </p:nvSpPr>
-        <p:spPr>
-          <a:xfrm>
-            <a:off x="6553047" y="2606040"/>
-            <a:ext cx="4815687" cy="3337560"/>
-          </a:xfrm>
-          <a:prstGeom prst="rect">
-            <a:avLst/>
-          </a:prstGeom>
-          <a:noFill/>
-        </p:spPr>
-        <p:txBody>
-          <a:bodyPr wrap="square" lIns="0" rIns="0" tIns="0" bIns="0">
-            <a:spAutoFit/>
-          </a:bodyPr>
-          <a:lstStyle/>
-          <a:p>
-            <a:pPr marL="274320" indent="-274320">
-              <a:spcAft>
-                <a:spcPts val="855"/>
-              </a:spcAft>
-              <a:buClr>
-                <a:srgbClr val="0645AD"/>
-              </a:buClr>
-              <a:buFont typeface="Arial"/>
-              <a:buChar char="•"/>
-            </a:pPr>
-            <a:r>
-              <a:rPr sz="1900" b="0">
-                <a:solidFill>
-                  <a:srgbClr val="202122"/>
-                </a:solidFill>
-                <a:latin typeface="Calibri"/>
-              </a:rPr>
-              <a:t>Job losses and changing skills</a:t>
-            </a:r>
-          </a:p>
-          <a:p>
-            <a:pPr marL="274320" indent="-274320">
-              <a:spcAft>
-                <a:spcPts val="855"/>
-              </a:spcAft>
-              <a:buClr>
-                <a:srgbClr val="0645AD"/>
-              </a:buClr>
-              <a:buFont typeface="Arial"/>
-              <a:buChar char="•"/>
-            </a:pPr>
-            <a:r>
-              <a:rPr sz="1900" b="0">
-                <a:solidFill>
-                  <a:srgbClr val="202122"/>
-                </a:solidFill>
-                <a:latin typeface="Calibri"/>
-              </a:rPr>
-              <a:t>Less human decision-making and empathy</a:t>
-            </a:r>
-          </a:p>
-          <a:p>
-            <a:pPr marL="274320" indent="-274320">
-              <a:spcAft>
-                <a:spcPts val="855"/>
-              </a:spcAft>
-              <a:buClr>
-                <a:srgbClr val="0645AD"/>
-              </a:buClr>
-              <a:buFont typeface="Arial"/>
-              <a:buChar char="•"/>
-            </a:pPr>
-            <a:r>
-              <a:rPr sz="1900" b="1">
-                <a:solidFill>
-                  <a:srgbClr val="202122"/>
-                </a:solidFill>
-                <a:latin typeface="Calibri"/>
-              </a:rPr>
-              <a:t>Privacy:</a:t>
-            </a:r>
-            <a:r>
-              <a:rPr sz="1900" b="0">
-                <a:solidFill>
-                  <a:srgbClr val="202122"/>
-                </a:solidFill>
-                <a:latin typeface="Calibri"/>
-              </a:rPr>
-              <a:t> digital footprint and surveillance</a:t>
-            </a:r>
-          </a:p>
-          <a:p>
-            <a:pPr marL="274320" indent="-274320">
-              <a:spcAft>
-                <a:spcPts val="855"/>
-              </a:spcAft>
-              <a:buClr>
-                <a:srgbClr val="0645AD"/>
-              </a:buClr>
-              <a:buFont typeface="Arial"/>
-              <a:buChar char="•"/>
-            </a:pPr>
-            <a:r>
-              <a:rPr sz="1900" b="0">
-                <a:solidFill>
-                  <a:srgbClr val="202122"/>
-                </a:solidFill>
-                <a:latin typeface="Calibri"/>
-              </a:rPr>
-              <a:t>Digital isolation for some; better access to information for others</a:t>
-            </a:r>
-          </a:p>
-          <a:p>
-            <a:pPr marL="274320" indent="-274320">
-              <a:spcAft>
-                <a:spcPts val="855"/>
-              </a:spcAft>
-              <a:buClr>
-                <a:srgbClr val="0645AD"/>
-              </a:buClr>
-              <a:buFont typeface="Arial"/>
-              <a:buChar char="•"/>
-            </a:pPr>
-            <a:r>
-              <a:rPr sz="1900" b="0">
-                <a:solidFill>
-                  <a:srgbClr val="202122"/>
-                </a:solidFill>
-                <a:latin typeface="Calibri"/>
-              </a:rPr>
-              <a:t>Generative AI and globalisation</a:t>
+                <a:latin typeface="Cambria"/>
+              </a:rPr>
+              <a:t>Self-service checkouts cut cashier jobs but created roles in maintenance and IT support, and left some older shoppers struggling.</a:t>
             </a:r>
           </a:p>
         </p:txBody>
@@ -5875,7 +10878,7 @@
                 </a:solidFill>
                 <a:latin typeface="Cambria"/>
               </a:rPr>
-              <a:t>Digital inclusion</a:t>
+              <a:t>Impact of digital technologies</a:t>
             </a:r>
           </a:p>
         </p:txBody>
@@ -5948,14 +10951,135 @@
       </p:sp>
       <p:sp>
         <p:nvSpPr>
-          <p:cNvPr id="6" name="TextBox 5"/>
-          <p:cNvSpPr txBox="1"/>
+          <p:cNvPr id="6" name="Rounded Rectangle 5"/>
+          <p:cNvSpPr/>
           <p:nvPr/>
         </p:nvSpPr>
         <p:spPr>
           <a:xfrm>
             <a:off x="548640" y="1600200"/>
-            <a:ext cx="6675120" cy="4572000"/>
+            <a:ext cx="5364327" cy="640080"/>
+          </a:xfrm>
+          <a:prstGeom prst="roundRect">
+            <a:avLst>
+              <a:gd name="adj" fmla="val 15000"/>
+            </a:avLst>
+          </a:prstGeom>
+          <a:solidFill>
+            <a:srgbClr val="03306E"/>
+          </a:solidFill>
+          <a:ln>
+            <a:noFill/>
+          </a:ln>
+          <a:effectLst/>
+        </p:spPr>
+        <p:style>
+          <a:lnRef idx="1">
+            <a:schemeClr val="accent1"/>
+          </a:lnRef>
+          <a:fillRef idx="3">
+            <a:schemeClr val="accent1"/>
+          </a:fillRef>
+          <a:effectRef idx="2">
+            <a:schemeClr val="accent1"/>
+          </a:effectRef>
+          <a:fontRef idx="minor">
+            <a:schemeClr val="lt1"/>
+          </a:fontRef>
+        </p:style>
+        <p:txBody>
+          <a:bodyPr rtlCol="0" anchor="ctr"/>
+          <a:lstStyle/>
+          <a:p/>
+        </p:txBody>
+      </p:sp>
+      <p:sp>
+        <p:nvSpPr>
+          <p:cNvPr id="7" name="TextBox 6"/>
+          <p:cNvSpPr txBox="1"/>
+          <p:nvPr/>
+        </p:nvSpPr>
+        <p:spPr>
+          <a:xfrm>
+            <a:off x="777240" y="1600200"/>
+            <a:ext cx="4907127" cy="640080"/>
+          </a:xfrm>
+          <a:prstGeom prst="rect">
+            <a:avLst/>
+          </a:prstGeom>
+          <a:noFill/>
+        </p:spPr>
+        <p:txBody>
+          <a:bodyPr wrap="square" anchor="ctr" lIns="0" rIns="0" tIns="0" bIns="0"/>
+          <a:lstStyle/>
+          <a:p>
+            <a:pPr algn="l"/>
+            <a:r>
+              <a:rPr sz="2000" b="1" i="0">
+                <a:solidFill>
+                  <a:srgbClr val="FFFFFF"/>
+                </a:solidFill>
+                <a:latin typeface="Calibri"/>
+              </a:rPr>
+              <a:t>On organisational culture</a:t>
+            </a:r>
+          </a:p>
+        </p:txBody>
+      </p:sp>
+      <p:sp>
+        <p:nvSpPr>
+          <p:cNvPr id="8" name="Rounded Rectangle 7"/>
+          <p:cNvSpPr/>
+          <p:nvPr/>
+        </p:nvSpPr>
+        <p:spPr>
+          <a:xfrm>
+            <a:off x="548640" y="2377440"/>
+            <a:ext cx="5364327" cy="3794760"/>
+          </a:xfrm>
+          <a:prstGeom prst="roundRect">
+            <a:avLst>
+              <a:gd name="adj" fmla="val 4000"/>
+            </a:avLst>
+          </a:prstGeom>
+          <a:solidFill>
+            <a:srgbClr val="EAF3FF"/>
+          </a:solidFill>
+          <a:ln>
+            <a:noFill/>
+          </a:ln>
+          <a:effectLst/>
+        </p:spPr>
+        <p:style>
+          <a:lnRef idx="1">
+            <a:schemeClr val="accent1"/>
+          </a:lnRef>
+          <a:fillRef idx="3">
+            <a:schemeClr val="accent1"/>
+          </a:fillRef>
+          <a:effectRef idx="2">
+            <a:schemeClr val="accent1"/>
+          </a:effectRef>
+          <a:fontRef idx="minor">
+            <a:schemeClr val="lt1"/>
+          </a:fontRef>
+        </p:style>
+        <p:txBody>
+          <a:bodyPr rtlCol="0" anchor="ctr"/>
+          <a:lstStyle/>
+          <a:p/>
+        </p:txBody>
+      </p:sp>
+      <p:sp>
+        <p:nvSpPr>
+          <p:cNvPr id="9" name="TextBox 8"/>
+          <p:cNvSpPr txBox="1"/>
+          <p:nvPr/>
+        </p:nvSpPr>
+        <p:spPr>
+          <a:xfrm>
+            <a:off x="822959" y="2606040"/>
+            <a:ext cx="4815687" cy="3337560"/>
           </a:xfrm>
           <a:prstGeom prst="rect">
             <a:avLst/>
@@ -5970,7 +11094,7 @@
           <a:p>
             <a:pPr marL="274320" indent="-274320">
               <a:spcAft>
-                <a:spcPts val="1080"/>
+                <a:spcPts val="990"/>
               </a:spcAft>
               <a:buClr>
                 <a:srgbClr val="0645AD"/>
@@ -5979,19 +11103,19 @@
               <a:buChar char="•"/>
             </a:pPr>
             <a:r>
-              <a:rPr sz="2400" b="0">
+              <a:rPr sz="2200" b="0">
                 <a:solidFill>
                   <a:srgbClr val="202122"/>
                 </a:solidFill>
                 <a:latin typeface="Calibri"/>
               </a:rPr>
-              <a:t>Fair access needs suitable hardware, software and connectivity.</a:t>
+              <a:t>New ways of communicating</a:t>
             </a:r>
           </a:p>
           <a:p>
             <a:pPr marL="274320" indent="-274320">
               <a:spcAft>
-                <a:spcPts val="1080"/>
+                <a:spcPts val="990"/>
               </a:spcAft>
               <a:buClr>
                 <a:srgbClr val="0645AD"/>
@@ -6000,19 +11124,19 @@
               <a:buChar char="•"/>
             </a:pPr>
             <a:r>
-              <a:rPr sz="2400" b="0">
+              <a:rPr sz="2200" b="0">
                 <a:solidFill>
                   <a:srgbClr val="202122"/>
                 </a:solidFill>
                 <a:latin typeface="Calibri"/>
               </a:rPr>
-              <a:t>Follow best-practice codes and public sector accessibility regulations.</a:t>
+              <a:t>Higher expectations of productivity and availability</a:t>
             </a:r>
           </a:p>
           <a:p>
             <a:pPr marL="274320" indent="-274320">
               <a:spcAft>
-                <a:spcPts val="1080"/>
+                <a:spcPts val="990"/>
               </a:spcAft>
               <a:buClr>
                 <a:srgbClr val="0645AD"/>
@@ -6021,19 +11145,19 @@
               <a:buChar char="•"/>
             </a:pPr>
             <a:r>
-              <a:rPr sz="2400" b="0">
+              <a:rPr sz="2200" b="0">
                 <a:solidFill>
                   <a:srgbClr val="202122"/>
                 </a:solidFill>
                 <a:latin typeface="Calibri"/>
               </a:rPr>
-              <a:t>Consider age, digital and literacy skills, internal or external audience.</a:t>
+              <a:t>More monitoring of staff</a:t>
             </a:r>
           </a:p>
           <a:p>
             <a:pPr marL="274320" indent="-274320">
               <a:spcAft>
-                <a:spcPts val="1080"/>
+                <a:spcPts val="990"/>
               </a:spcAft>
               <a:buClr>
                 <a:srgbClr val="0645AD"/>
@@ -6042,19 +11166,19 @@
               <a:buChar char="•"/>
             </a:pPr>
             <a:r>
-              <a:rPr sz="2400" b="0">
+              <a:rPr sz="2200" b="0">
                 <a:solidFill>
                   <a:srgbClr val="202122"/>
                 </a:solidFill>
                 <a:latin typeface="Calibri"/>
               </a:rPr>
-              <a:t>Consider cultural issues, including bias built into digital systems.</a:t>
+              <a:t>Remote, hybrid and in-office working</a:t>
             </a:r>
           </a:p>
           <a:p>
             <a:pPr marL="274320" indent="-274320">
               <a:spcAft>
-                <a:spcPts val="1080"/>
+                <a:spcPts val="990"/>
               </a:spcAft>
               <a:buClr>
                 <a:srgbClr val="0645AD"/>
@@ -6063,35 +11187,35 @@
               <a:buChar char="•"/>
             </a:pPr>
             <a:r>
-              <a:rPr sz="2400" b="0">
+              <a:rPr sz="2200" b="0">
                 <a:solidFill>
                   <a:srgbClr val="202122"/>
                 </a:solidFill>
                 <a:latin typeface="Calibri"/>
               </a:rPr>
-              <a:t>Consider additional and accessibility needs.</a:t>
-            </a:r>
-          </a:p>
-        </p:txBody>
-      </p:sp>
-      <p:sp>
-        <p:nvSpPr>
-          <p:cNvPr id="7" name="Rounded Rectangle 6"/>
+              <a:t>Automation, including AI</a:t>
+            </a:r>
+          </a:p>
+        </p:txBody>
+      </p:sp>
+      <p:sp>
+        <p:nvSpPr>
+          <p:cNvPr id="10" name="Rounded Rectangle 9"/>
           <p:cNvSpPr/>
           <p:nvPr/>
         </p:nvSpPr>
         <p:spPr>
           <a:xfrm>
-            <a:off x="7772400" y="1600200"/>
-            <a:ext cx="3867912" cy="4434840"/>
+            <a:off x="6278727" y="1600200"/>
+            <a:ext cx="5364327" cy="640080"/>
           </a:xfrm>
           <a:prstGeom prst="roundRect">
             <a:avLst>
-              <a:gd name="adj" fmla="val 8000"/>
+              <a:gd name="adj" fmla="val 15000"/>
             </a:avLst>
           </a:prstGeom>
           <a:solidFill>
-            <a:srgbClr val="03306E"/>
+            <a:srgbClr val="0645AD"/>
           </a:solidFill>
           <a:ln>
             <a:noFill/>
@@ -6120,20 +11244,55 @@
       </p:sp>
       <p:sp>
         <p:nvSpPr>
-          <p:cNvPr id="8" name="Oval 7"/>
+          <p:cNvPr id="11" name="TextBox 10"/>
+          <p:cNvSpPr txBox="1"/>
+          <p:nvPr/>
+        </p:nvSpPr>
+        <p:spPr>
+          <a:xfrm>
+            <a:off x="6507327" y="1600200"/>
+            <a:ext cx="4907127" cy="640080"/>
+          </a:xfrm>
+          <a:prstGeom prst="rect">
+            <a:avLst/>
+          </a:prstGeom>
+          <a:noFill/>
+        </p:spPr>
+        <p:txBody>
+          <a:bodyPr wrap="square" anchor="ctr" lIns="0" rIns="0" tIns="0" bIns="0"/>
+          <a:lstStyle/>
+          <a:p>
+            <a:pPr algn="l"/>
+            <a:r>
+              <a:rPr sz="2000" b="1" i="0">
+                <a:solidFill>
+                  <a:srgbClr val="FFFFFF"/>
+                </a:solidFill>
+                <a:latin typeface="Calibri"/>
+              </a:rPr>
+              <a:t>On society</a:t>
+            </a:r>
+          </a:p>
+        </p:txBody>
+      </p:sp>
+      <p:sp>
+        <p:nvSpPr>
+          <p:cNvPr id="12" name="Rounded Rectangle 11"/>
           <p:cNvSpPr/>
           <p:nvPr/>
         </p:nvSpPr>
         <p:spPr>
           <a:xfrm>
-            <a:off x="8046720" y="1874519"/>
-            <a:ext cx="548640" cy="548640"/>
-          </a:xfrm>
-          <a:prstGeom prst="ellipse">
-            <a:avLst/>
+            <a:off x="6278727" y="2377440"/>
+            <a:ext cx="5364327" cy="3794760"/>
+          </a:xfrm>
+          <a:prstGeom prst="roundRect">
+            <a:avLst>
+              <a:gd name="adj" fmla="val 4000"/>
+            </a:avLst>
           </a:prstGeom>
           <a:solidFill>
-            <a:srgbClr val="F2B705"/>
+            <a:srgbClr val="EAF3FF"/>
           </a:solidFill>
           <a:ln>
             <a:noFill/>
@@ -6155,84 +11314,144 @@
           </a:fontRef>
         </p:style>
         <p:txBody>
-          <a:bodyPr rtlCol="0" anchor="ctr" lIns="0" rIns="0" tIns="0" bIns="0"/>
-          <a:lstStyle/>
-          <a:p>
-            <a:pPr algn="ctr"/>
-            <a:r>
-              <a:rPr sz="2000" b="1">
+          <a:bodyPr rtlCol="0" anchor="ctr"/>
+          <a:lstStyle/>
+          <a:p/>
+        </p:txBody>
+      </p:sp>
+      <p:sp>
+        <p:nvSpPr>
+          <p:cNvPr id="13" name="TextBox 12"/>
+          <p:cNvSpPr txBox="1"/>
+          <p:nvPr/>
+        </p:nvSpPr>
+        <p:spPr>
+          <a:xfrm>
+            <a:off x="6553047" y="2606040"/>
+            <a:ext cx="4815687" cy="3337560"/>
+          </a:xfrm>
+          <a:prstGeom prst="rect">
+            <a:avLst/>
+          </a:prstGeom>
+          <a:noFill/>
+        </p:spPr>
+        <p:txBody>
+          <a:bodyPr wrap="square" lIns="0" rIns="0" tIns="0" bIns="0">
+            <a:spAutoFit/>
+          </a:bodyPr>
+          <a:lstStyle/>
+          <a:p>
+            <a:pPr marL="274320" indent="-274320">
+              <a:spcAft>
+                <a:spcPts val="855"/>
+              </a:spcAft>
+              <a:buClr>
+                <a:srgbClr val="0645AD"/>
+              </a:buClr>
+              <a:buFont typeface="Arial"/>
+              <a:buChar char="•"/>
+            </a:pPr>
+            <a:r>
+              <a:rPr sz="1900" b="0">
                 <a:solidFill>
                   <a:srgbClr val="202122"/>
                 </a:solidFill>
                 <a:latin typeface="Calibri"/>
               </a:rPr>
-              <a:t>!</a:t>
-            </a:r>
-          </a:p>
-        </p:txBody>
-      </p:sp>
-      <p:sp>
-        <p:nvSpPr>
-          <p:cNvPr id="9" name="TextBox 8"/>
-          <p:cNvSpPr txBox="1"/>
-          <p:nvPr/>
-        </p:nvSpPr>
-        <p:spPr>
-          <a:xfrm>
-            <a:off x="8046720" y="2606040"/>
-            <a:ext cx="3291840" cy="365760"/>
-          </a:xfrm>
-          <a:prstGeom prst="rect">
-            <a:avLst/>
-          </a:prstGeom>
-          <a:noFill/>
-        </p:spPr>
-        <p:txBody>
-          <a:bodyPr wrap="square" anchor="t" lIns="0" rIns="0" tIns="0" bIns="0"/>
-          <a:lstStyle/>
-          <a:p>
-            <a:pPr algn="l"/>
-            <a:r>
-              <a:rPr sz="1300" b="1" i="0">
-                <a:solidFill>
-                  <a:srgbClr val="A9C8F0"/>
-                </a:solidFill>
-                <a:latin typeface="Calibri"/>
-              </a:rPr>
-              <a:t>KEY IDEA</a:t>
-            </a:r>
-          </a:p>
-        </p:txBody>
-      </p:sp>
-      <p:sp>
-        <p:nvSpPr>
-          <p:cNvPr id="10" name="TextBox 9"/>
-          <p:cNvSpPr txBox="1"/>
-          <p:nvPr/>
-        </p:nvSpPr>
-        <p:spPr>
-          <a:xfrm>
-            <a:off x="8046720" y="3017520"/>
-            <a:ext cx="3291840" cy="2926080"/>
-          </a:xfrm>
-          <a:prstGeom prst="rect">
-            <a:avLst/>
-          </a:prstGeom>
-          <a:noFill/>
-        </p:spPr>
-        <p:txBody>
-          <a:bodyPr wrap="square" anchor="t" lIns="0" rIns="0" tIns="0" bIns="0"/>
-          <a:lstStyle/>
-          <a:p>
-            <a:pPr algn="l"/>
-            <a:r>
-              <a:rPr sz="2200" b="0" i="0">
-                <a:solidFill>
-                  <a:srgbClr val="FFFFFF"/>
-                </a:solidFill>
-                <a:latin typeface="Cambria"/>
-              </a:rPr>
-              <a:t>Professional development keeps you competent, employable and up to date with standards as technology changes.</a:t>
+              <a:t>Job losses and changing skills</a:t>
+            </a:r>
+          </a:p>
+          <a:p>
+            <a:pPr marL="274320" indent="-274320">
+              <a:spcAft>
+                <a:spcPts val="855"/>
+              </a:spcAft>
+              <a:buClr>
+                <a:srgbClr val="0645AD"/>
+              </a:buClr>
+              <a:buFont typeface="Arial"/>
+              <a:buChar char="•"/>
+            </a:pPr>
+            <a:r>
+              <a:rPr sz="1900" b="0">
+                <a:solidFill>
+                  <a:srgbClr val="202122"/>
+                </a:solidFill>
+                <a:latin typeface="Calibri"/>
+              </a:rPr>
+              <a:t>Less human decision-making and empathy</a:t>
+            </a:r>
+          </a:p>
+          <a:p>
+            <a:pPr marL="274320" indent="-274320">
+              <a:spcAft>
+                <a:spcPts val="855"/>
+              </a:spcAft>
+              <a:buClr>
+                <a:srgbClr val="0645AD"/>
+              </a:buClr>
+              <a:buFont typeface="Arial"/>
+              <a:buChar char="•"/>
+            </a:pPr>
+            <a:r>
+              <a:rPr sz="1900" b="1">
+                <a:solidFill>
+                  <a:srgbClr val="202122"/>
+                </a:solidFill>
+                <a:latin typeface="Calibri"/>
+              </a:rPr>
+              <a:t>Privacy:</a:t>
+            </a:r>
+            <a:r>
+              <a:rPr sz="1900" b="0">
+                <a:solidFill>
+                  <a:srgbClr val="202122"/>
+                </a:solidFill>
+                <a:latin typeface="Calibri"/>
+              </a:rPr>
+              <a:t> digital footprint and surveillance</a:t>
+            </a:r>
+          </a:p>
+          <a:p>
+            <a:pPr marL="274320" indent="-274320">
+              <a:spcAft>
+                <a:spcPts val="855"/>
+              </a:spcAft>
+              <a:buClr>
+                <a:srgbClr val="0645AD"/>
+              </a:buClr>
+              <a:buFont typeface="Arial"/>
+              <a:buChar char="•"/>
+            </a:pPr>
+            <a:r>
+              <a:rPr sz="1900" b="0">
+                <a:solidFill>
+                  <a:srgbClr val="202122"/>
+                </a:solidFill>
+                <a:latin typeface="Calibri"/>
+              </a:rPr>
+              <a:t>Digital isolation for some; better access to information for others</a:t>
+            </a:r>
+          </a:p>
+          <a:p>
+            <a:pPr marL="274320" indent="-274320">
+              <a:spcAft>
+                <a:spcPts val="855"/>
+              </a:spcAft>
+              <a:buClr>
+                <a:srgbClr val="0645AD"/>
+              </a:buClr>
+              <a:buFont typeface="Arial"/>
+              <a:buChar char="•"/>
+            </a:pPr>
+            <a:r>
+              <a:rPr sz="1900" b="0">
+                <a:solidFill>
+                  <a:srgbClr val="202122"/>
+                </a:solidFill>
+                <a:latin typeface="Calibri"/>
+              </a:rPr>
+              <a:t>Generative AI and globalisation</a:t>
             </a:r>
           </a:p>
         </p:txBody>
@@ -6324,7 +11543,7 @@
                 </a:solidFill>
                 <a:latin typeface="Cambria"/>
               </a:rPr>
-              <a:t>Emerging technologies (1)</a:t>
+              <a:t>Quick check: Impact of digital technologies</a:t>
             </a:r>
           </a:p>
         </p:txBody>
@@ -6397,58 +11616,14 @@
       </p:sp>
       <p:sp>
         <p:nvSpPr>
-          <p:cNvPr id="6" name="Rounded Rectangle 5"/>
+          <p:cNvPr id="6" name="Oval 5"/>
           <p:cNvSpPr/>
           <p:nvPr/>
         </p:nvSpPr>
         <p:spPr>
           <a:xfrm>
-            <a:off x="548640" y="1600200"/>
-            <a:ext cx="5410047" cy="2148840"/>
-          </a:xfrm>
-          <a:prstGeom prst="roundRect">
-            <a:avLst>
-              <a:gd name="adj" fmla="val 6000"/>
-            </a:avLst>
-          </a:prstGeom>
-          <a:solidFill>
-            <a:srgbClr val="EAF3FF"/>
-          </a:solidFill>
-          <a:ln>
-            <a:noFill/>
-          </a:ln>
-          <a:effectLst/>
-        </p:spPr>
-        <p:style>
-          <a:lnRef idx="1">
-            <a:schemeClr val="accent1"/>
-          </a:lnRef>
-          <a:fillRef idx="3">
-            <a:schemeClr val="accent1"/>
-          </a:fillRef>
-          <a:effectRef idx="2">
-            <a:schemeClr val="accent1"/>
-          </a:effectRef>
-          <a:fontRef idx="minor">
-            <a:schemeClr val="lt1"/>
-          </a:fontRef>
-        </p:style>
-        <p:txBody>
-          <a:bodyPr rtlCol="0" anchor="ctr"/>
-          <a:lstStyle/>
-          <a:p/>
-        </p:txBody>
-      </p:sp>
-      <p:sp>
-        <p:nvSpPr>
-          <p:cNvPr id="7" name="Oval 6"/>
-          <p:cNvSpPr/>
-          <p:nvPr/>
-        </p:nvSpPr>
-        <p:spPr>
-          <a:xfrm>
-            <a:off x="777240" y="1828800"/>
-            <a:ext cx="457200" cy="457200"/>
+            <a:off x="548640" y="1691640"/>
+            <a:ext cx="502920" cy="502920"/>
           </a:xfrm>
           <a:prstGeom prst="ellipse">
             <a:avLst/>
@@ -6481,7 +11656,7 @@
           <a:p>
             <a:pPr algn="ctr"/>
             <a:r>
-              <a:rPr sz="1500" b="1">
+              <a:rPr sz="1600" b="1">
                 <a:solidFill>
                   <a:srgbClr val="202122"/>
                 </a:solidFill>
@@ -6494,124 +11669,47 @@
       </p:sp>
       <p:sp>
         <p:nvSpPr>
-          <p:cNvPr id="8" name="TextBox 7"/>
-          <p:cNvSpPr txBox="1"/>
-          <p:nvPr/>
-        </p:nvSpPr>
-        <p:spPr>
-          <a:xfrm>
-            <a:off x="1371600" y="1801368"/>
-            <a:ext cx="4404207" cy="512064"/>
-          </a:xfrm>
-          <a:prstGeom prst="rect">
-            <a:avLst/>
-          </a:prstGeom>
-          <a:noFill/>
-        </p:spPr>
-        <p:txBody>
-          <a:bodyPr wrap="square" anchor="ctr" lIns="0" rIns="0" tIns="0" bIns="0"/>
+          <p:cNvPr id="7" name="TextBox 6"/>
+          <p:cNvSpPr txBox="1"/>
+          <p:nvPr/>
+        </p:nvSpPr>
+        <p:spPr>
+          <a:xfrm>
+            <a:off x="1371600" y="1645920"/>
+            <a:ext cx="10271455" cy="1188720"/>
+          </a:xfrm>
+          <a:prstGeom prst="rect">
+            <a:avLst/>
+          </a:prstGeom>
+          <a:noFill/>
+        </p:spPr>
+        <p:txBody>
+          <a:bodyPr wrap="square" anchor="t" lIns="0" rIns="0" tIns="0" bIns="0"/>
           <a:lstStyle/>
           <a:p>
             <a:pPr algn="l"/>
             <a:r>
-              <a:rPr sz="1900" b="1" i="0">
-                <a:solidFill>
-                  <a:srgbClr val="03306E"/>
-                </a:solidFill>
-                <a:latin typeface="Calibri"/>
-              </a:rPr>
-              <a:t>Storage and processing</a:t>
-            </a:r>
-          </a:p>
-        </p:txBody>
-      </p:sp>
-      <p:sp>
-        <p:nvSpPr>
-          <p:cNvPr id="9" name="TextBox 8"/>
-          <p:cNvSpPr txBox="1"/>
-          <p:nvPr/>
-        </p:nvSpPr>
-        <p:spPr>
-          <a:xfrm>
-            <a:off x="777240" y="2468880"/>
-            <a:ext cx="4952847" cy="1143000"/>
-          </a:xfrm>
-          <a:prstGeom prst="rect">
-            <a:avLst/>
-          </a:prstGeom>
-          <a:noFill/>
-        </p:spPr>
-        <p:txBody>
-          <a:bodyPr wrap="square" anchor="t" lIns="0" rIns="0" tIns="0" bIns="0"/>
-          <a:lstStyle/>
-          <a:p>
-            <a:pPr algn="l"/>
-            <a:r>
-              <a:rPr sz="2000" b="0" i="0">
+              <a:rPr sz="2400" b="0" i="0">
                 <a:solidFill>
                   <a:srgbClr val="202122"/>
                 </a:solidFill>
                 <a:latin typeface="Calibri"/>
               </a:rPr>
-              <a:t>Growing demand for storage; quantum computing could solve problems classical computers cannot.</a:t>
-            </a:r>
-          </a:p>
-        </p:txBody>
-      </p:sp>
-      <p:sp>
-        <p:nvSpPr>
-          <p:cNvPr id="10" name="Rounded Rectangle 9"/>
+              <a:t>Give two ways technology has changed organisational culture.</a:t>
+            </a:r>
+          </a:p>
+        </p:txBody>
+      </p:sp>
+      <p:sp>
+        <p:nvSpPr>
+          <p:cNvPr id="8" name="Oval 7"/>
           <p:cNvSpPr/>
           <p:nvPr/>
         </p:nvSpPr>
         <p:spPr>
           <a:xfrm>
-            <a:off x="6233007" y="1600200"/>
-            <a:ext cx="5410047" cy="2148840"/>
-          </a:xfrm>
-          <a:prstGeom prst="roundRect">
-            <a:avLst>
-              <a:gd name="adj" fmla="val 6000"/>
-            </a:avLst>
-          </a:prstGeom>
-          <a:solidFill>
-            <a:srgbClr val="EAF3FF"/>
-          </a:solidFill>
-          <a:ln>
-            <a:noFill/>
-          </a:ln>
-          <a:effectLst/>
-        </p:spPr>
-        <p:style>
-          <a:lnRef idx="1">
-            <a:schemeClr val="accent1"/>
-          </a:lnRef>
-          <a:fillRef idx="3">
-            <a:schemeClr val="accent1"/>
-          </a:fillRef>
-          <a:effectRef idx="2">
-            <a:schemeClr val="accent1"/>
-          </a:effectRef>
-          <a:fontRef idx="minor">
-            <a:schemeClr val="lt1"/>
-          </a:fontRef>
-        </p:style>
-        <p:txBody>
-          <a:bodyPr rtlCol="0" anchor="ctr"/>
-          <a:lstStyle/>
-          <a:p/>
-        </p:txBody>
-      </p:sp>
-      <p:sp>
-        <p:nvSpPr>
-          <p:cNvPr id="11" name="Oval 10"/>
-          <p:cNvSpPr/>
-          <p:nvPr/>
-        </p:nvSpPr>
-        <p:spPr>
-          <a:xfrm>
-            <a:off x="6461607" y="1828800"/>
-            <a:ext cx="457200" cy="457200"/>
+            <a:off x="548640" y="3108960"/>
+            <a:ext cx="502920" cy="502920"/>
           </a:xfrm>
           <a:prstGeom prst="ellipse">
             <a:avLst/>
@@ -6644,7 +11742,7 @@
           <a:p>
             <a:pPr algn="ctr"/>
             <a:r>
-              <a:rPr sz="1500" b="1">
+              <a:rPr sz="1600" b="1">
                 <a:solidFill>
                   <a:srgbClr val="202122"/>
                 </a:solidFill>
@@ -6657,124 +11755,47 @@
       </p:sp>
       <p:sp>
         <p:nvSpPr>
-          <p:cNvPr id="12" name="TextBox 11"/>
-          <p:cNvSpPr txBox="1"/>
-          <p:nvPr/>
-        </p:nvSpPr>
-        <p:spPr>
-          <a:xfrm>
-            <a:off x="7055967" y="1801368"/>
-            <a:ext cx="4404207" cy="512064"/>
-          </a:xfrm>
-          <a:prstGeom prst="rect">
-            <a:avLst/>
-          </a:prstGeom>
-          <a:noFill/>
-        </p:spPr>
-        <p:txBody>
-          <a:bodyPr wrap="square" anchor="ctr" lIns="0" rIns="0" tIns="0" bIns="0"/>
+          <p:cNvPr id="9" name="TextBox 8"/>
+          <p:cNvSpPr txBox="1"/>
+          <p:nvPr/>
+        </p:nvSpPr>
+        <p:spPr>
+          <a:xfrm>
+            <a:off x="1371600" y="3063240"/>
+            <a:ext cx="10271455" cy="1188720"/>
+          </a:xfrm>
+          <a:prstGeom prst="rect">
+            <a:avLst/>
+          </a:prstGeom>
+          <a:noFill/>
+        </p:spPr>
+        <p:txBody>
+          <a:bodyPr wrap="square" anchor="t" lIns="0" rIns="0" tIns="0" bIns="0"/>
           <a:lstStyle/>
           <a:p>
             <a:pPr algn="l"/>
             <a:r>
-              <a:rPr sz="1900" b="1" i="0">
-                <a:solidFill>
-                  <a:srgbClr val="03306E"/>
-                </a:solidFill>
-                <a:latin typeface="Calibri"/>
-              </a:rPr>
-              <a:t>Internet of Things</a:t>
-            </a:r>
-          </a:p>
-        </p:txBody>
-      </p:sp>
-      <p:sp>
-        <p:nvSpPr>
-          <p:cNvPr id="13" name="TextBox 12"/>
-          <p:cNvSpPr txBox="1"/>
-          <p:nvPr/>
-        </p:nvSpPr>
-        <p:spPr>
-          <a:xfrm>
-            <a:off x="6461607" y="2468880"/>
-            <a:ext cx="4952847" cy="1143000"/>
-          </a:xfrm>
-          <a:prstGeom prst="rect">
-            <a:avLst/>
-          </a:prstGeom>
-          <a:noFill/>
-        </p:spPr>
-        <p:txBody>
-          <a:bodyPr wrap="square" anchor="t" lIns="0" rIns="0" tIns="0" bIns="0"/>
-          <a:lstStyle/>
-          <a:p>
-            <a:pPr algn="l"/>
-            <a:r>
-              <a:rPr sz="2000" b="0" i="0">
+              <a:rPr sz="2400" b="0" i="0">
                 <a:solidFill>
                   <a:srgbClr val="202122"/>
                 </a:solidFill>
                 <a:latin typeface="Calibri"/>
               </a:rPr>
-              <a:t>Edge computing, extra network load, industrial, smart city and home uses.</a:t>
-            </a:r>
-          </a:p>
-        </p:txBody>
-      </p:sp>
-      <p:sp>
-        <p:nvSpPr>
-          <p:cNvPr id="14" name="Rounded Rectangle 13"/>
+              <a:t>What is digital isolation?</a:t>
+            </a:r>
+          </a:p>
+        </p:txBody>
+      </p:sp>
+      <p:sp>
+        <p:nvSpPr>
+          <p:cNvPr id="10" name="Oval 9"/>
           <p:cNvSpPr/>
           <p:nvPr/>
         </p:nvSpPr>
         <p:spPr>
           <a:xfrm>
-            <a:off x="548640" y="4023360"/>
-            <a:ext cx="5410047" cy="2148840"/>
-          </a:xfrm>
-          <a:prstGeom prst="roundRect">
-            <a:avLst>
-              <a:gd name="adj" fmla="val 6000"/>
-            </a:avLst>
-          </a:prstGeom>
-          <a:solidFill>
-            <a:srgbClr val="EAF3FF"/>
-          </a:solidFill>
-          <a:ln>
-            <a:noFill/>
-          </a:ln>
-          <a:effectLst/>
-        </p:spPr>
-        <p:style>
-          <a:lnRef idx="1">
-            <a:schemeClr val="accent1"/>
-          </a:lnRef>
-          <a:fillRef idx="3">
-            <a:schemeClr val="accent1"/>
-          </a:fillRef>
-          <a:effectRef idx="2">
-            <a:schemeClr val="accent1"/>
-          </a:effectRef>
-          <a:fontRef idx="minor">
-            <a:schemeClr val="lt1"/>
-          </a:fontRef>
-        </p:style>
-        <p:txBody>
-          <a:bodyPr rtlCol="0" anchor="ctr"/>
-          <a:lstStyle/>
-          <a:p/>
-        </p:txBody>
-      </p:sp>
-      <p:sp>
-        <p:nvSpPr>
-          <p:cNvPr id="15" name="Oval 14"/>
-          <p:cNvSpPr/>
-          <p:nvPr/>
-        </p:nvSpPr>
-        <p:spPr>
-          <a:xfrm>
-            <a:off x="777240" y="4251960"/>
-            <a:ext cx="457200" cy="457200"/>
+            <a:off x="548640" y="4526280"/>
+            <a:ext cx="502920" cy="502920"/>
           </a:xfrm>
           <a:prstGeom prst="ellipse">
             <a:avLst/>
@@ -6807,7 +11828,7 @@
           <a:p>
             <a:pPr algn="ctr"/>
             <a:r>
-              <a:rPr sz="1500" b="1">
+              <a:rPr sz="1600" b="1">
                 <a:solidFill>
                   <a:srgbClr val="202122"/>
                 </a:solidFill>
@@ -6820,47 +11841,47 @@
       </p:sp>
       <p:sp>
         <p:nvSpPr>
-          <p:cNvPr id="16" name="TextBox 15"/>
-          <p:cNvSpPr txBox="1"/>
-          <p:nvPr/>
-        </p:nvSpPr>
-        <p:spPr>
-          <a:xfrm>
-            <a:off x="1371600" y="4224528"/>
-            <a:ext cx="4404207" cy="512064"/>
-          </a:xfrm>
-          <a:prstGeom prst="rect">
-            <a:avLst/>
-          </a:prstGeom>
-          <a:noFill/>
-        </p:spPr>
-        <p:txBody>
-          <a:bodyPr wrap="square" anchor="ctr" lIns="0" rIns="0" tIns="0" bIns="0"/>
+          <p:cNvPr id="11" name="TextBox 10"/>
+          <p:cNvSpPr txBox="1"/>
+          <p:nvPr/>
+        </p:nvSpPr>
+        <p:spPr>
+          <a:xfrm>
+            <a:off x="1371600" y="4480560"/>
+            <a:ext cx="10271455" cy="1188720"/>
+          </a:xfrm>
+          <a:prstGeom prst="rect">
+            <a:avLst/>
+          </a:prstGeom>
+          <a:noFill/>
+        </p:spPr>
+        <p:txBody>
+          <a:bodyPr wrap="square" anchor="t" lIns="0" rIns="0" tIns="0" bIns="0"/>
           <a:lstStyle/>
           <a:p>
             <a:pPr algn="l"/>
             <a:r>
-              <a:rPr sz="1900" b="1" i="0">
-                <a:solidFill>
-                  <a:srgbClr val="03306E"/>
-                </a:solidFill>
-                <a:latin typeface="Calibri"/>
-              </a:rPr>
-              <a:t>Artificial intelligence</a:t>
-            </a:r>
-          </a:p>
-        </p:txBody>
-      </p:sp>
-      <p:sp>
-        <p:nvSpPr>
-          <p:cNvPr id="17" name="TextBox 16"/>
-          <p:cNvSpPr txBox="1"/>
-          <p:nvPr/>
-        </p:nvSpPr>
-        <p:spPr>
-          <a:xfrm>
-            <a:off x="777240" y="4892040"/>
-            <a:ext cx="4952847" cy="1143000"/>
+              <a:rPr sz="2400" b="0" i="0">
+                <a:solidFill>
+                  <a:srgbClr val="202122"/>
+                </a:solidFill>
+                <a:latin typeface="Calibri"/>
+              </a:rPr>
+              <a:t>Give one positive impact on society.</a:t>
+            </a:r>
+          </a:p>
+        </p:txBody>
+      </p:sp>
+      <p:sp>
+        <p:nvSpPr>
+          <p:cNvPr id="12" name="TextBox 11"/>
+          <p:cNvSpPr txBox="1"/>
+          <p:nvPr/>
+        </p:nvSpPr>
+        <p:spPr>
+          <a:xfrm>
+            <a:off x="548640" y="5852160"/>
+            <a:ext cx="11094415" cy="365760"/>
           </a:xfrm>
           <a:prstGeom prst="rect">
             <a:avLst/>
@@ -6873,176 +11894,13 @@
           <a:p>
             <a:pPr algn="l"/>
             <a:r>
-              <a:rPr sz="2000" b="0" i="0">
-                <a:solidFill>
-                  <a:srgbClr val="202122"/>
-                </a:solidFill>
-                <a:latin typeface="Calibri"/>
-              </a:rPr>
-              <a:t>Generative AI and machine learning.</a:t>
-            </a:r>
-          </a:p>
-        </p:txBody>
-      </p:sp>
-      <p:sp>
-        <p:nvSpPr>
-          <p:cNvPr id="18" name="Rounded Rectangle 17"/>
-          <p:cNvSpPr/>
-          <p:nvPr/>
-        </p:nvSpPr>
-        <p:spPr>
-          <a:xfrm>
-            <a:off x="6233007" y="4023360"/>
-            <a:ext cx="5410047" cy="2148840"/>
-          </a:xfrm>
-          <a:prstGeom prst="roundRect">
-            <a:avLst>
-              <a:gd name="adj" fmla="val 6000"/>
-            </a:avLst>
-          </a:prstGeom>
-          <a:solidFill>
-            <a:srgbClr val="EAF3FF"/>
-          </a:solidFill>
-          <a:ln>
-            <a:noFill/>
-          </a:ln>
-          <a:effectLst/>
-        </p:spPr>
-        <p:style>
-          <a:lnRef idx="1">
-            <a:schemeClr val="accent1"/>
-          </a:lnRef>
-          <a:fillRef idx="3">
-            <a:schemeClr val="accent1"/>
-          </a:fillRef>
-          <a:effectRef idx="2">
-            <a:schemeClr val="accent1"/>
-          </a:effectRef>
-          <a:fontRef idx="minor">
-            <a:schemeClr val="lt1"/>
-          </a:fontRef>
-        </p:style>
-        <p:txBody>
-          <a:bodyPr rtlCol="0" anchor="ctr"/>
-          <a:lstStyle/>
-          <a:p/>
-        </p:txBody>
-      </p:sp>
-      <p:sp>
-        <p:nvSpPr>
-          <p:cNvPr id="19" name="Oval 18"/>
-          <p:cNvSpPr/>
-          <p:nvPr/>
-        </p:nvSpPr>
-        <p:spPr>
-          <a:xfrm>
-            <a:off x="6461607" y="4251960"/>
-            <a:ext cx="457200" cy="457200"/>
-          </a:xfrm>
-          <a:prstGeom prst="ellipse">
-            <a:avLst/>
-          </a:prstGeom>
-          <a:solidFill>
-            <a:srgbClr val="F2B705"/>
-          </a:solidFill>
-          <a:ln>
-            <a:noFill/>
-          </a:ln>
-          <a:effectLst/>
-        </p:spPr>
-        <p:style>
-          <a:lnRef idx="1">
-            <a:schemeClr val="accent1"/>
-          </a:lnRef>
-          <a:fillRef idx="3">
-            <a:schemeClr val="accent1"/>
-          </a:fillRef>
-          <a:effectRef idx="2">
-            <a:schemeClr val="accent1"/>
-          </a:effectRef>
-          <a:fontRef idx="minor">
-            <a:schemeClr val="lt1"/>
-          </a:fontRef>
-        </p:style>
-        <p:txBody>
-          <a:bodyPr rtlCol="0" anchor="ctr" lIns="0" rIns="0" tIns="0" bIns="0"/>
-          <a:lstStyle/>
-          <a:p>
-            <a:pPr algn="ctr"/>
-            <a:r>
-              <a:rPr sz="1500" b="1">
-                <a:solidFill>
-                  <a:srgbClr val="202122"/>
-                </a:solidFill>
-                <a:latin typeface="Calibri"/>
-              </a:rPr>
-              <a:t>4</a:t>
-            </a:r>
-          </a:p>
-        </p:txBody>
-      </p:sp>
-      <p:sp>
-        <p:nvSpPr>
-          <p:cNvPr id="20" name="TextBox 19"/>
-          <p:cNvSpPr txBox="1"/>
-          <p:nvPr/>
-        </p:nvSpPr>
-        <p:spPr>
-          <a:xfrm>
-            <a:off x="7055967" y="4224528"/>
-            <a:ext cx="4404207" cy="512064"/>
-          </a:xfrm>
-          <a:prstGeom prst="rect">
-            <a:avLst/>
-          </a:prstGeom>
-          <a:noFill/>
-        </p:spPr>
-        <p:txBody>
-          <a:bodyPr wrap="square" anchor="ctr" lIns="0" rIns="0" tIns="0" bIns="0"/>
-          <a:lstStyle/>
-          <a:p>
-            <a:pPr algn="l"/>
-            <a:r>
-              <a:rPr sz="1900" b="1" i="0">
-                <a:solidFill>
-                  <a:srgbClr val="03306E"/>
-                </a:solidFill>
-                <a:latin typeface="Calibri"/>
-              </a:rPr>
-              <a:t>Extended reality</a:t>
-            </a:r>
-          </a:p>
-        </p:txBody>
-      </p:sp>
-      <p:sp>
-        <p:nvSpPr>
-          <p:cNvPr id="21" name="TextBox 20"/>
-          <p:cNvSpPr txBox="1"/>
-          <p:nvPr/>
-        </p:nvSpPr>
-        <p:spPr>
-          <a:xfrm>
-            <a:off x="6461607" y="4892040"/>
-            <a:ext cx="4952847" cy="1143000"/>
-          </a:xfrm>
-          <a:prstGeom prst="rect">
-            <a:avLst/>
-          </a:prstGeom>
-          <a:noFill/>
-        </p:spPr>
-        <p:txBody>
-          <a:bodyPr wrap="square" anchor="t" lIns="0" rIns="0" tIns="0" bIns="0"/>
-          <a:lstStyle/>
-          <a:p>
-            <a:pPr algn="l"/>
-            <a:r>
-              <a:rPr sz="2000" b="0" i="0">
-                <a:solidFill>
-                  <a:srgbClr val="202122"/>
-                </a:solidFill>
-                <a:latin typeface="Calibri"/>
-              </a:rPr>
-              <a:t>Augmented and virtual reality for training, design and support.</a:t>
+              <a:rPr sz="1300" b="0" i="1">
+                <a:solidFill>
+                  <a:srgbClr val="54595D"/>
+                </a:solidFill>
+                <a:latin typeface="Calibri"/>
+              </a:rPr>
+              <a:t>Answer on mini whiteboards or in your book. Answers are in the speaker notes.</a:t>
             </a:r>
           </a:p>
         </p:txBody>
@@ -7134,7 +11992,7 @@
                 </a:solidFill>
                 <a:latin typeface="Cambria"/>
               </a:rPr>
-              <a:t>Emerging technologies (2)</a:t>
+              <a:t>Digital inclusion</a:t>
             </a:r>
           </a:p>
         </p:txBody>
@@ -7207,22 +12065,109 @@
       </p:sp>
       <p:sp>
         <p:nvSpPr>
-          <p:cNvPr id="6" name="Rounded Rectangle 5"/>
+          <p:cNvPr id="6" name="TextBox 5"/>
+          <p:cNvSpPr txBox="1"/>
+          <p:nvPr/>
+        </p:nvSpPr>
+        <p:spPr>
+          <a:xfrm>
+            <a:off x="548640" y="1554480"/>
+            <a:ext cx="6720840" cy="4617720"/>
+          </a:xfrm>
+          <a:prstGeom prst="rect">
+            <a:avLst/>
+          </a:prstGeom>
+          <a:noFill/>
+        </p:spPr>
+        <p:txBody>
+          <a:bodyPr wrap="square" lIns="0" rIns="0" tIns="0" bIns="0">
+            <a:spAutoFit/>
+          </a:bodyPr>
+          <a:lstStyle/>
+          <a:p>
+            <a:pPr>
+              <a:spcAft>
+                <a:spcPts val="1200"/>
+              </a:spcAft>
+            </a:pPr>
+            <a:r>
+              <a:rPr sz="2000" b="0">
+                <a:solidFill>
+                  <a:srgbClr val="202122"/>
+                </a:solidFill>
+                <a:latin typeface="Calibri"/>
+              </a:rPr>
+              <a:t>Digital inclusion means everyone can access and use digital services fairly.</a:t>
+            </a:r>
+          </a:p>
+          <a:p>
+            <a:pPr>
+              <a:spcAft>
+                <a:spcPts val="1200"/>
+              </a:spcAft>
+            </a:pPr>
+            <a:r>
+              <a:rPr sz="2000" b="0">
+                <a:solidFill>
+                  <a:srgbClr val="202122"/>
+                </a:solidFill>
+                <a:latin typeface="Calibri"/>
+              </a:rPr>
+              <a:t>That needs suitable hardware and software, reliable connectivity, and design that follows accessibility best practice. Public sector websites must meet accessibility regulations by law.</a:t>
+            </a:r>
+          </a:p>
+          <a:p>
+            <a:pPr>
+              <a:spcAft>
+                <a:spcPts val="1200"/>
+              </a:spcAft>
+            </a:pPr>
+            <a:r>
+              <a:rPr sz="2000" b="0">
+                <a:solidFill>
+                  <a:srgbClr val="202122"/>
+                </a:solidFill>
+                <a:latin typeface="Calibri"/>
+              </a:rPr>
+              <a:t>Think about who the users are: their age, digital and literacy skills, whether they're staff or the public, cultural issues (including bias built into systems), and accessibility needs such as visual impairment or limited mobility.</a:t>
+            </a:r>
+          </a:p>
+          <a:p>
+            <a:pPr>
+              <a:spcAft>
+                <a:spcPts val="1200"/>
+              </a:spcAft>
+            </a:pPr>
+            <a:r>
+              <a:rPr sz="2000" b="0">
+                <a:solidFill>
+                  <a:srgbClr val="202122"/>
+                </a:solidFill>
+                <a:latin typeface="Calibri"/>
+              </a:rPr>
+              <a:t>Professional development helps IT staff keep up with standards so they can build inclusive systems.</a:t>
+            </a:r>
+          </a:p>
+        </p:txBody>
+      </p:sp>
+      <p:sp>
+        <p:nvSpPr>
+          <p:cNvPr id="7" name="Rounded Rectangle 6"/>
           <p:cNvSpPr/>
           <p:nvPr/>
         </p:nvSpPr>
         <p:spPr>
           <a:xfrm>
-            <a:off x="548640" y="1600200"/>
-            <a:ext cx="3515258" cy="2148840"/>
+            <a:off x="7772400" y="1554480"/>
+            <a:ext cx="3867912" cy="4526280"/>
           </a:xfrm>
           <a:prstGeom prst="roundRect">
             <a:avLst>
-              <a:gd name="adj" fmla="val 6000"/>
+              <a:gd name="adj" fmla="val 8000"/>
             </a:avLst>
           </a:prstGeom>
           <a:solidFill>
-            <a:srgbClr val="EAF3FF"/>
+            <a:srgbClr val="03306E"/>
           </a:solidFill>
           <a:ln>
             <a:noFill/>
@@ -7251,14 +12196,14 @@
       </p:sp>
       <p:sp>
         <p:nvSpPr>
-          <p:cNvPr id="7" name="Oval 6"/>
+          <p:cNvPr id="8" name="Oval 7"/>
           <p:cNvSpPr/>
           <p:nvPr/>
         </p:nvSpPr>
         <p:spPr>
           <a:xfrm>
-            <a:off x="777240" y="1828800"/>
-            <a:ext cx="457200" cy="457200"/>
+            <a:off x="8046720" y="1828800"/>
+            <a:ext cx="548640" cy="548640"/>
           </a:xfrm>
           <a:prstGeom prst="ellipse">
             <a:avLst/>
@@ -7291,60 +12236,60 @@
           <a:p>
             <a:pPr algn="ctr"/>
             <a:r>
-              <a:rPr sz="1500" b="1">
+              <a:rPr sz="1300" b="1">
                 <a:solidFill>
                   <a:srgbClr val="202122"/>
                 </a:solidFill>
                 <a:latin typeface="Calibri"/>
               </a:rPr>
-              <a:t>1</a:t>
-            </a:r>
-          </a:p>
-        </p:txBody>
-      </p:sp>
-      <p:sp>
-        <p:nvSpPr>
-          <p:cNvPr id="8" name="TextBox 7"/>
-          <p:cNvSpPr txBox="1"/>
-          <p:nvPr/>
-        </p:nvSpPr>
-        <p:spPr>
-          <a:xfrm>
-            <a:off x="1371600" y="1801368"/>
-            <a:ext cx="2509418" cy="512064"/>
-          </a:xfrm>
-          <a:prstGeom prst="rect">
-            <a:avLst/>
-          </a:prstGeom>
-          <a:noFill/>
-        </p:spPr>
-        <p:txBody>
-          <a:bodyPr wrap="square" anchor="ctr" lIns="0" rIns="0" tIns="0" bIns="0"/>
+              <a:t>e.g.</a:t>
+            </a:r>
+          </a:p>
+        </p:txBody>
+      </p:sp>
+      <p:sp>
+        <p:nvSpPr>
+          <p:cNvPr id="9" name="TextBox 8"/>
+          <p:cNvSpPr txBox="1"/>
+          <p:nvPr/>
+        </p:nvSpPr>
+        <p:spPr>
+          <a:xfrm>
+            <a:off x="8046720" y="2560320"/>
+            <a:ext cx="3291840" cy="365760"/>
+          </a:xfrm>
+          <a:prstGeom prst="rect">
+            <a:avLst/>
+          </a:prstGeom>
+          <a:noFill/>
+        </p:spPr>
+        <p:txBody>
+          <a:bodyPr wrap="square" anchor="t" lIns="0" rIns="0" tIns="0" bIns="0"/>
           <a:lstStyle/>
           <a:p>
             <a:pPr algn="l"/>
             <a:r>
-              <a:rPr sz="1900" b="1" i="0">
-                <a:solidFill>
-                  <a:srgbClr val="03306E"/>
-                </a:solidFill>
-                <a:latin typeface="Calibri"/>
-              </a:rPr>
-              <a:t>Open source</a:t>
-            </a:r>
-          </a:p>
-        </p:txBody>
-      </p:sp>
-      <p:sp>
-        <p:nvSpPr>
-          <p:cNvPr id="9" name="TextBox 8"/>
-          <p:cNvSpPr txBox="1"/>
-          <p:nvPr/>
-        </p:nvSpPr>
-        <p:spPr>
-          <a:xfrm>
-            <a:off x="777240" y="2468880"/>
-            <a:ext cx="3058058" cy="1143000"/>
+              <a:rPr sz="1300" b="1" i="0">
+                <a:solidFill>
+                  <a:srgbClr val="A9C8F0"/>
+                </a:solidFill>
+                <a:latin typeface="Calibri"/>
+              </a:rPr>
+              <a:t>EXAMPLE</a:t>
+            </a:r>
+          </a:p>
+        </p:txBody>
+      </p:sp>
+      <p:sp>
+        <p:nvSpPr>
+          <p:cNvPr id="10" name="TextBox 9"/>
+          <p:cNvSpPr txBox="1"/>
+          <p:nvPr/>
+        </p:nvSpPr>
+        <p:spPr>
+          <a:xfrm>
+            <a:off x="8046720" y="2971800"/>
+            <a:ext cx="3291840" cy="2971800"/>
           </a:xfrm>
           <a:prstGeom prst="rect">
             <a:avLst/>
@@ -7357,665 +12302,13 @@
           <a:p>
             <a:pPr algn="l"/>
             <a:r>
-              <a:rPr sz="2000" b="0" i="0">
-                <a:solidFill>
-                  <a:srgbClr val="202122"/>
-                </a:solidFill>
-                <a:latin typeface="Calibri"/>
-              </a:rPr>
-              <a:t>Free to use and change, with community support.</a:t>
-            </a:r>
-          </a:p>
-        </p:txBody>
-      </p:sp>
-      <p:sp>
-        <p:nvSpPr>
-          <p:cNvPr id="10" name="Rounded Rectangle 9"/>
-          <p:cNvSpPr/>
-          <p:nvPr/>
-        </p:nvSpPr>
-        <p:spPr>
-          <a:xfrm>
-            <a:off x="4338218" y="1600200"/>
-            <a:ext cx="3515258" cy="2148840"/>
-          </a:xfrm>
-          <a:prstGeom prst="roundRect">
-            <a:avLst>
-              <a:gd name="adj" fmla="val 6000"/>
-            </a:avLst>
-          </a:prstGeom>
-          <a:solidFill>
-            <a:srgbClr val="EAF3FF"/>
-          </a:solidFill>
-          <a:ln>
-            <a:noFill/>
-          </a:ln>
-          <a:effectLst/>
-        </p:spPr>
-        <p:style>
-          <a:lnRef idx="1">
-            <a:schemeClr val="accent1"/>
-          </a:lnRef>
-          <a:fillRef idx="3">
-            <a:schemeClr val="accent1"/>
-          </a:fillRef>
-          <a:effectRef idx="2">
-            <a:schemeClr val="accent1"/>
-          </a:effectRef>
-          <a:fontRef idx="minor">
-            <a:schemeClr val="lt1"/>
-          </a:fontRef>
-        </p:style>
-        <p:txBody>
-          <a:bodyPr rtlCol="0" anchor="ctr"/>
-          <a:lstStyle/>
-          <a:p/>
-        </p:txBody>
-      </p:sp>
-      <p:sp>
-        <p:nvSpPr>
-          <p:cNvPr id="11" name="Oval 10"/>
-          <p:cNvSpPr/>
-          <p:nvPr/>
-        </p:nvSpPr>
-        <p:spPr>
-          <a:xfrm>
-            <a:off x="4566818" y="1828800"/>
-            <a:ext cx="457200" cy="457200"/>
-          </a:xfrm>
-          <a:prstGeom prst="ellipse">
-            <a:avLst/>
-          </a:prstGeom>
-          <a:solidFill>
-            <a:srgbClr val="F2B705"/>
-          </a:solidFill>
-          <a:ln>
-            <a:noFill/>
-          </a:ln>
-          <a:effectLst/>
-        </p:spPr>
-        <p:style>
-          <a:lnRef idx="1">
-            <a:schemeClr val="accent1"/>
-          </a:lnRef>
-          <a:fillRef idx="3">
-            <a:schemeClr val="accent1"/>
-          </a:fillRef>
-          <a:effectRef idx="2">
-            <a:schemeClr val="accent1"/>
-          </a:effectRef>
-          <a:fontRef idx="minor">
-            <a:schemeClr val="lt1"/>
-          </a:fontRef>
-        </p:style>
-        <p:txBody>
-          <a:bodyPr rtlCol="0" anchor="ctr" lIns="0" rIns="0" tIns="0" bIns="0"/>
-          <a:lstStyle/>
-          <a:p>
-            <a:pPr algn="ctr"/>
-            <a:r>
-              <a:rPr sz="1500" b="1">
-                <a:solidFill>
-                  <a:srgbClr val="202122"/>
-                </a:solidFill>
-                <a:latin typeface="Calibri"/>
-              </a:rPr>
-              <a:t>2</a:t>
-            </a:r>
-          </a:p>
-        </p:txBody>
-      </p:sp>
-      <p:sp>
-        <p:nvSpPr>
-          <p:cNvPr id="12" name="TextBox 11"/>
-          <p:cNvSpPr txBox="1"/>
-          <p:nvPr/>
-        </p:nvSpPr>
-        <p:spPr>
-          <a:xfrm>
-            <a:off x="5161178" y="1801368"/>
-            <a:ext cx="2509418" cy="512064"/>
-          </a:xfrm>
-          <a:prstGeom prst="rect">
-            <a:avLst/>
-          </a:prstGeom>
-          <a:noFill/>
-        </p:spPr>
-        <p:txBody>
-          <a:bodyPr wrap="square" anchor="ctr" lIns="0" rIns="0" tIns="0" bIns="0"/>
-          <a:lstStyle/>
-          <a:p>
-            <a:pPr algn="l"/>
-            <a:r>
-              <a:rPr sz="1900" b="1" i="0">
-                <a:solidFill>
-                  <a:srgbClr val="03306E"/>
-                </a:solidFill>
-                <a:latin typeface="Calibri"/>
-              </a:rPr>
-              <a:t>Blockchain</a:t>
-            </a:r>
-          </a:p>
-        </p:txBody>
-      </p:sp>
-      <p:sp>
-        <p:nvSpPr>
-          <p:cNvPr id="13" name="TextBox 12"/>
-          <p:cNvSpPr txBox="1"/>
-          <p:nvPr/>
-        </p:nvSpPr>
-        <p:spPr>
-          <a:xfrm>
-            <a:off x="4566818" y="2468880"/>
-            <a:ext cx="3058058" cy="1143000"/>
-          </a:xfrm>
-          <a:prstGeom prst="rect">
-            <a:avLst/>
-          </a:prstGeom>
-          <a:noFill/>
-        </p:spPr>
-        <p:txBody>
-          <a:bodyPr wrap="square" anchor="t" lIns="0" rIns="0" tIns="0" bIns="0"/>
-          <a:lstStyle/>
-          <a:p>
-            <a:pPr algn="l"/>
-            <a:r>
-              <a:rPr sz="2000" b="0" i="0">
-                <a:solidFill>
-                  <a:srgbClr val="202122"/>
-                </a:solidFill>
-                <a:latin typeface="Calibri"/>
-              </a:rPr>
-              <a:t>Tamper-resistant shared ledgers.</a:t>
-            </a:r>
-          </a:p>
-        </p:txBody>
-      </p:sp>
-      <p:sp>
-        <p:nvSpPr>
-          <p:cNvPr id="14" name="Rounded Rectangle 13"/>
-          <p:cNvSpPr/>
-          <p:nvPr/>
-        </p:nvSpPr>
-        <p:spPr>
-          <a:xfrm>
-            <a:off x="8127796" y="1600200"/>
-            <a:ext cx="3515258" cy="2148840"/>
-          </a:xfrm>
-          <a:prstGeom prst="roundRect">
-            <a:avLst>
-              <a:gd name="adj" fmla="val 6000"/>
-            </a:avLst>
-          </a:prstGeom>
-          <a:solidFill>
-            <a:srgbClr val="EAF3FF"/>
-          </a:solidFill>
-          <a:ln>
-            <a:noFill/>
-          </a:ln>
-          <a:effectLst/>
-        </p:spPr>
-        <p:style>
-          <a:lnRef idx="1">
-            <a:schemeClr val="accent1"/>
-          </a:lnRef>
-          <a:fillRef idx="3">
-            <a:schemeClr val="accent1"/>
-          </a:fillRef>
-          <a:effectRef idx="2">
-            <a:schemeClr val="accent1"/>
-          </a:effectRef>
-          <a:fontRef idx="minor">
-            <a:schemeClr val="lt1"/>
-          </a:fontRef>
-        </p:style>
-        <p:txBody>
-          <a:bodyPr rtlCol="0" anchor="ctr"/>
-          <a:lstStyle/>
-          <a:p/>
-        </p:txBody>
-      </p:sp>
-      <p:sp>
-        <p:nvSpPr>
-          <p:cNvPr id="15" name="Oval 14"/>
-          <p:cNvSpPr/>
-          <p:nvPr/>
-        </p:nvSpPr>
-        <p:spPr>
-          <a:xfrm>
-            <a:off x="8356396" y="1828800"/>
-            <a:ext cx="457200" cy="457200"/>
-          </a:xfrm>
-          <a:prstGeom prst="ellipse">
-            <a:avLst/>
-          </a:prstGeom>
-          <a:solidFill>
-            <a:srgbClr val="F2B705"/>
-          </a:solidFill>
-          <a:ln>
-            <a:noFill/>
-          </a:ln>
-          <a:effectLst/>
-        </p:spPr>
-        <p:style>
-          <a:lnRef idx="1">
-            <a:schemeClr val="accent1"/>
-          </a:lnRef>
-          <a:fillRef idx="3">
-            <a:schemeClr val="accent1"/>
-          </a:fillRef>
-          <a:effectRef idx="2">
-            <a:schemeClr val="accent1"/>
-          </a:effectRef>
-          <a:fontRef idx="minor">
-            <a:schemeClr val="lt1"/>
-          </a:fontRef>
-        </p:style>
-        <p:txBody>
-          <a:bodyPr rtlCol="0" anchor="ctr" lIns="0" rIns="0" tIns="0" bIns="0"/>
-          <a:lstStyle/>
-          <a:p>
-            <a:pPr algn="ctr"/>
-            <a:r>
-              <a:rPr sz="1500" b="1">
-                <a:solidFill>
-                  <a:srgbClr val="202122"/>
-                </a:solidFill>
-                <a:latin typeface="Calibri"/>
-              </a:rPr>
-              <a:t>3</a:t>
-            </a:r>
-          </a:p>
-        </p:txBody>
-      </p:sp>
-      <p:sp>
-        <p:nvSpPr>
-          <p:cNvPr id="16" name="TextBox 15"/>
-          <p:cNvSpPr txBox="1"/>
-          <p:nvPr/>
-        </p:nvSpPr>
-        <p:spPr>
-          <a:xfrm>
-            <a:off x="8950756" y="1801368"/>
-            <a:ext cx="2509418" cy="512064"/>
-          </a:xfrm>
-          <a:prstGeom prst="rect">
-            <a:avLst/>
-          </a:prstGeom>
-          <a:noFill/>
-        </p:spPr>
-        <p:txBody>
-          <a:bodyPr wrap="square" anchor="ctr" lIns="0" rIns="0" tIns="0" bIns="0"/>
-          <a:lstStyle/>
-          <a:p>
-            <a:pPr algn="l"/>
-            <a:r>
-              <a:rPr sz="1600" b="1" i="0">
-                <a:solidFill>
-                  <a:srgbClr val="03306E"/>
-                </a:solidFill>
-                <a:latin typeface="Calibri"/>
-              </a:rPr>
-              <a:t>3D printing and drones</a:t>
-            </a:r>
-          </a:p>
-        </p:txBody>
-      </p:sp>
-      <p:sp>
-        <p:nvSpPr>
-          <p:cNvPr id="17" name="TextBox 16"/>
-          <p:cNvSpPr txBox="1"/>
-          <p:nvPr/>
-        </p:nvSpPr>
-        <p:spPr>
-          <a:xfrm>
-            <a:off x="8356396" y="2468880"/>
-            <a:ext cx="3058058" cy="1143000"/>
-          </a:xfrm>
-          <a:prstGeom prst="rect">
-            <a:avLst/>
-          </a:prstGeom>
-          <a:noFill/>
-        </p:spPr>
-        <p:txBody>
-          <a:bodyPr wrap="square" anchor="t" lIns="0" rIns="0" tIns="0" bIns="0"/>
-          <a:lstStyle/>
-          <a:p>
-            <a:pPr algn="l"/>
-            <a:r>
-              <a:rPr sz="2000" b="0" i="0">
-                <a:solidFill>
-                  <a:srgbClr val="202122"/>
-                </a:solidFill>
-                <a:latin typeface="Calibri"/>
-              </a:rPr>
-              <a:t>New ways to make and deliver things.</a:t>
-            </a:r>
-          </a:p>
-        </p:txBody>
-      </p:sp>
-      <p:sp>
-        <p:nvSpPr>
-          <p:cNvPr id="18" name="Rounded Rectangle 17"/>
-          <p:cNvSpPr/>
-          <p:nvPr/>
-        </p:nvSpPr>
-        <p:spPr>
-          <a:xfrm>
-            <a:off x="548640" y="4023360"/>
-            <a:ext cx="3515258" cy="2148840"/>
-          </a:xfrm>
-          <a:prstGeom prst="roundRect">
-            <a:avLst>
-              <a:gd name="adj" fmla="val 6000"/>
-            </a:avLst>
-          </a:prstGeom>
-          <a:solidFill>
-            <a:srgbClr val="EAF3FF"/>
-          </a:solidFill>
-          <a:ln>
-            <a:noFill/>
-          </a:ln>
-          <a:effectLst/>
-        </p:spPr>
-        <p:style>
-          <a:lnRef idx="1">
-            <a:schemeClr val="accent1"/>
-          </a:lnRef>
-          <a:fillRef idx="3">
-            <a:schemeClr val="accent1"/>
-          </a:fillRef>
-          <a:effectRef idx="2">
-            <a:schemeClr val="accent1"/>
-          </a:effectRef>
-          <a:fontRef idx="minor">
-            <a:schemeClr val="lt1"/>
-          </a:fontRef>
-        </p:style>
-        <p:txBody>
-          <a:bodyPr rtlCol="0" anchor="ctr"/>
-          <a:lstStyle/>
-          <a:p/>
-        </p:txBody>
-      </p:sp>
-      <p:sp>
-        <p:nvSpPr>
-          <p:cNvPr id="19" name="Oval 18"/>
-          <p:cNvSpPr/>
-          <p:nvPr/>
-        </p:nvSpPr>
-        <p:spPr>
-          <a:xfrm>
-            <a:off x="777240" y="4251960"/>
-            <a:ext cx="457200" cy="457200"/>
-          </a:xfrm>
-          <a:prstGeom prst="ellipse">
-            <a:avLst/>
-          </a:prstGeom>
-          <a:solidFill>
-            <a:srgbClr val="F2B705"/>
-          </a:solidFill>
-          <a:ln>
-            <a:noFill/>
-          </a:ln>
-          <a:effectLst/>
-        </p:spPr>
-        <p:style>
-          <a:lnRef idx="1">
-            <a:schemeClr val="accent1"/>
-          </a:lnRef>
-          <a:fillRef idx="3">
-            <a:schemeClr val="accent1"/>
-          </a:fillRef>
-          <a:effectRef idx="2">
-            <a:schemeClr val="accent1"/>
-          </a:effectRef>
-          <a:fontRef idx="minor">
-            <a:schemeClr val="lt1"/>
-          </a:fontRef>
-        </p:style>
-        <p:txBody>
-          <a:bodyPr rtlCol="0" anchor="ctr" lIns="0" rIns="0" tIns="0" bIns="0"/>
-          <a:lstStyle/>
-          <a:p>
-            <a:pPr algn="ctr"/>
-            <a:r>
-              <a:rPr sz="1500" b="1">
-                <a:solidFill>
-                  <a:srgbClr val="202122"/>
-                </a:solidFill>
-                <a:latin typeface="Calibri"/>
-              </a:rPr>
-              <a:t>4</a:t>
-            </a:r>
-          </a:p>
-        </p:txBody>
-      </p:sp>
-      <p:sp>
-        <p:nvSpPr>
-          <p:cNvPr id="20" name="TextBox 19"/>
-          <p:cNvSpPr txBox="1"/>
-          <p:nvPr/>
-        </p:nvSpPr>
-        <p:spPr>
-          <a:xfrm>
-            <a:off x="1371600" y="4224528"/>
-            <a:ext cx="2509418" cy="512064"/>
-          </a:xfrm>
-          <a:prstGeom prst="rect">
-            <a:avLst/>
-          </a:prstGeom>
-          <a:noFill/>
-        </p:spPr>
-        <p:txBody>
-          <a:bodyPr wrap="square" anchor="ctr" lIns="0" rIns="0" tIns="0" bIns="0"/>
-          <a:lstStyle/>
-          <a:p>
-            <a:pPr algn="l"/>
-            <a:r>
-              <a:rPr sz="1900" b="1" i="0">
-                <a:solidFill>
-                  <a:srgbClr val="03306E"/>
-                </a:solidFill>
-                <a:latin typeface="Calibri"/>
-              </a:rPr>
-              <a:t>Autonomous machines</a:t>
-            </a:r>
-          </a:p>
-        </p:txBody>
-      </p:sp>
-      <p:sp>
-        <p:nvSpPr>
-          <p:cNvPr id="21" name="TextBox 20"/>
-          <p:cNvSpPr txBox="1"/>
-          <p:nvPr/>
-        </p:nvSpPr>
-        <p:spPr>
-          <a:xfrm>
-            <a:off x="777240" y="4892040"/>
-            <a:ext cx="3058058" cy="1143000"/>
-          </a:xfrm>
-          <a:prstGeom prst="rect">
-            <a:avLst/>
-          </a:prstGeom>
-          <a:noFill/>
-        </p:spPr>
-        <p:txBody>
-          <a:bodyPr wrap="square" anchor="t" lIns="0" rIns="0" tIns="0" bIns="0"/>
-          <a:lstStyle/>
-          <a:p>
-            <a:pPr algn="l"/>
-            <a:r>
-              <a:rPr sz="2000" b="0" i="0">
-                <a:solidFill>
-                  <a:srgbClr val="202122"/>
-                </a:solidFill>
-                <a:latin typeface="Calibri"/>
-              </a:rPr>
-              <a:t>Self-driving cars and robotic assembly.</a:t>
-            </a:r>
-          </a:p>
-        </p:txBody>
-      </p:sp>
-      <p:sp>
-        <p:nvSpPr>
-          <p:cNvPr id="22" name="Rounded Rectangle 21"/>
-          <p:cNvSpPr/>
-          <p:nvPr/>
-        </p:nvSpPr>
-        <p:spPr>
-          <a:xfrm>
-            <a:off x="4338218" y="4023360"/>
-            <a:ext cx="3515258" cy="2148840"/>
-          </a:xfrm>
-          <a:prstGeom prst="roundRect">
-            <a:avLst>
-              <a:gd name="adj" fmla="val 6000"/>
-            </a:avLst>
-          </a:prstGeom>
-          <a:solidFill>
-            <a:srgbClr val="EAF3FF"/>
-          </a:solidFill>
-          <a:ln>
-            <a:noFill/>
-          </a:ln>
-          <a:effectLst/>
-        </p:spPr>
-        <p:style>
-          <a:lnRef idx="1">
-            <a:schemeClr val="accent1"/>
-          </a:lnRef>
-          <a:fillRef idx="3">
-            <a:schemeClr val="accent1"/>
-          </a:fillRef>
-          <a:effectRef idx="2">
-            <a:schemeClr val="accent1"/>
-          </a:effectRef>
-          <a:fontRef idx="minor">
-            <a:schemeClr val="lt1"/>
-          </a:fontRef>
-        </p:style>
-        <p:txBody>
-          <a:bodyPr rtlCol="0" anchor="ctr"/>
-          <a:lstStyle/>
-          <a:p/>
-        </p:txBody>
-      </p:sp>
-      <p:sp>
-        <p:nvSpPr>
-          <p:cNvPr id="23" name="Oval 22"/>
-          <p:cNvSpPr/>
-          <p:nvPr/>
-        </p:nvSpPr>
-        <p:spPr>
-          <a:xfrm>
-            <a:off x="4566818" y="4251960"/>
-            <a:ext cx="457200" cy="457200"/>
-          </a:xfrm>
-          <a:prstGeom prst="ellipse">
-            <a:avLst/>
-          </a:prstGeom>
-          <a:solidFill>
-            <a:srgbClr val="F2B705"/>
-          </a:solidFill>
-          <a:ln>
-            <a:noFill/>
-          </a:ln>
-          <a:effectLst/>
-        </p:spPr>
-        <p:style>
-          <a:lnRef idx="1">
-            <a:schemeClr val="accent1"/>
-          </a:lnRef>
-          <a:fillRef idx="3">
-            <a:schemeClr val="accent1"/>
-          </a:fillRef>
-          <a:effectRef idx="2">
-            <a:schemeClr val="accent1"/>
-          </a:effectRef>
-          <a:fontRef idx="minor">
-            <a:schemeClr val="lt1"/>
-          </a:fontRef>
-        </p:style>
-        <p:txBody>
-          <a:bodyPr rtlCol="0" anchor="ctr" lIns="0" rIns="0" tIns="0" bIns="0"/>
-          <a:lstStyle/>
-          <a:p>
-            <a:pPr algn="ctr"/>
-            <a:r>
-              <a:rPr sz="1500" b="1">
-                <a:solidFill>
-                  <a:srgbClr val="202122"/>
-                </a:solidFill>
-                <a:latin typeface="Calibri"/>
-              </a:rPr>
-              <a:t>5</a:t>
-            </a:r>
-          </a:p>
-        </p:txBody>
-      </p:sp>
-      <p:sp>
-        <p:nvSpPr>
-          <p:cNvPr id="24" name="TextBox 23"/>
-          <p:cNvSpPr txBox="1"/>
-          <p:nvPr/>
-        </p:nvSpPr>
-        <p:spPr>
-          <a:xfrm>
-            <a:off x="5161178" y="4224528"/>
-            <a:ext cx="2509418" cy="512064"/>
-          </a:xfrm>
-          <a:prstGeom prst="rect">
-            <a:avLst/>
-          </a:prstGeom>
-          <a:noFill/>
-        </p:spPr>
-        <p:txBody>
-          <a:bodyPr wrap="square" anchor="ctr" lIns="0" rIns="0" tIns="0" bIns="0"/>
-          <a:lstStyle/>
-          <a:p>
-            <a:pPr algn="l"/>
-            <a:r>
-              <a:rPr sz="1800" b="1" i="0">
-                <a:solidFill>
-                  <a:srgbClr val="03306E"/>
-                </a:solidFill>
-                <a:latin typeface="Calibri"/>
-              </a:rPr>
-              <a:t>Environmental impact</a:t>
-            </a:r>
-          </a:p>
-        </p:txBody>
-      </p:sp>
-      <p:sp>
-        <p:nvSpPr>
-          <p:cNvPr id="25" name="TextBox 24"/>
-          <p:cNvSpPr txBox="1"/>
-          <p:nvPr/>
-        </p:nvSpPr>
-        <p:spPr>
-          <a:xfrm>
-            <a:off x="4566818" y="4892040"/>
-            <a:ext cx="3058058" cy="1143000"/>
-          </a:xfrm>
-          <a:prstGeom prst="rect">
-            <a:avLst/>
-          </a:prstGeom>
-          <a:noFill/>
-        </p:spPr>
-        <p:txBody>
-          <a:bodyPr wrap="square" anchor="t" lIns="0" rIns="0" tIns="0" bIns="0"/>
-          <a:lstStyle/>
-          <a:p>
-            <a:pPr algn="l"/>
-            <a:r>
-              <a:rPr sz="2000" b="0" i="0">
-                <a:solidFill>
-                  <a:srgbClr val="202122"/>
-                </a:solidFill>
-                <a:latin typeface="Calibri"/>
-              </a:rPr>
-              <a:t>Rare metals, energy use and disposal.</a:t>
+              <a:rPr sz="1900" b="0" i="0">
+                <a:solidFill>
+                  <a:srgbClr val="FFFFFF"/>
+                </a:solidFill>
+                <a:latin typeface="Cambria"/>
+              </a:rPr>
+              <a:t>A council moves applications online. Offering a phone line, large-text options and screen-reader-friendly forms keeps it inclusive.</a:t>
             </a:r>
           </a:p>
         </p:txBody>
@@ -8107,7 +12400,7 @@
                 </a:solidFill>
                 <a:latin typeface="Cambria"/>
               </a:rPr>
-              <a:t>Check your understanding</a:t>
+              <a:t>Digital inclusion</a:t>
             </a:r>
           </a:p>
         </p:txBody>
@@ -8180,14 +12473,186 @@
       </p:sp>
       <p:sp>
         <p:nvSpPr>
-          <p:cNvPr id="6" name="Oval 5"/>
+          <p:cNvPr id="6" name="TextBox 5"/>
+          <p:cNvSpPr txBox="1"/>
+          <p:nvPr/>
+        </p:nvSpPr>
+        <p:spPr>
+          <a:xfrm>
+            <a:off x="548640" y="1600200"/>
+            <a:ext cx="6675120" cy="4572000"/>
+          </a:xfrm>
+          <a:prstGeom prst="rect">
+            <a:avLst/>
+          </a:prstGeom>
+          <a:noFill/>
+        </p:spPr>
+        <p:txBody>
+          <a:bodyPr wrap="square" lIns="0" rIns="0" tIns="0" bIns="0">
+            <a:spAutoFit/>
+          </a:bodyPr>
+          <a:lstStyle/>
+          <a:p>
+            <a:pPr marL="274320" indent="-274320">
+              <a:spcAft>
+                <a:spcPts val="1080"/>
+              </a:spcAft>
+              <a:buClr>
+                <a:srgbClr val="0645AD"/>
+              </a:buClr>
+              <a:buFont typeface="Arial"/>
+              <a:buChar char="•"/>
+            </a:pPr>
+            <a:r>
+              <a:rPr sz="2400" b="0">
+                <a:solidFill>
+                  <a:srgbClr val="202122"/>
+                </a:solidFill>
+                <a:latin typeface="Calibri"/>
+              </a:rPr>
+              <a:t>Fair access needs suitable hardware, software and connectivity.</a:t>
+            </a:r>
+          </a:p>
+          <a:p>
+            <a:pPr marL="274320" indent="-274320">
+              <a:spcAft>
+                <a:spcPts val="1080"/>
+              </a:spcAft>
+              <a:buClr>
+                <a:srgbClr val="0645AD"/>
+              </a:buClr>
+              <a:buFont typeface="Arial"/>
+              <a:buChar char="•"/>
+            </a:pPr>
+            <a:r>
+              <a:rPr sz="2400" b="0">
+                <a:solidFill>
+                  <a:srgbClr val="202122"/>
+                </a:solidFill>
+                <a:latin typeface="Calibri"/>
+              </a:rPr>
+              <a:t>Follow best-practice codes and public sector accessibility regulations.</a:t>
+            </a:r>
+          </a:p>
+          <a:p>
+            <a:pPr marL="274320" indent="-274320">
+              <a:spcAft>
+                <a:spcPts val="1080"/>
+              </a:spcAft>
+              <a:buClr>
+                <a:srgbClr val="0645AD"/>
+              </a:buClr>
+              <a:buFont typeface="Arial"/>
+              <a:buChar char="•"/>
+            </a:pPr>
+            <a:r>
+              <a:rPr sz="2400" b="0">
+                <a:solidFill>
+                  <a:srgbClr val="202122"/>
+                </a:solidFill>
+                <a:latin typeface="Calibri"/>
+              </a:rPr>
+              <a:t>Consider age, digital and literacy skills, internal or external audience.</a:t>
+            </a:r>
+          </a:p>
+          <a:p>
+            <a:pPr marL="274320" indent="-274320">
+              <a:spcAft>
+                <a:spcPts val="1080"/>
+              </a:spcAft>
+              <a:buClr>
+                <a:srgbClr val="0645AD"/>
+              </a:buClr>
+              <a:buFont typeface="Arial"/>
+              <a:buChar char="•"/>
+            </a:pPr>
+            <a:r>
+              <a:rPr sz="2400" b="0">
+                <a:solidFill>
+                  <a:srgbClr val="202122"/>
+                </a:solidFill>
+                <a:latin typeface="Calibri"/>
+              </a:rPr>
+              <a:t>Consider cultural issues, including bias built into digital systems.</a:t>
+            </a:r>
+          </a:p>
+          <a:p>
+            <a:pPr marL="274320" indent="-274320">
+              <a:spcAft>
+                <a:spcPts val="1080"/>
+              </a:spcAft>
+              <a:buClr>
+                <a:srgbClr val="0645AD"/>
+              </a:buClr>
+              <a:buFont typeface="Arial"/>
+              <a:buChar char="•"/>
+            </a:pPr>
+            <a:r>
+              <a:rPr sz="2400" b="0">
+                <a:solidFill>
+                  <a:srgbClr val="202122"/>
+                </a:solidFill>
+                <a:latin typeface="Calibri"/>
+              </a:rPr>
+              <a:t>Consider additional and accessibility needs.</a:t>
+            </a:r>
+          </a:p>
+        </p:txBody>
+      </p:sp>
+      <p:sp>
+        <p:nvSpPr>
+          <p:cNvPr id="7" name="Rounded Rectangle 6"/>
           <p:cNvSpPr/>
           <p:nvPr/>
         </p:nvSpPr>
         <p:spPr>
           <a:xfrm>
-            <a:off x="548640" y="1618488"/>
-            <a:ext cx="411480" cy="411480"/>
+            <a:off x="7772400" y="1600200"/>
+            <a:ext cx="3867912" cy="4434840"/>
+          </a:xfrm>
+          <a:prstGeom prst="roundRect">
+            <a:avLst>
+              <a:gd name="adj" fmla="val 8000"/>
+            </a:avLst>
+          </a:prstGeom>
+          <a:solidFill>
+            <a:srgbClr val="03306E"/>
+          </a:solidFill>
+          <a:ln>
+            <a:noFill/>
+          </a:ln>
+          <a:effectLst/>
+        </p:spPr>
+        <p:style>
+          <a:lnRef idx="1">
+            <a:schemeClr val="accent1"/>
+          </a:lnRef>
+          <a:fillRef idx="3">
+            <a:schemeClr val="accent1"/>
+          </a:fillRef>
+          <a:effectRef idx="2">
+            <a:schemeClr val="accent1"/>
+          </a:effectRef>
+          <a:fontRef idx="minor">
+            <a:schemeClr val="lt1"/>
+          </a:fontRef>
+        </p:style>
+        <p:txBody>
+          <a:bodyPr rtlCol="0" anchor="ctr"/>
+          <a:lstStyle/>
+          <a:p/>
+        </p:txBody>
+      </p:sp>
+      <p:sp>
+        <p:nvSpPr>
+          <p:cNvPr id="8" name="Oval 7"/>
+          <p:cNvSpPr/>
+          <p:nvPr/>
+        </p:nvSpPr>
+        <p:spPr>
+          <a:xfrm>
+            <a:off x="8046720" y="1874519"/>
+            <a:ext cx="548640" cy="548640"/>
           </a:xfrm>
           <a:prstGeom prst="ellipse">
             <a:avLst/>
@@ -8220,27 +12685,27 @@
           <a:p>
             <a:pPr algn="ctr"/>
             <a:r>
-              <a:rPr sz="1400" b="1">
+              <a:rPr sz="2000" b="1">
                 <a:solidFill>
                   <a:srgbClr val="202122"/>
                 </a:solidFill>
                 <a:latin typeface="Calibri"/>
               </a:rPr>
-              <a:t>1</a:t>
-            </a:r>
-          </a:p>
-        </p:txBody>
-      </p:sp>
-      <p:sp>
-        <p:nvSpPr>
-          <p:cNvPr id="7" name="TextBox 6"/>
-          <p:cNvSpPr txBox="1"/>
-          <p:nvPr/>
-        </p:nvSpPr>
-        <p:spPr>
-          <a:xfrm>
-            <a:off x="1234440" y="1600200"/>
-            <a:ext cx="10408615" cy="1030986"/>
+              <a:t>!</a:t>
+            </a:r>
+          </a:p>
+        </p:txBody>
+      </p:sp>
+      <p:sp>
+        <p:nvSpPr>
+          <p:cNvPr id="9" name="TextBox 8"/>
+          <p:cNvSpPr txBox="1"/>
+          <p:nvPr/>
+        </p:nvSpPr>
+        <p:spPr>
+          <a:xfrm>
+            <a:off x="8046720" y="2606040"/>
+            <a:ext cx="3291840" cy="365760"/>
           </a:xfrm>
           <a:prstGeom prst="rect">
             <a:avLst/>
@@ -8253,271 +12718,46 @@
           <a:p>
             <a:pPr algn="l"/>
             <a:r>
+              <a:rPr sz="1300" b="1" i="0">
+                <a:solidFill>
+                  <a:srgbClr val="A9C8F0"/>
+                </a:solidFill>
+                <a:latin typeface="Calibri"/>
+              </a:rPr>
+              <a:t>KEY IDEA</a:t>
+            </a:r>
+          </a:p>
+        </p:txBody>
+      </p:sp>
+      <p:sp>
+        <p:nvSpPr>
+          <p:cNvPr id="10" name="TextBox 9"/>
+          <p:cNvSpPr txBox="1"/>
+          <p:nvPr/>
+        </p:nvSpPr>
+        <p:spPr>
+          <a:xfrm>
+            <a:off x="8046720" y="3017520"/>
+            <a:ext cx="3291840" cy="2926080"/>
+          </a:xfrm>
+          <a:prstGeom prst="rect">
+            <a:avLst/>
+          </a:prstGeom>
+          <a:noFill/>
+        </p:spPr>
+        <p:txBody>
+          <a:bodyPr wrap="square" anchor="t" lIns="0" rIns="0" tIns="0" bIns="0"/>
+          <a:lstStyle/>
+          <a:p>
+            <a:pPr algn="l"/>
+            <a:r>
               <a:rPr sz="2200" b="0" i="0">
                 <a:solidFill>
-                  <a:srgbClr val="202122"/>
-                </a:solidFill>
-                <a:latin typeface="Calibri"/>
-              </a:rPr>
-              <a:t>Give two ways digital technology has changed organisational culture.</a:t>
-            </a:r>
-          </a:p>
-        </p:txBody>
-      </p:sp>
-      <p:sp>
-        <p:nvSpPr>
-          <p:cNvPr id="8" name="Oval 7"/>
-          <p:cNvSpPr/>
-          <p:nvPr/>
-        </p:nvSpPr>
-        <p:spPr>
-          <a:xfrm>
-            <a:off x="548640" y="2814066"/>
-            <a:ext cx="411480" cy="411480"/>
-          </a:xfrm>
-          <a:prstGeom prst="ellipse">
-            <a:avLst/>
-          </a:prstGeom>
-          <a:solidFill>
-            <a:srgbClr val="F2B705"/>
-          </a:solidFill>
-          <a:ln>
-            <a:noFill/>
-          </a:ln>
-          <a:effectLst/>
-        </p:spPr>
-        <p:style>
-          <a:lnRef idx="1">
-            <a:schemeClr val="accent1"/>
-          </a:lnRef>
-          <a:fillRef idx="3">
-            <a:schemeClr val="accent1"/>
-          </a:fillRef>
-          <a:effectRef idx="2">
-            <a:schemeClr val="accent1"/>
-          </a:effectRef>
-          <a:fontRef idx="minor">
-            <a:schemeClr val="lt1"/>
-          </a:fontRef>
-        </p:style>
-        <p:txBody>
-          <a:bodyPr rtlCol="0" anchor="ctr" lIns="0" rIns="0" tIns="0" bIns="0"/>
-          <a:lstStyle/>
-          <a:p>
-            <a:pPr algn="ctr"/>
-            <a:r>
-              <a:rPr sz="1400" b="1">
-                <a:solidFill>
-                  <a:srgbClr val="202122"/>
-                </a:solidFill>
-                <a:latin typeface="Calibri"/>
-              </a:rPr>
-              <a:t>2</a:t>
-            </a:r>
-          </a:p>
-        </p:txBody>
-      </p:sp>
-      <p:sp>
-        <p:nvSpPr>
-          <p:cNvPr id="9" name="TextBox 8"/>
-          <p:cNvSpPr txBox="1"/>
-          <p:nvPr/>
-        </p:nvSpPr>
-        <p:spPr>
-          <a:xfrm>
-            <a:off x="1234440" y="2795778"/>
-            <a:ext cx="10408615" cy="1030986"/>
-          </a:xfrm>
-          <a:prstGeom prst="rect">
-            <a:avLst/>
-          </a:prstGeom>
-          <a:noFill/>
-        </p:spPr>
-        <p:txBody>
-          <a:bodyPr wrap="square" anchor="t" lIns="0" rIns="0" tIns="0" bIns="0"/>
-          <a:lstStyle/>
-          <a:p>
-            <a:pPr algn="l"/>
-            <a:r>
-              <a:rPr sz="2200" b="0" i="0">
-                <a:solidFill>
-                  <a:srgbClr val="202122"/>
-                </a:solidFill>
-                <a:latin typeface="Calibri"/>
-              </a:rPr>
-              <a:t>What is digital isolation?</a:t>
-            </a:r>
-          </a:p>
-        </p:txBody>
-      </p:sp>
-      <p:sp>
-        <p:nvSpPr>
-          <p:cNvPr id="10" name="Oval 9"/>
-          <p:cNvSpPr/>
-          <p:nvPr/>
-        </p:nvSpPr>
-        <p:spPr>
-          <a:xfrm>
-            <a:off x="548640" y="4009644"/>
-            <a:ext cx="411480" cy="411480"/>
-          </a:xfrm>
-          <a:prstGeom prst="ellipse">
-            <a:avLst/>
-          </a:prstGeom>
-          <a:solidFill>
-            <a:srgbClr val="F2B705"/>
-          </a:solidFill>
-          <a:ln>
-            <a:noFill/>
-          </a:ln>
-          <a:effectLst/>
-        </p:spPr>
-        <p:style>
-          <a:lnRef idx="1">
-            <a:schemeClr val="accent1"/>
-          </a:lnRef>
-          <a:fillRef idx="3">
-            <a:schemeClr val="accent1"/>
-          </a:fillRef>
-          <a:effectRef idx="2">
-            <a:schemeClr val="accent1"/>
-          </a:effectRef>
-          <a:fontRef idx="minor">
-            <a:schemeClr val="lt1"/>
-          </a:fontRef>
-        </p:style>
-        <p:txBody>
-          <a:bodyPr rtlCol="0" anchor="ctr" lIns="0" rIns="0" tIns="0" bIns="0"/>
-          <a:lstStyle/>
-          <a:p>
-            <a:pPr algn="ctr"/>
-            <a:r>
-              <a:rPr sz="1400" b="1">
-                <a:solidFill>
-                  <a:srgbClr val="202122"/>
-                </a:solidFill>
-                <a:latin typeface="Calibri"/>
-              </a:rPr>
-              <a:t>3</a:t>
-            </a:r>
-          </a:p>
-        </p:txBody>
-      </p:sp>
-      <p:sp>
-        <p:nvSpPr>
-          <p:cNvPr id="11" name="TextBox 10"/>
-          <p:cNvSpPr txBox="1"/>
-          <p:nvPr/>
-        </p:nvSpPr>
-        <p:spPr>
-          <a:xfrm>
-            <a:off x="1234440" y="3991356"/>
-            <a:ext cx="10408615" cy="1030986"/>
-          </a:xfrm>
-          <a:prstGeom prst="rect">
-            <a:avLst/>
-          </a:prstGeom>
-          <a:noFill/>
-        </p:spPr>
-        <p:txBody>
-          <a:bodyPr wrap="square" anchor="t" lIns="0" rIns="0" tIns="0" bIns="0"/>
-          <a:lstStyle/>
-          <a:p>
-            <a:pPr algn="l"/>
-            <a:r>
-              <a:rPr sz="2200" b="0" i="0">
-                <a:solidFill>
-                  <a:srgbClr val="202122"/>
-                </a:solidFill>
-                <a:latin typeface="Calibri"/>
-              </a:rPr>
-              <a:t>What is edge computing?</a:t>
-            </a:r>
-          </a:p>
-        </p:txBody>
-      </p:sp>
-      <p:sp>
-        <p:nvSpPr>
-          <p:cNvPr id="12" name="Oval 11"/>
-          <p:cNvSpPr/>
-          <p:nvPr/>
-        </p:nvSpPr>
-        <p:spPr>
-          <a:xfrm>
-            <a:off x="548640" y="5205221"/>
-            <a:ext cx="411480" cy="411480"/>
-          </a:xfrm>
-          <a:prstGeom prst="ellipse">
-            <a:avLst/>
-          </a:prstGeom>
-          <a:solidFill>
-            <a:srgbClr val="F2B705"/>
-          </a:solidFill>
-          <a:ln>
-            <a:noFill/>
-          </a:ln>
-          <a:effectLst/>
-        </p:spPr>
-        <p:style>
-          <a:lnRef idx="1">
-            <a:schemeClr val="accent1"/>
-          </a:lnRef>
-          <a:fillRef idx="3">
-            <a:schemeClr val="accent1"/>
-          </a:fillRef>
-          <a:effectRef idx="2">
-            <a:schemeClr val="accent1"/>
-          </a:effectRef>
-          <a:fontRef idx="minor">
-            <a:schemeClr val="lt1"/>
-          </a:fontRef>
-        </p:style>
-        <p:txBody>
-          <a:bodyPr rtlCol="0" anchor="ctr" lIns="0" rIns="0" tIns="0" bIns="0"/>
-          <a:lstStyle/>
-          <a:p>
-            <a:pPr algn="ctr"/>
-            <a:r>
-              <a:rPr sz="1400" b="1">
-                <a:solidFill>
-                  <a:srgbClr val="202122"/>
-                </a:solidFill>
-                <a:latin typeface="Calibri"/>
-              </a:rPr>
-              <a:t>4</a:t>
-            </a:r>
-          </a:p>
-        </p:txBody>
-      </p:sp>
-      <p:sp>
-        <p:nvSpPr>
-          <p:cNvPr id="13" name="TextBox 12"/>
-          <p:cNvSpPr txBox="1"/>
-          <p:nvPr/>
-        </p:nvSpPr>
-        <p:spPr>
-          <a:xfrm>
-            <a:off x="1234440" y="5186933"/>
-            <a:ext cx="10408615" cy="1030986"/>
-          </a:xfrm>
-          <a:prstGeom prst="rect">
-            <a:avLst/>
-          </a:prstGeom>
-          <a:noFill/>
-        </p:spPr>
-        <p:txBody>
-          <a:bodyPr wrap="square" anchor="t" lIns="0" rIns="0" tIns="0" bIns="0"/>
-          <a:lstStyle/>
-          <a:p>
-            <a:pPr algn="l"/>
-            <a:r>
-              <a:rPr sz="2200" b="0" i="0">
-                <a:solidFill>
-                  <a:srgbClr val="202122"/>
-                </a:solidFill>
-                <a:latin typeface="Calibri"/>
-              </a:rPr>
-              <a:t>Give one environmental impact of emerging technology.</a:t>
+                  <a:srgbClr val="FFFFFF"/>
+                </a:solidFill>
+                <a:latin typeface="Cambria"/>
+              </a:rPr>
+              <a:t>Professional development keeps you competent, employable and up to date with standards as technology changes.</a:t>
             </a:r>
           </a:p>
         </p:txBody>
@@ -8609,7 +12849,7 @@
                 </a:solidFill>
                 <a:latin typeface="Cambria"/>
               </a:rPr>
-              <a:t>Answers</a:t>
+              <a:t>Quick check: Digital inclusion</a:t>
             </a:r>
           </a:p>
         </p:txBody>
@@ -8688,8 +12928,8 @@
         </p:nvSpPr>
         <p:spPr>
           <a:xfrm>
-            <a:off x="548640" y="1618488"/>
-            <a:ext cx="411480" cy="411480"/>
+            <a:off x="548640" y="1691640"/>
+            <a:ext cx="502920" cy="502920"/>
           </a:xfrm>
           <a:prstGeom prst="ellipse">
             <a:avLst/>
@@ -8722,7 +12962,7 @@
           <a:p>
             <a:pPr algn="ctr"/>
             <a:r>
-              <a:rPr sz="1400" b="1">
+              <a:rPr sz="1600" b="1">
                 <a:solidFill>
                   <a:srgbClr val="202122"/>
                 </a:solidFill>
@@ -8741,8 +12981,8 @@
         </p:nvSpPr>
         <p:spPr>
           <a:xfrm>
-            <a:off x="1234440" y="1600200"/>
-            <a:ext cx="10408615" cy="1030986"/>
+            <a:off x="1371600" y="1645920"/>
+            <a:ext cx="10271455" cy="1188720"/>
           </a:xfrm>
           <a:prstGeom prst="rect">
             <a:avLst/>
@@ -8755,24 +12995,13 @@
           <a:p>
             <a:pPr algn="l"/>
             <a:r>
-              <a:rPr sz="1800" b="0" i="0">
-                <a:solidFill>
-                  <a:srgbClr val="54595D"/>
-                </a:solidFill>
-                <a:latin typeface="Calibri"/>
-              </a:rPr>
-              <a:t>Give two ways digital technology has changed organisational culture.</a:t>
-            </a:r>
-          </a:p>
-          <a:p>
-            <a:r>
-              <a:rPr sz="1800" b="1">
-                <a:solidFill>
-                  <a:srgbClr val="03306E"/>
-                </a:solidFill>
-                <a:latin typeface="Calibri"/>
-              </a:rPr>
-              <a:t>Any two, e.g. remote working, staff monitoring, automation.</a:t>
+              <a:rPr sz="2400" b="0" i="0">
+                <a:solidFill>
+                  <a:srgbClr val="202122"/>
+                </a:solidFill>
+                <a:latin typeface="Calibri"/>
+              </a:rPr>
+              <a:t>What does digital inclusion mean?</a:t>
             </a:r>
           </a:p>
         </p:txBody>
@@ -8785,8 +13014,8 @@
         </p:nvSpPr>
         <p:spPr>
           <a:xfrm>
-            <a:off x="548640" y="2814066"/>
-            <a:ext cx="411480" cy="411480"/>
+            <a:off x="548640" y="3108960"/>
+            <a:ext cx="502920" cy="502920"/>
           </a:xfrm>
           <a:prstGeom prst="ellipse">
             <a:avLst/>
@@ -8819,7 +13048,7 @@
           <a:p>
             <a:pPr algn="ctr"/>
             <a:r>
-              <a:rPr sz="1400" b="1">
+              <a:rPr sz="1600" b="1">
                 <a:solidFill>
                   <a:srgbClr val="202122"/>
                 </a:solidFill>
@@ -8838,8 +13067,8 @@
         </p:nvSpPr>
         <p:spPr>
           <a:xfrm>
-            <a:off x="1234440" y="2795778"/>
-            <a:ext cx="10408615" cy="1030986"/>
+            <a:off x="1371600" y="3063240"/>
+            <a:ext cx="10271455" cy="1188720"/>
           </a:xfrm>
           <a:prstGeom prst="rect">
             <a:avLst/>
@@ -8852,24 +13081,13 @@
           <a:p>
             <a:pPr algn="l"/>
             <a:r>
-              <a:rPr sz="1800" b="0" i="0">
-                <a:solidFill>
-                  <a:srgbClr val="54595D"/>
-                </a:solidFill>
-                <a:latin typeface="Calibri"/>
-              </a:rPr>
-              <a:t>What is digital isolation?</a:t>
-            </a:r>
-          </a:p>
-          <a:p>
-            <a:r>
-              <a:rPr sz="1800" b="1">
-                <a:solidFill>
-                  <a:srgbClr val="03306E"/>
-                </a:solidFill>
-                <a:latin typeface="Calibri"/>
-              </a:rPr>
-              <a:t>Being left out because of a lack of skills, equipment, connectivity or resistance to change.</a:t>
+              <a:rPr sz="2400" b="0" i="0">
+                <a:solidFill>
+                  <a:srgbClr val="202122"/>
+                </a:solidFill>
+                <a:latin typeface="Calibri"/>
+              </a:rPr>
+              <a:t>Name two user characteristics that affect inclusion.</a:t>
             </a:r>
           </a:p>
         </p:txBody>
@@ -8882,8 +13100,8 @@
         </p:nvSpPr>
         <p:spPr>
           <a:xfrm>
-            <a:off x="548640" y="4009644"/>
-            <a:ext cx="411480" cy="411480"/>
+            <a:off x="548640" y="4526280"/>
+            <a:ext cx="502920" cy="502920"/>
           </a:xfrm>
           <a:prstGeom prst="ellipse">
             <a:avLst/>
@@ -8916,7 +13134,7 @@
           <a:p>
             <a:pPr algn="ctr"/>
             <a:r>
-              <a:rPr sz="1400" b="1">
+              <a:rPr sz="1600" b="1">
                 <a:solidFill>
                   <a:srgbClr val="202122"/>
                 </a:solidFill>
@@ -8935,8 +13153,8 @@
         </p:nvSpPr>
         <p:spPr>
           <a:xfrm>
-            <a:off x="1234440" y="3991356"/>
-            <a:ext cx="10408615" cy="1030986"/>
+            <a:off x="1371600" y="4480560"/>
+            <a:ext cx="10271455" cy="1188720"/>
           </a:xfrm>
           <a:prstGeom prst="rect">
             <a:avLst/>
@@ -8949,121 +13167,46 @@
           <a:p>
             <a:pPr algn="l"/>
             <a:r>
-              <a:rPr sz="1800" b="0" i="0">
+              <a:rPr sz="2400" b="0" i="0">
+                <a:solidFill>
+                  <a:srgbClr val="202122"/>
+                </a:solidFill>
+                <a:latin typeface="Calibri"/>
+              </a:rPr>
+              <a:t>Must public sector websites be accessible?</a:t>
+            </a:r>
+          </a:p>
+        </p:txBody>
+      </p:sp>
+      <p:sp>
+        <p:nvSpPr>
+          <p:cNvPr id="12" name="TextBox 11"/>
+          <p:cNvSpPr txBox="1"/>
+          <p:nvPr/>
+        </p:nvSpPr>
+        <p:spPr>
+          <a:xfrm>
+            <a:off x="548640" y="5852160"/>
+            <a:ext cx="11094415" cy="365760"/>
+          </a:xfrm>
+          <a:prstGeom prst="rect">
+            <a:avLst/>
+          </a:prstGeom>
+          <a:noFill/>
+        </p:spPr>
+        <p:txBody>
+          <a:bodyPr wrap="square" anchor="t" lIns="0" rIns="0" tIns="0" bIns="0"/>
+          <a:lstStyle/>
+          <a:p>
+            <a:pPr algn="l"/>
+            <a:r>
+              <a:rPr sz="1300" b="0" i="1">
                 <a:solidFill>
                   <a:srgbClr val="54595D"/>
                 </a:solidFill>
                 <a:latin typeface="Calibri"/>
               </a:rPr>
-              <a:t>What is edge computing?</a:t>
-            </a:r>
-          </a:p>
-          <a:p>
-            <a:r>
-              <a:rPr sz="1800" b="1">
-                <a:solidFill>
-                  <a:srgbClr val="03306E"/>
-                </a:solidFill>
-                <a:latin typeface="Calibri"/>
-              </a:rPr>
-              <a:t>Processing data close to where it is collected, e.g. on IoT devices, rather than in a central data centre.</a:t>
-            </a:r>
-          </a:p>
-        </p:txBody>
-      </p:sp>
-      <p:sp>
-        <p:nvSpPr>
-          <p:cNvPr id="12" name="Oval 11"/>
-          <p:cNvSpPr/>
-          <p:nvPr/>
-        </p:nvSpPr>
-        <p:spPr>
-          <a:xfrm>
-            <a:off x="548640" y="5205221"/>
-            <a:ext cx="411480" cy="411480"/>
-          </a:xfrm>
-          <a:prstGeom prst="ellipse">
-            <a:avLst/>
-          </a:prstGeom>
-          <a:solidFill>
-            <a:srgbClr val="F2B705"/>
-          </a:solidFill>
-          <a:ln>
-            <a:noFill/>
-          </a:ln>
-          <a:effectLst/>
-        </p:spPr>
-        <p:style>
-          <a:lnRef idx="1">
-            <a:schemeClr val="accent1"/>
-          </a:lnRef>
-          <a:fillRef idx="3">
-            <a:schemeClr val="accent1"/>
-          </a:fillRef>
-          <a:effectRef idx="2">
-            <a:schemeClr val="accent1"/>
-          </a:effectRef>
-          <a:fontRef idx="minor">
-            <a:schemeClr val="lt1"/>
-          </a:fontRef>
-        </p:style>
-        <p:txBody>
-          <a:bodyPr rtlCol="0" anchor="ctr" lIns="0" rIns="0" tIns="0" bIns="0"/>
-          <a:lstStyle/>
-          <a:p>
-            <a:pPr algn="ctr"/>
-            <a:r>
-              <a:rPr sz="1400" b="1">
-                <a:solidFill>
-                  <a:srgbClr val="202122"/>
-                </a:solidFill>
-                <a:latin typeface="Calibri"/>
-              </a:rPr>
-              <a:t>4</a:t>
-            </a:r>
-          </a:p>
-        </p:txBody>
-      </p:sp>
-      <p:sp>
-        <p:nvSpPr>
-          <p:cNvPr id="13" name="TextBox 12"/>
-          <p:cNvSpPr txBox="1"/>
-          <p:nvPr/>
-        </p:nvSpPr>
-        <p:spPr>
-          <a:xfrm>
-            <a:off x="1234440" y="5186933"/>
-            <a:ext cx="10408615" cy="1030986"/>
-          </a:xfrm>
-          <a:prstGeom prst="rect">
-            <a:avLst/>
-          </a:prstGeom>
-          <a:noFill/>
-        </p:spPr>
-        <p:txBody>
-          <a:bodyPr wrap="square" anchor="t" lIns="0" rIns="0" tIns="0" bIns="0"/>
-          <a:lstStyle/>
-          <a:p>
-            <a:pPr algn="l"/>
-            <a:r>
-              <a:rPr sz="1800" b="0" i="0">
-                <a:solidFill>
-                  <a:srgbClr val="54595D"/>
-                </a:solidFill>
-                <a:latin typeface="Calibri"/>
-              </a:rPr>
-              <a:t>Give one environmental impact of emerging technology.</a:t>
-            </a:r>
-          </a:p>
-          <a:p>
-            <a:r>
-              <a:rPr sz="1800" b="1">
-                <a:solidFill>
-                  <a:srgbClr val="03306E"/>
-                </a:solidFill>
-                <a:latin typeface="Calibri"/>
-              </a:rPr>
-              <a:t>Rare metal use, energy consumption or disposal.</a:t>
+              <a:t>Answer on mini whiteboards or in your book. Answers are in the speaker notes.</a:t>
             </a:r>
           </a:p>
         </p:txBody>
@@ -9155,7 +13298,7 @@
                 </a:solidFill>
                 <a:latin typeface="Cambria"/>
               </a:rPr>
-              <a:t>Activity: Tech pitch and critique</a:t>
+              <a:t>Emerging technologies (1)</a:t>
             </a:r>
           </a:p>
         </p:txBody>
@@ -9228,19 +13371,200 @@
       </p:sp>
       <p:sp>
         <p:nvSpPr>
-          <p:cNvPr id="6" name="Rounded Rectangle 5"/>
+          <p:cNvPr id="6" name="TextBox 5"/>
+          <p:cNvSpPr txBox="1"/>
+          <p:nvPr/>
+        </p:nvSpPr>
+        <p:spPr>
+          <a:xfrm>
+            <a:off x="548640" y="1554480"/>
+            <a:ext cx="6720840" cy="4617720"/>
+          </a:xfrm>
+          <a:prstGeom prst="rect">
+            <a:avLst/>
+          </a:prstGeom>
+          <a:noFill/>
+        </p:spPr>
+        <p:txBody>
+          <a:bodyPr wrap="square" lIns="0" rIns="0" tIns="0" bIns="0">
+            <a:spAutoFit/>
+          </a:bodyPr>
+          <a:lstStyle/>
+          <a:p>
+            <a:pPr>
+              <a:spcAft>
+                <a:spcPts val="1080"/>
+              </a:spcAft>
+            </a:pPr>
+            <a:r>
+              <a:rPr sz="1800" b="0">
+                <a:solidFill>
+                  <a:srgbClr val="202122"/>
+                </a:solidFill>
+                <a:latin typeface="Calibri"/>
+              </a:rPr>
+              <a:t>Several emerging technologies are changing digital support.</a:t>
+            </a:r>
+          </a:p>
+          <a:p>
+            <a:pPr>
+              <a:spcAft>
+                <a:spcPts val="1080"/>
+              </a:spcAft>
+            </a:pPr>
+            <a:r>
+              <a:rPr sz="1800" b="1">
+                <a:solidFill>
+                  <a:srgbClr val="202122"/>
+                </a:solidFill>
+                <a:latin typeface="Calibri"/>
+              </a:rPr>
+              <a:t>Storage and processing:</a:t>
+            </a:r>
+            <a:r>
+              <a:rPr sz="1800" b="0">
+                <a:solidFill>
+                  <a:srgbClr val="202122"/>
+                </a:solidFill>
+                <a:latin typeface="Calibri"/>
+              </a:rPr>
+              <a:t> demand for storage keeps growing, and quantum computing could solve problems ordinary computers can't, which may one day break today's encryption.</a:t>
+            </a:r>
+          </a:p>
+          <a:p>
+            <a:pPr>
+              <a:spcAft>
+                <a:spcPts val="1080"/>
+              </a:spcAft>
+            </a:pPr>
+            <a:r>
+              <a:rPr sz="1800" b="1">
+                <a:solidFill>
+                  <a:srgbClr val="202122"/>
+                </a:solidFill>
+                <a:latin typeface="Calibri"/>
+              </a:rPr>
+              <a:t>Internet of Things:</a:t>
+            </a:r>
+            <a:r>
+              <a:rPr sz="1800" b="0">
+                <a:solidFill>
+                  <a:srgbClr val="202122"/>
+                </a:solidFill>
+                <a:latin typeface="Calibri"/>
+              </a:rPr>
+              <a:t> billions of connected sensors and devices in factories, cities and homes. Edge computing processes their data close to where it's collected, cutting network load and delay.</a:t>
+            </a:r>
+          </a:p>
+          <a:p>
+            <a:pPr>
+              <a:spcAft>
+                <a:spcPts val="1080"/>
+              </a:spcAft>
+            </a:pPr>
+            <a:r>
+              <a:rPr sz="1800" b="1">
+                <a:solidFill>
+                  <a:srgbClr val="202122"/>
+                </a:solidFill>
+                <a:latin typeface="Calibri"/>
+              </a:rPr>
+              <a:t>Artificial intelligence:</a:t>
+            </a:r>
+            <a:r>
+              <a:rPr sz="1800" b="0">
+                <a:solidFill>
+                  <a:srgbClr val="202122"/>
+                </a:solidFill>
+                <a:latin typeface="Calibri"/>
+              </a:rPr>
+              <a:t> machine learning finds patterns in data; generative AI creates text, images and code.</a:t>
+            </a:r>
+          </a:p>
+          <a:p>
+            <a:pPr>
+              <a:spcAft>
+                <a:spcPts val="1080"/>
+              </a:spcAft>
+            </a:pPr>
+            <a:r>
+              <a:rPr sz="1800" b="1">
+                <a:solidFill>
+                  <a:srgbClr val="202122"/>
+                </a:solidFill>
+                <a:latin typeface="Calibri"/>
+              </a:rPr>
+              <a:t>Extended reality:</a:t>
+            </a:r>
+            <a:r>
+              <a:rPr sz="1800" b="0">
+                <a:solidFill>
+                  <a:srgbClr val="202122"/>
+                </a:solidFill>
+                <a:latin typeface="Calibri"/>
+              </a:rPr>
+              <a:t> augmented and virtual reality for training, design and remote support.</a:t>
+            </a:r>
+          </a:p>
+        </p:txBody>
+      </p:sp>
+      <p:sp>
+        <p:nvSpPr>
+          <p:cNvPr id="7" name="Rounded Rectangle 6"/>
           <p:cNvSpPr/>
           <p:nvPr/>
         </p:nvSpPr>
         <p:spPr>
           <a:xfrm>
-            <a:off x="548640" y="1508760"/>
-            <a:ext cx="2011680" cy="457200"/>
+            <a:off x="7772400" y="1554480"/>
+            <a:ext cx="3867912" cy="4526280"/>
           </a:xfrm>
           <a:prstGeom prst="roundRect">
             <a:avLst>
-              <a:gd name="adj" fmla="val 50000"/>
+              <a:gd name="adj" fmla="val 8000"/>
             </a:avLst>
+          </a:prstGeom>
+          <a:solidFill>
+            <a:srgbClr val="03306E"/>
+          </a:solidFill>
+          <a:ln>
+            <a:noFill/>
+          </a:ln>
+          <a:effectLst/>
+        </p:spPr>
+        <p:style>
+          <a:lnRef idx="1">
+            <a:schemeClr val="accent1"/>
+          </a:lnRef>
+          <a:fillRef idx="3">
+            <a:schemeClr val="accent1"/>
+          </a:fillRef>
+          <a:effectRef idx="2">
+            <a:schemeClr val="accent1"/>
+          </a:effectRef>
+          <a:fontRef idx="minor">
+            <a:schemeClr val="lt1"/>
+          </a:fontRef>
+        </p:style>
+        <p:txBody>
+          <a:bodyPr rtlCol="0" anchor="ctr"/>
+          <a:lstStyle/>
+          <a:p/>
+        </p:txBody>
+      </p:sp>
+      <p:sp>
+        <p:nvSpPr>
+          <p:cNvPr id="8" name="Oval 7"/>
+          <p:cNvSpPr/>
+          <p:nvPr/>
+        </p:nvSpPr>
+        <p:spPr>
+          <a:xfrm>
+            <a:off x="8046720" y="1828800"/>
+            <a:ext cx="548640" cy="548640"/>
+          </a:xfrm>
+          <a:prstGeom prst="ellipse">
+            <a:avLst/>
           </a:prstGeom>
           <a:solidFill>
             <a:srgbClr val="F2B705"/>
@@ -9265,580 +13589,84 @@
           </a:fontRef>
         </p:style>
         <p:txBody>
-          <a:bodyPr rtlCol="0" anchor="ctr"/>
-          <a:lstStyle/>
-          <a:p/>
-        </p:txBody>
-      </p:sp>
-      <p:sp>
-        <p:nvSpPr>
-          <p:cNvPr id="7" name="TextBox 6"/>
-          <p:cNvSpPr txBox="1"/>
-          <p:nvPr/>
-        </p:nvSpPr>
-        <p:spPr>
-          <a:xfrm>
-            <a:off x="548640" y="1508760"/>
-            <a:ext cx="2011680" cy="457200"/>
-          </a:xfrm>
-          <a:prstGeom prst="rect">
-            <a:avLst/>
-          </a:prstGeom>
-          <a:noFill/>
-        </p:spPr>
-        <p:txBody>
-          <a:bodyPr wrap="square" anchor="ctr" lIns="0" rIns="0" tIns="0" bIns="0"/>
+          <a:bodyPr rtlCol="0" anchor="ctr" lIns="0" rIns="0" tIns="0" bIns="0"/>
           <a:lstStyle/>
           <a:p>
             <a:pPr algn="ctr"/>
             <a:r>
-              <a:rPr sz="1400" b="1" i="0">
+              <a:rPr sz="1300" b="1">
                 <a:solidFill>
                   <a:srgbClr val="202122"/>
                 </a:solidFill>
                 <a:latin typeface="Calibri"/>
               </a:rPr>
-              <a:t>25 minutes</a:t>
-            </a:r>
-          </a:p>
-        </p:txBody>
-      </p:sp>
-      <p:sp>
-        <p:nvSpPr>
-          <p:cNvPr id="8" name="TextBox 7"/>
-          <p:cNvSpPr txBox="1"/>
-          <p:nvPr/>
-        </p:nvSpPr>
-        <p:spPr>
-          <a:xfrm>
-            <a:off x="2743200" y="1508760"/>
-            <a:ext cx="4754880" cy="457200"/>
-          </a:xfrm>
-          <a:prstGeom prst="rect">
-            <a:avLst/>
-          </a:prstGeom>
-          <a:noFill/>
-        </p:spPr>
-        <p:txBody>
-          <a:bodyPr wrap="square" anchor="ctr" lIns="0" rIns="0" tIns="0" bIns="0"/>
+              <a:t>e.g.</a:t>
+            </a:r>
+          </a:p>
+        </p:txBody>
+      </p:sp>
+      <p:sp>
+        <p:nvSpPr>
+          <p:cNvPr id="9" name="TextBox 8"/>
+          <p:cNvSpPr txBox="1"/>
+          <p:nvPr/>
+        </p:nvSpPr>
+        <p:spPr>
+          <a:xfrm>
+            <a:off x="8046720" y="2560320"/>
+            <a:ext cx="3291840" cy="365760"/>
+          </a:xfrm>
+          <a:prstGeom prst="rect">
+            <a:avLst/>
+          </a:prstGeom>
+          <a:noFill/>
+        </p:spPr>
+        <p:txBody>
+          <a:bodyPr wrap="square" anchor="t" lIns="0" rIns="0" tIns="0" bIns="0"/>
           <a:lstStyle/>
           <a:p>
             <a:pPr algn="l"/>
             <a:r>
-              <a:rPr sz="1400" b="0" i="1">
-                <a:solidFill>
-                  <a:srgbClr val="54595D"/>
-                </a:solidFill>
-                <a:latin typeface="Calibri"/>
-              </a:rPr>
-              <a:t>Small groups</a:t>
-            </a:r>
-          </a:p>
-        </p:txBody>
-      </p:sp>
-      <p:sp>
-        <p:nvSpPr>
-          <p:cNvPr id="9" name="Oval 8"/>
-          <p:cNvSpPr/>
-          <p:nvPr/>
-        </p:nvSpPr>
-        <p:spPr>
-          <a:xfrm>
-            <a:off x="548640" y="2482596"/>
-            <a:ext cx="384048" cy="384048"/>
-          </a:xfrm>
-          <a:prstGeom prst="ellipse">
-            <a:avLst/>
-          </a:prstGeom>
-          <a:solidFill>
-            <a:srgbClr val="0645AD"/>
-          </a:solidFill>
-          <a:ln>
-            <a:noFill/>
-          </a:ln>
-          <a:effectLst/>
-        </p:spPr>
-        <p:style>
-          <a:lnRef idx="1">
-            <a:schemeClr val="accent1"/>
-          </a:lnRef>
-          <a:fillRef idx="3">
-            <a:schemeClr val="accent1"/>
-          </a:fillRef>
-          <a:effectRef idx="2">
-            <a:schemeClr val="accent1"/>
-          </a:effectRef>
-          <a:fontRef idx="minor">
-            <a:schemeClr val="lt1"/>
-          </a:fontRef>
-        </p:style>
-        <p:txBody>
-          <a:bodyPr rtlCol="0" anchor="ctr" lIns="0" rIns="0" tIns="0" bIns="0"/>
-          <a:lstStyle/>
-          <a:p>
-            <a:pPr algn="ctr"/>
-            <a:r>
-              <a:rPr sz="1300" b="1">
+              <a:rPr sz="1300" b="1" i="0">
+                <a:solidFill>
+                  <a:srgbClr val="A9C8F0"/>
+                </a:solidFill>
+                <a:latin typeface="Calibri"/>
+              </a:rPr>
+              <a:t>EXAMPLE</a:t>
+            </a:r>
+          </a:p>
+        </p:txBody>
+      </p:sp>
+      <p:sp>
+        <p:nvSpPr>
+          <p:cNvPr id="10" name="TextBox 9"/>
+          <p:cNvSpPr txBox="1"/>
+          <p:nvPr/>
+        </p:nvSpPr>
+        <p:spPr>
+          <a:xfrm>
+            <a:off x="8046720" y="2971800"/>
+            <a:ext cx="3291840" cy="2971800"/>
+          </a:xfrm>
+          <a:prstGeom prst="rect">
+            <a:avLst/>
+          </a:prstGeom>
+          <a:noFill/>
+        </p:spPr>
+        <p:txBody>
+          <a:bodyPr wrap="square" anchor="t" lIns="0" rIns="0" tIns="0" bIns="0"/>
+          <a:lstStyle/>
+          <a:p>
+            <a:pPr algn="l"/>
+            <a:r>
+              <a:rPr sz="1900" b="0" i="0">
                 <a:solidFill>
                   <a:srgbClr val="FFFFFF"/>
                 </a:solidFill>
-                <a:latin typeface="Calibri"/>
-              </a:rPr>
-              <a:t>1</a:t>
-            </a:r>
-          </a:p>
-        </p:txBody>
-      </p:sp>
-      <p:sp>
-        <p:nvSpPr>
-          <p:cNvPr id="10" name="TextBox 9"/>
-          <p:cNvSpPr txBox="1"/>
-          <p:nvPr/>
-        </p:nvSpPr>
-        <p:spPr>
-          <a:xfrm>
-            <a:off x="1143000" y="2240280"/>
-            <a:ext cx="5943600" cy="868680"/>
-          </a:xfrm>
-          <a:prstGeom prst="rect">
-            <a:avLst/>
-          </a:prstGeom>
-          <a:noFill/>
-        </p:spPr>
-        <p:txBody>
-          <a:bodyPr wrap="square" anchor="ctr" lIns="0" rIns="0" tIns="0" bIns="0"/>
-          <a:lstStyle/>
-          <a:p>
-            <a:pPr algn="l"/>
-            <a:r>
-              <a:rPr sz="1700" b="0" i="0">
-                <a:solidFill>
-                  <a:srgbClr val="202122"/>
-                </a:solidFill>
-                <a:latin typeface="Calibri"/>
-              </a:rPr>
-              <a:t>Each group is given one emerging technology.</a:t>
-            </a:r>
-          </a:p>
-        </p:txBody>
-      </p:sp>
-      <p:sp>
-        <p:nvSpPr>
-          <p:cNvPr id="11" name="Oval 10"/>
-          <p:cNvSpPr/>
-          <p:nvPr/>
-        </p:nvSpPr>
-        <p:spPr>
-          <a:xfrm>
-            <a:off x="548640" y="3461004"/>
-            <a:ext cx="384048" cy="384048"/>
-          </a:xfrm>
-          <a:prstGeom prst="ellipse">
-            <a:avLst/>
-          </a:prstGeom>
-          <a:solidFill>
-            <a:srgbClr val="0645AD"/>
-          </a:solidFill>
-          <a:ln>
-            <a:noFill/>
-          </a:ln>
-          <a:effectLst/>
-        </p:spPr>
-        <p:style>
-          <a:lnRef idx="1">
-            <a:schemeClr val="accent1"/>
-          </a:lnRef>
-          <a:fillRef idx="3">
-            <a:schemeClr val="accent1"/>
-          </a:fillRef>
-          <a:effectRef idx="2">
-            <a:schemeClr val="accent1"/>
-          </a:effectRef>
-          <a:fontRef idx="minor">
-            <a:schemeClr val="lt1"/>
-          </a:fontRef>
-        </p:style>
-        <p:txBody>
-          <a:bodyPr rtlCol="0" anchor="ctr" lIns="0" rIns="0" tIns="0" bIns="0"/>
-          <a:lstStyle/>
-          <a:p>
-            <a:pPr algn="ctr"/>
-            <a:r>
-              <a:rPr sz="1300" b="1">
-                <a:solidFill>
-                  <a:srgbClr val="FFFFFF"/>
-                </a:solidFill>
-                <a:latin typeface="Calibri"/>
-              </a:rPr>
-              <a:t>2</a:t>
-            </a:r>
-          </a:p>
-        </p:txBody>
-      </p:sp>
-      <p:sp>
-        <p:nvSpPr>
-          <p:cNvPr id="12" name="TextBox 11"/>
-          <p:cNvSpPr txBox="1"/>
-          <p:nvPr/>
-        </p:nvSpPr>
-        <p:spPr>
-          <a:xfrm>
-            <a:off x="1143000" y="3218688"/>
-            <a:ext cx="5943600" cy="868680"/>
-          </a:xfrm>
-          <a:prstGeom prst="rect">
-            <a:avLst/>
-          </a:prstGeom>
-          <a:noFill/>
-        </p:spPr>
-        <p:txBody>
-          <a:bodyPr wrap="square" anchor="ctr" lIns="0" rIns="0" tIns="0" bIns="0"/>
-          <a:lstStyle/>
-          <a:p>
-            <a:pPr algn="l"/>
-            <a:r>
-              <a:rPr sz="1700" b="0" i="0">
-                <a:solidFill>
-                  <a:srgbClr val="202122"/>
-                </a:solidFill>
-                <a:latin typeface="Calibri"/>
-              </a:rPr>
-              <a:t>Prepare a one-minute pitch on its benefits to organisations.</a:t>
-            </a:r>
-          </a:p>
-        </p:txBody>
-      </p:sp>
-      <p:sp>
-        <p:nvSpPr>
-          <p:cNvPr id="13" name="Oval 12"/>
-          <p:cNvSpPr/>
-          <p:nvPr/>
-        </p:nvSpPr>
-        <p:spPr>
-          <a:xfrm>
-            <a:off x="548640" y="4439412"/>
-            <a:ext cx="384048" cy="384048"/>
-          </a:xfrm>
-          <a:prstGeom prst="ellipse">
-            <a:avLst/>
-          </a:prstGeom>
-          <a:solidFill>
-            <a:srgbClr val="0645AD"/>
-          </a:solidFill>
-          <a:ln>
-            <a:noFill/>
-          </a:ln>
-          <a:effectLst/>
-        </p:spPr>
-        <p:style>
-          <a:lnRef idx="1">
-            <a:schemeClr val="accent1"/>
-          </a:lnRef>
-          <a:fillRef idx="3">
-            <a:schemeClr val="accent1"/>
-          </a:fillRef>
-          <a:effectRef idx="2">
-            <a:schemeClr val="accent1"/>
-          </a:effectRef>
-          <a:fontRef idx="minor">
-            <a:schemeClr val="lt1"/>
-          </a:fontRef>
-        </p:style>
-        <p:txBody>
-          <a:bodyPr rtlCol="0" anchor="ctr" lIns="0" rIns="0" tIns="0" bIns="0"/>
-          <a:lstStyle/>
-          <a:p>
-            <a:pPr algn="ctr"/>
-            <a:r>
-              <a:rPr sz="1300" b="1">
-                <a:solidFill>
-                  <a:srgbClr val="FFFFFF"/>
-                </a:solidFill>
-                <a:latin typeface="Calibri"/>
-              </a:rPr>
-              <a:t>3</a:t>
-            </a:r>
-          </a:p>
-        </p:txBody>
-      </p:sp>
-      <p:sp>
-        <p:nvSpPr>
-          <p:cNvPr id="14" name="TextBox 13"/>
-          <p:cNvSpPr txBox="1"/>
-          <p:nvPr/>
-        </p:nvSpPr>
-        <p:spPr>
-          <a:xfrm>
-            <a:off x="1143000" y="4197096"/>
-            <a:ext cx="5943600" cy="868680"/>
-          </a:xfrm>
-          <a:prstGeom prst="rect">
-            <a:avLst/>
-          </a:prstGeom>
-          <a:noFill/>
-        </p:spPr>
-        <p:txBody>
-          <a:bodyPr wrap="square" anchor="ctr" lIns="0" rIns="0" tIns="0" bIns="0"/>
-          <a:lstStyle/>
-          <a:p>
-            <a:pPr algn="l"/>
-            <a:r>
-              <a:rPr sz="1700" b="0" i="0">
-                <a:solidFill>
-                  <a:srgbClr val="202122"/>
-                </a:solidFill>
-                <a:latin typeface="Calibri"/>
-              </a:rPr>
-              <a:t>Another group responds with its risks to individuals and society.</a:t>
-            </a:r>
-          </a:p>
-        </p:txBody>
-      </p:sp>
-      <p:sp>
-        <p:nvSpPr>
-          <p:cNvPr id="15" name="Oval 14"/>
-          <p:cNvSpPr/>
-          <p:nvPr/>
-        </p:nvSpPr>
-        <p:spPr>
-          <a:xfrm>
-            <a:off x="548640" y="5417820"/>
-            <a:ext cx="384048" cy="384048"/>
-          </a:xfrm>
-          <a:prstGeom prst="ellipse">
-            <a:avLst/>
-          </a:prstGeom>
-          <a:solidFill>
-            <a:srgbClr val="0645AD"/>
-          </a:solidFill>
-          <a:ln>
-            <a:noFill/>
-          </a:ln>
-          <a:effectLst/>
-        </p:spPr>
-        <p:style>
-          <a:lnRef idx="1">
-            <a:schemeClr val="accent1"/>
-          </a:lnRef>
-          <a:fillRef idx="3">
-            <a:schemeClr val="accent1"/>
-          </a:fillRef>
-          <a:effectRef idx="2">
-            <a:schemeClr val="accent1"/>
-          </a:effectRef>
-          <a:fontRef idx="minor">
-            <a:schemeClr val="lt1"/>
-          </a:fontRef>
-        </p:style>
-        <p:txBody>
-          <a:bodyPr rtlCol="0" anchor="ctr" lIns="0" rIns="0" tIns="0" bIns="0"/>
-          <a:lstStyle/>
-          <a:p>
-            <a:pPr algn="ctr"/>
-            <a:r>
-              <a:rPr sz="1300" b="1">
-                <a:solidFill>
-                  <a:srgbClr val="FFFFFF"/>
-                </a:solidFill>
-                <a:latin typeface="Calibri"/>
-              </a:rPr>
-              <a:t>4</a:t>
-            </a:r>
-          </a:p>
-        </p:txBody>
-      </p:sp>
-      <p:sp>
-        <p:nvSpPr>
-          <p:cNvPr id="16" name="TextBox 15"/>
-          <p:cNvSpPr txBox="1"/>
-          <p:nvPr/>
-        </p:nvSpPr>
-        <p:spPr>
-          <a:xfrm>
-            <a:off x="1143000" y="5175504"/>
-            <a:ext cx="5943600" cy="868680"/>
-          </a:xfrm>
-          <a:prstGeom prst="rect">
-            <a:avLst/>
-          </a:prstGeom>
-          <a:noFill/>
-        </p:spPr>
-        <p:txBody>
-          <a:bodyPr wrap="square" anchor="ctr" lIns="0" rIns="0" tIns="0" bIns="0"/>
-          <a:lstStyle/>
-          <a:p>
-            <a:pPr algn="l"/>
-            <a:r>
-              <a:rPr sz="1700" b="0" i="0">
-                <a:solidFill>
-                  <a:srgbClr val="202122"/>
-                </a:solidFill>
-                <a:latin typeface="Calibri"/>
-              </a:rPr>
-              <a:t>The class votes on whether benefits outweigh risks.</a:t>
-            </a:r>
-          </a:p>
-        </p:txBody>
-      </p:sp>
-      <p:sp>
-        <p:nvSpPr>
-          <p:cNvPr id="17" name="Rounded Rectangle 16"/>
-          <p:cNvSpPr/>
-          <p:nvPr/>
-        </p:nvSpPr>
-        <p:spPr>
-          <a:xfrm>
-            <a:off x="7772400" y="1508760"/>
-            <a:ext cx="3867912" cy="4572000"/>
-          </a:xfrm>
-          <a:prstGeom prst="roundRect">
-            <a:avLst>
-              <a:gd name="adj" fmla="val 8000"/>
-            </a:avLst>
-          </a:prstGeom>
-          <a:solidFill>
-            <a:srgbClr val="EAF3FF"/>
-          </a:solidFill>
-          <a:ln>
-            <a:noFill/>
-          </a:ln>
-          <a:effectLst/>
-        </p:spPr>
-        <p:style>
-          <a:lnRef idx="1">
-            <a:schemeClr val="accent1"/>
-          </a:lnRef>
-          <a:fillRef idx="3">
-            <a:schemeClr val="accent1"/>
-          </a:fillRef>
-          <a:effectRef idx="2">
-            <a:schemeClr val="accent1"/>
-          </a:effectRef>
-          <a:fontRef idx="minor">
-            <a:schemeClr val="lt1"/>
-          </a:fontRef>
-        </p:style>
-        <p:txBody>
-          <a:bodyPr rtlCol="0" anchor="ctr"/>
-          <a:lstStyle/>
-          <a:p/>
-        </p:txBody>
-      </p:sp>
-      <p:sp>
-        <p:nvSpPr>
-          <p:cNvPr id="18" name="TextBox 17"/>
-          <p:cNvSpPr txBox="1"/>
-          <p:nvPr/>
-        </p:nvSpPr>
-        <p:spPr>
-          <a:xfrm>
-            <a:off x="8046720" y="1737360"/>
-            <a:ext cx="3291840" cy="365760"/>
-          </a:xfrm>
-          <a:prstGeom prst="rect">
-            <a:avLst/>
-          </a:prstGeom>
-          <a:noFill/>
-        </p:spPr>
-        <p:txBody>
-          <a:bodyPr wrap="square" anchor="t" lIns="0" rIns="0" tIns="0" bIns="0"/>
-          <a:lstStyle/>
-          <a:p>
-            <a:pPr algn="l"/>
-            <a:r>
-              <a:rPr sz="1300" b="1" i="0">
-                <a:solidFill>
-                  <a:srgbClr val="0645AD"/>
-                </a:solidFill>
-                <a:latin typeface="Calibri"/>
-              </a:rPr>
-              <a:t>SUCCESS CRITERIA</a:t>
-            </a:r>
-          </a:p>
-        </p:txBody>
-      </p:sp>
-      <p:sp>
-        <p:nvSpPr>
-          <p:cNvPr id="19" name="TextBox 18"/>
-          <p:cNvSpPr txBox="1"/>
-          <p:nvPr/>
-        </p:nvSpPr>
-        <p:spPr>
-          <a:xfrm>
-            <a:off x="8046720" y="2240280"/>
-            <a:ext cx="3337560" cy="3657600"/>
-          </a:xfrm>
-          <a:prstGeom prst="rect">
-            <a:avLst/>
-          </a:prstGeom>
-          <a:noFill/>
-        </p:spPr>
-        <p:txBody>
-          <a:bodyPr wrap="square" lIns="0" rIns="0" tIns="0" bIns="0">
-            <a:spAutoFit/>
-          </a:bodyPr>
-          <a:lstStyle/>
-          <a:p>
-            <a:pPr marL="274320" indent="-274320">
-              <a:spcAft>
-                <a:spcPts val="810"/>
-              </a:spcAft>
-              <a:buClr>
-                <a:srgbClr val="0645AD"/>
-              </a:buClr>
-              <a:buFont typeface="Arial"/>
-              <a:buChar char="•"/>
-            </a:pPr>
-            <a:r>
-              <a:rPr sz="1800" b="0">
-                <a:solidFill>
-                  <a:srgbClr val="202122"/>
-                </a:solidFill>
-                <a:latin typeface="Calibri"/>
-              </a:rPr>
-              <a:t>Covers organisations, individuals and society</a:t>
-            </a:r>
-          </a:p>
-          <a:p>
-            <a:pPr marL="274320" indent="-274320">
-              <a:spcAft>
-                <a:spcPts val="810"/>
-              </a:spcAft>
-              <a:buClr>
-                <a:srgbClr val="0645AD"/>
-              </a:buClr>
-              <a:buFont typeface="Arial"/>
-              <a:buChar char="•"/>
-            </a:pPr>
-            <a:r>
-              <a:rPr sz="1800" b="0">
-                <a:solidFill>
-                  <a:srgbClr val="202122"/>
-                </a:solidFill>
-                <a:latin typeface="Calibri"/>
-              </a:rPr>
-              <a:t>Considers inclusion and the environment</a:t>
-            </a:r>
-          </a:p>
-          <a:p>
-            <a:pPr marL="274320" indent="-274320">
-              <a:spcAft>
-                <a:spcPts val="810"/>
-              </a:spcAft>
-              <a:buClr>
-                <a:srgbClr val="0645AD"/>
-              </a:buClr>
-              <a:buFont typeface="Arial"/>
-              <a:buChar char="•"/>
-            </a:pPr>
-            <a:r>
-              <a:rPr sz="1800" b="0">
-                <a:solidFill>
-                  <a:srgbClr val="202122"/>
-                </a:solidFill>
-                <a:latin typeface="Calibri"/>
-              </a:rPr>
-              <a:t>Uses real examples</a:t>
+                <a:latin typeface="Cambria"/>
+              </a:rPr>
+              <a:t>An engineer wearing AR glasses sees repair instructions overlaid on a faulty server, while an expert watches remotely and guides them.</a:t>
             </a:r>
           </a:p>
         </p:txBody>
